--- a/docs/第8章 EM算法及其应用.pptx
+++ b/docs/第8章 EM算法及其应用.pptx
@@ -5,42 +5,42 @@
     <p:sldMasterId id="2147483648" r:id="rId1"/>
   </p:sldMasterIdLst>
   <p:sldIdLst>
-    <p:sldId id="261" r:id="rId3"/>
-    <p:sldId id="258" r:id="rId4"/>
-    <p:sldId id="259" r:id="rId5"/>
-    <p:sldId id="262" r:id="rId6"/>
-    <p:sldId id="265" r:id="rId7"/>
-    <p:sldId id="266" r:id="rId8"/>
-    <p:sldId id="267" r:id="rId9"/>
-    <p:sldId id="268" r:id="rId10"/>
-    <p:sldId id="269" r:id="rId11"/>
-    <p:sldId id="270" r:id="rId12"/>
-    <p:sldId id="271" r:id="rId13"/>
-    <p:sldId id="272" r:id="rId14"/>
-    <p:sldId id="273" r:id="rId15"/>
-    <p:sldId id="274" r:id="rId16"/>
-    <p:sldId id="275" r:id="rId17"/>
-    <p:sldId id="276" r:id="rId18"/>
-    <p:sldId id="277" r:id="rId19"/>
-    <p:sldId id="278" r:id="rId20"/>
-    <p:sldId id="279" r:id="rId21"/>
-    <p:sldId id="280" r:id="rId22"/>
-    <p:sldId id="281" r:id="rId23"/>
-    <p:sldId id="282" r:id="rId24"/>
-    <p:sldId id="283" r:id="rId25"/>
-    <p:sldId id="284" r:id="rId26"/>
-    <p:sldId id="285" r:id="rId27"/>
-    <p:sldId id="286" r:id="rId28"/>
-    <p:sldId id="287" r:id="rId29"/>
-    <p:sldId id="288" r:id="rId30"/>
-    <p:sldId id="289" r:id="rId31"/>
-    <p:sldId id="290" r:id="rId32"/>
-    <p:sldId id="291" r:id="rId33"/>
-    <p:sldId id="292" r:id="rId34"/>
-    <p:sldId id="293" r:id="rId35"/>
-    <p:sldId id="294" r:id="rId36"/>
-    <p:sldId id="295" r:id="rId37"/>
-    <p:sldId id="296" r:id="rId38"/>
+    <p:sldId id="261" r:id="rId2"/>
+    <p:sldId id="258" r:id="rId3"/>
+    <p:sldId id="259" r:id="rId4"/>
+    <p:sldId id="262" r:id="rId5"/>
+    <p:sldId id="265" r:id="rId6"/>
+    <p:sldId id="266" r:id="rId7"/>
+    <p:sldId id="267" r:id="rId8"/>
+    <p:sldId id="268" r:id="rId9"/>
+    <p:sldId id="269" r:id="rId10"/>
+    <p:sldId id="270" r:id="rId11"/>
+    <p:sldId id="271" r:id="rId12"/>
+    <p:sldId id="272" r:id="rId13"/>
+    <p:sldId id="273" r:id="rId14"/>
+    <p:sldId id="274" r:id="rId15"/>
+    <p:sldId id="275" r:id="rId16"/>
+    <p:sldId id="276" r:id="rId17"/>
+    <p:sldId id="277" r:id="rId18"/>
+    <p:sldId id="278" r:id="rId19"/>
+    <p:sldId id="279" r:id="rId20"/>
+    <p:sldId id="280" r:id="rId21"/>
+    <p:sldId id="281" r:id="rId22"/>
+    <p:sldId id="282" r:id="rId23"/>
+    <p:sldId id="283" r:id="rId24"/>
+    <p:sldId id="284" r:id="rId25"/>
+    <p:sldId id="285" r:id="rId26"/>
+    <p:sldId id="286" r:id="rId27"/>
+    <p:sldId id="287" r:id="rId28"/>
+    <p:sldId id="288" r:id="rId29"/>
+    <p:sldId id="289" r:id="rId30"/>
+    <p:sldId id="290" r:id="rId31"/>
+    <p:sldId id="291" r:id="rId32"/>
+    <p:sldId id="292" r:id="rId33"/>
+    <p:sldId id="293" r:id="rId34"/>
+    <p:sldId id="294" r:id="rId35"/>
+    <p:sldId id="295" r:id="rId36"/>
+    <p:sldId id="296" r:id="rId37"/>
   </p:sldIdLst>
   <p:sldSz cx="12192000" cy="6858000"/>
   <p:notesSz cx="6858000" cy="9144000"/>
@@ -139,6 +139,22 @@
       </a:defRPr>
     </a:lvl9pPr>
   </p:defaultTextStyle>
+  <p:extLst>
+    <p:ext uri="{EFAFB233-063F-42B5-8137-9DF3F51BA10A}">
+      <p15:sldGuideLst xmlns:p15="http://schemas.microsoft.com/office/powerpoint/2012/main">
+        <p15:guide id="1" orient="horz" pos="2160" userDrawn="1">
+          <p15:clr>
+            <a:srgbClr val="A4A3A4"/>
+          </p15:clr>
+        </p15:guide>
+        <p15:guide id="2" pos="3840" userDrawn="1">
+          <p15:clr>
+            <a:srgbClr val="A4A3A4"/>
+          </p15:clr>
+        </p15:guide>
+      </p15:sldGuideLst>
+    </p:ext>
+  </p:extLst>
 </p:presentation>
 </file>
 
@@ -184,10 +200,9 @@
           </a:lstStyle>
           <a:p>
             <a:r>
-              <a:rPr lang="zh-CN" altLang="en-US" smtClean="0"/>
+              <a:rPr lang="zh-CN" altLang="en-US"/>
               <a:t>单击此处编辑母版标题样式</a:t>
             </a:r>
-            <a:endParaRPr lang="zh-CN" altLang="en-US"/>
           </a:p>
         </p:txBody>
       </p:sp>
@@ -249,10 +264,9 @@
           </a:lstStyle>
           <a:p>
             <a:r>
-              <a:rPr lang="zh-CN" altLang="en-US" smtClean="0"/>
+              <a:rPr lang="zh-CN" altLang="en-US"/>
               <a:t>单击以编辑母版副标题样式</a:t>
             </a:r>
-            <a:endParaRPr lang="zh-CN" altLang="en-US"/>
           </a:p>
         </p:txBody>
       </p:sp>
@@ -273,6 +287,7 @@
           <a:p>
             <a:fld id="{E5ACCDA3-AF6E-43B7-BFD8-4B49DAB3F0EC}" type="datetimeFigureOut">
               <a:rPr lang="zh-CN" altLang="en-US" smtClean="0"/>
+              <a:t>2025/4/5</a:t>
             </a:fld>
             <a:endParaRPr lang="zh-CN" altLang="en-US"/>
           </a:p>
@@ -314,6 +329,7 @@
           <a:p>
             <a:fld id="{270A8B1F-62E6-4FD6-A0B0-93288694D17F}" type="slidenum">
               <a:rPr lang="zh-CN" altLang="en-US" smtClean="0"/>
+              <a:t>‹#›</a:t>
             </a:fld>
             <a:endParaRPr lang="zh-CN" altLang="en-US"/>
           </a:p>
@@ -360,10 +376,9 @@
           <a:lstStyle/>
           <a:p>
             <a:r>
-              <a:rPr lang="zh-CN" altLang="en-US" smtClean="0"/>
+              <a:rPr lang="zh-CN" altLang="en-US"/>
               <a:t>单击此处编辑母版标题样式</a:t>
             </a:r>
-            <a:endParaRPr lang="zh-CN" altLang="en-US"/>
           </a:p>
         </p:txBody>
       </p:sp>
@@ -384,42 +399,37 @@
           <a:p>
             <a:pPr lvl="0"/>
             <a:r>
-              <a:rPr lang="zh-CN" altLang="en-US" smtClean="0"/>
+              <a:rPr lang="zh-CN" altLang="en-US"/>
               <a:t>编辑母版文本样式</a:t>
             </a:r>
-            <a:endParaRPr lang="zh-CN" altLang="en-US" smtClean="0"/>
           </a:p>
           <a:p>
             <a:pPr lvl="1"/>
             <a:r>
-              <a:rPr lang="zh-CN" altLang="en-US" smtClean="0"/>
+              <a:rPr lang="zh-CN" altLang="en-US"/>
               <a:t>第二级</a:t>
             </a:r>
-            <a:endParaRPr lang="zh-CN" altLang="en-US" smtClean="0"/>
           </a:p>
           <a:p>
             <a:pPr lvl="2"/>
             <a:r>
-              <a:rPr lang="zh-CN" altLang="en-US" smtClean="0"/>
+              <a:rPr lang="zh-CN" altLang="en-US"/>
               <a:t>第三级</a:t>
             </a:r>
-            <a:endParaRPr lang="zh-CN" altLang="en-US" smtClean="0"/>
           </a:p>
           <a:p>
             <a:pPr lvl="3"/>
             <a:r>
-              <a:rPr lang="zh-CN" altLang="en-US" smtClean="0"/>
+              <a:rPr lang="zh-CN" altLang="en-US"/>
               <a:t>第四级</a:t>
             </a:r>
-            <a:endParaRPr lang="zh-CN" altLang="en-US" smtClean="0"/>
           </a:p>
           <a:p>
             <a:pPr lvl="4"/>
             <a:r>
-              <a:rPr lang="zh-CN" altLang="en-US" smtClean="0"/>
+              <a:rPr lang="zh-CN" altLang="en-US"/>
               <a:t>第五级</a:t>
             </a:r>
-            <a:endParaRPr lang="zh-CN" altLang="en-US"/>
           </a:p>
         </p:txBody>
       </p:sp>
@@ -440,6 +450,7 @@
           <a:p>
             <a:fld id="{E5ACCDA3-AF6E-43B7-BFD8-4B49DAB3F0EC}" type="datetimeFigureOut">
               <a:rPr lang="zh-CN" altLang="en-US" smtClean="0"/>
+              <a:t>2025/4/5</a:t>
             </a:fld>
             <a:endParaRPr lang="zh-CN" altLang="en-US"/>
           </a:p>
@@ -481,6 +492,7 @@
           <a:p>
             <a:fld id="{270A8B1F-62E6-4FD6-A0B0-93288694D17F}" type="slidenum">
               <a:rPr lang="zh-CN" altLang="en-US" smtClean="0"/>
+              <a:t>‹#›</a:t>
             </a:fld>
             <a:endParaRPr lang="zh-CN" altLang="en-US"/>
           </a:p>
@@ -532,10 +544,9 @@
           <a:lstStyle/>
           <a:p>
             <a:r>
-              <a:rPr lang="zh-CN" altLang="en-US" smtClean="0"/>
+              <a:rPr lang="zh-CN" altLang="en-US"/>
               <a:t>单击此处编辑母版标题样式</a:t>
             </a:r>
-            <a:endParaRPr lang="zh-CN" altLang="en-US"/>
           </a:p>
         </p:txBody>
       </p:sp>
@@ -561,42 +572,37 @@
           <a:p>
             <a:pPr lvl="0"/>
             <a:r>
-              <a:rPr lang="zh-CN" altLang="en-US" smtClean="0"/>
+              <a:rPr lang="zh-CN" altLang="en-US"/>
               <a:t>编辑母版文本样式</a:t>
             </a:r>
-            <a:endParaRPr lang="zh-CN" altLang="en-US" smtClean="0"/>
           </a:p>
           <a:p>
             <a:pPr lvl="1"/>
             <a:r>
-              <a:rPr lang="zh-CN" altLang="en-US" smtClean="0"/>
+              <a:rPr lang="zh-CN" altLang="en-US"/>
               <a:t>第二级</a:t>
             </a:r>
-            <a:endParaRPr lang="zh-CN" altLang="en-US" smtClean="0"/>
           </a:p>
           <a:p>
             <a:pPr lvl="2"/>
             <a:r>
-              <a:rPr lang="zh-CN" altLang="en-US" smtClean="0"/>
+              <a:rPr lang="zh-CN" altLang="en-US"/>
               <a:t>第三级</a:t>
             </a:r>
-            <a:endParaRPr lang="zh-CN" altLang="en-US" smtClean="0"/>
           </a:p>
           <a:p>
             <a:pPr lvl="3"/>
             <a:r>
-              <a:rPr lang="zh-CN" altLang="en-US" smtClean="0"/>
+              <a:rPr lang="zh-CN" altLang="en-US"/>
               <a:t>第四级</a:t>
             </a:r>
-            <a:endParaRPr lang="zh-CN" altLang="en-US" smtClean="0"/>
           </a:p>
           <a:p>
             <a:pPr lvl="4"/>
             <a:r>
-              <a:rPr lang="zh-CN" altLang="en-US" smtClean="0"/>
+              <a:rPr lang="zh-CN" altLang="en-US"/>
               <a:t>第五级</a:t>
             </a:r>
-            <a:endParaRPr lang="zh-CN" altLang="en-US"/>
           </a:p>
         </p:txBody>
       </p:sp>
@@ -617,6 +623,7 @@
           <a:p>
             <a:fld id="{E5ACCDA3-AF6E-43B7-BFD8-4B49DAB3F0EC}" type="datetimeFigureOut">
               <a:rPr lang="zh-CN" altLang="en-US" smtClean="0"/>
+              <a:t>2025/4/5</a:t>
             </a:fld>
             <a:endParaRPr lang="zh-CN" altLang="en-US"/>
           </a:p>
@@ -658,6 +665,7 @@
           <a:p>
             <a:fld id="{270A8B1F-62E6-4FD6-A0B0-93288694D17F}" type="slidenum">
               <a:rPr lang="zh-CN" altLang="en-US" smtClean="0"/>
+              <a:t>‹#›</a:t>
             </a:fld>
             <a:endParaRPr lang="zh-CN" altLang="en-US"/>
           </a:p>
@@ -744,6 +752,7 @@
           <a:p>
             <a:fld id="{CEBA35BA-D686-4C5B-8934-1BF98F74796D}" type="datetimeFigureOut">
               <a:rPr lang="zh-CN" altLang="en-US" smtClean="0"/>
+              <a:t>2025/4/5</a:t>
             </a:fld>
             <a:endParaRPr lang="zh-CN" altLang="en-US"/>
           </a:p>
@@ -785,6 +794,7 @@
           <a:p>
             <a:fld id="{62DACDF0-C2BD-4492-A170-FFA0B0A5720C}" type="slidenum">
               <a:rPr lang="zh-CN" altLang="en-US" smtClean="0"/>
+              <a:t>‹#›</a:t>
             </a:fld>
             <a:endParaRPr lang="zh-CN" altLang="en-US"/>
           </a:p>
@@ -855,10 +865,9 @@
           <a:lstStyle/>
           <a:p>
             <a:r>
-              <a:rPr lang="zh-CN" altLang="en-US" smtClean="0"/>
+              <a:rPr lang="zh-CN" altLang="en-US"/>
               <a:t>单击此处编辑母版标题样式</a:t>
             </a:r>
-            <a:endParaRPr lang="zh-CN" altLang="en-US"/>
           </a:p>
         </p:txBody>
       </p:sp>
@@ -879,42 +888,37 @@
           <a:p>
             <a:pPr lvl="0"/>
             <a:r>
-              <a:rPr lang="zh-CN" altLang="en-US" smtClean="0"/>
+              <a:rPr lang="zh-CN" altLang="en-US"/>
               <a:t>编辑母版文本样式</a:t>
             </a:r>
-            <a:endParaRPr lang="zh-CN" altLang="en-US" smtClean="0"/>
           </a:p>
           <a:p>
             <a:pPr lvl="1"/>
             <a:r>
-              <a:rPr lang="zh-CN" altLang="en-US" smtClean="0"/>
+              <a:rPr lang="zh-CN" altLang="en-US"/>
               <a:t>第二级</a:t>
             </a:r>
-            <a:endParaRPr lang="zh-CN" altLang="en-US" smtClean="0"/>
           </a:p>
           <a:p>
             <a:pPr lvl="2"/>
             <a:r>
-              <a:rPr lang="zh-CN" altLang="en-US" smtClean="0"/>
+              <a:rPr lang="zh-CN" altLang="en-US"/>
               <a:t>第三级</a:t>
             </a:r>
-            <a:endParaRPr lang="zh-CN" altLang="en-US" smtClean="0"/>
           </a:p>
           <a:p>
             <a:pPr lvl="3"/>
             <a:r>
-              <a:rPr lang="zh-CN" altLang="en-US" smtClean="0"/>
+              <a:rPr lang="zh-CN" altLang="en-US"/>
               <a:t>第四级</a:t>
             </a:r>
-            <a:endParaRPr lang="zh-CN" altLang="en-US" smtClean="0"/>
           </a:p>
           <a:p>
             <a:pPr lvl="4"/>
             <a:r>
-              <a:rPr lang="zh-CN" altLang="en-US" smtClean="0"/>
+              <a:rPr lang="zh-CN" altLang="en-US"/>
               <a:t>第五级</a:t>
             </a:r>
-            <a:endParaRPr lang="zh-CN" altLang="en-US"/>
           </a:p>
         </p:txBody>
       </p:sp>
@@ -935,6 +939,7 @@
           <a:p>
             <a:fld id="{E5ACCDA3-AF6E-43B7-BFD8-4B49DAB3F0EC}" type="datetimeFigureOut">
               <a:rPr lang="zh-CN" altLang="en-US" smtClean="0"/>
+              <a:t>2025/4/5</a:t>
             </a:fld>
             <a:endParaRPr lang="zh-CN" altLang="en-US"/>
           </a:p>
@@ -976,6 +981,7 @@
           <a:p>
             <a:fld id="{270A8B1F-62E6-4FD6-A0B0-93288694D17F}" type="slidenum">
               <a:rPr lang="zh-CN" altLang="en-US" smtClean="0"/>
+              <a:t>‹#›</a:t>
             </a:fld>
             <a:endParaRPr lang="zh-CN" altLang="en-US"/>
           </a:p>
@@ -1031,10 +1037,9 @@
           </a:lstStyle>
           <a:p>
             <a:r>
-              <a:rPr lang="zh-CN" altLang="en-US" smtClean="0"/>
+              <a:rPr lang="zh-CN" altLang="en-US"/>
               <a:t>单击此处编辑母版标题样式</a:t>
             </a:r>
-            <a:endParaRPr lang="zh-CN" altLang="en-US"/>
           </a:p>
         </p:txBody>
       </p:sp>
@@ -1151,10 +1156,9 @@
           <a:p>
             <a:pPr lvl="0"/>
             <a:r>
-              <a:rPr lang="zh-CN" altLang="en-US" smtClean="0"/>
+              <a:rPr lang="zh-CN" altLang="en-US"/>
               <a:t>编辑母版文本样式</a:t>
             </a:r>
-            <a:endParaRPr lang="zh-CN" altLang="en-US" smtClean="0"/>
           </a:p>
         </p:txBody>
       </p:sp>
@@ -1175,6 +1179,7 @@
           <a:p>
             <a:fld id="{E5ACCDA3-AF6E-43B7-BFD8-4B49DAB3F0EC}" type="datetimeFigureOut">
               <a:rPr lang="zh-CN" altLang="en-US" smtClean="0"/>
+              <a:t>2025/4/5</a:t>
             </a:fld>
             <a:endParaRPr lang="zh-CN" altLang="en-US"/>
           </a:p>
@@ -1216,6 +1221,7 @@
           <a:p>
             <a:fld id="{270A8B1F-62E6-4FD6-A0B0-93288694D17F}" type="slidenum">
               <a:rPr lang="zh-CN" altLang="en-US" smtClean="0"/>
+              <a:t>‹#›</a:t>
             </a:fld>
             <a:endParaRPr lang="zh-CN" altLang="en-US"/>
           </a:p>
@@ -1262,10 +1268,9 @@
           <a:lstStyle/>
           <a:p>
             <a:r>
-              <a:rPr lang="zh-CN" altLang="en-US" smtClean="0"/>
+              <a:rPr lang="zh-CN" altLang="en-US"/>
               <a:t>单击此处编辑母版标题样式</a:t>
             </a:r>
-            <a:endParaRPr lang="zh-CN" altLang="en-US"/>
           </a:p>
         </p:txBody>
       </p:sp>
@@ -1291,42 +1296,37 @@
           <a:p>
             <a:pPr lvl="0"/>
             <a:r>
-              <a:rPr lang="zh-CN" altLang="en-US" smtClean="0"/>
+              <a:rPr lang="zh-CN" altLang="en-US"/>
               <a:t>编辑母版文本样式</a:t>
             </a:r>
-            <a:endParaRPr lang="zh-CN" altLang="en-US" smtClean="0"/>
           </a:p>
           <a:p>
             <a:pPr lvl="1"/>
             <a:r>
-              <a:rPr lang="zh-CN" altLang="en-US" smtClean="0"/>
+              <a:rPr lang="zh-CN" altLang="en-US"/>
               <a:t>第二级</a:t>
             </a:r>
-            <a:endParaRPr lang="zh-CN" altLang="en-US" smtClean="0"/>
           </a:p>
           <a:p>
             <a:pPr lvl="2"/>
             <a:r>
-              <a:rPr lang="zh-CN" altLang="en-US" smtClean="0"/>
+              <a:rPr lang="zh-CN" altLang="en-US"/>
               <a:t>第三级</a:t>
             </a:r>
-            <a:endParaRPr lang="zh-CN" altLang="en-US" smtClean="0"/>
           </a:p>
           <a:p>
             <a:pPr lvl="3"/>
             <a:r>
-              <a:rPr lang="zh-CN" altLang="en-US" smtClean="0"/>
+              <a:rPr lang="zh-CN" altLang="en-US"/>
               <a:t>第四级</a:t>
             </a:r>
-            <a:endParaRPr lang="zh-CN" altLang="en-US" smtClean="0"/>
           </a:p>
           <a:p>
             <a:pPr lvl="4"/>
             <a:r>
-              <a:rPr lang="zh-CN" altLang="en-US" smtClean="0"/>
+              <a:rPr lang="zh-CN" altLang="en-US"/>
               <a:t>第五级</a:t>
             </a:r>
-            <a:endParaRPr lang="zh-CN" altLang="en-US"/>
           </a:p>
         </p:txBody>
       </p:sp>
@@ -1352,42 +1352,37 @@
           <a:p>
             <a:pPr lvl="0"/>
             <a:r>
-              <a:rPr lang="zh-CN" altLang="en-US" smtClean="0"/>
+              <a:rPr lang="zh-CN" altLang="en-US"/>
               <a:t>编辑母版文本样式</a:t>
             </a:r>
-            <a:endParaRPr lang="zh-CN" altLang="en-US" smtClean="0"/>
           </a:p>
           <a:p>
             <a:pPr lvl="1"/>
             <a:r>
-              <a:rPr lang="zh-CN" altLang="en-US" smtClean="0"/>
+              <a:rPr lang="zh-CN" altLang="en-US"/>
               <a:t>第二级</a:t>
             </a:r>
-            <a:endParaRPr lang="zh-CN" altLang="en-US" smtClean="0"/>
           </a:p>
           <a:p>
             <a:pPr lvl="2"/>
             <a:r>
-              <a:rPr lang="zh-CN" altLang="en-US" smtClean="0"/>
+              <a:rPr lang="zh-CN" altLang="en-US"/>
               <a:t>第三级</a:t>
             </a:r>
-            <a:endParaRPr lang="zh-CN" altLang="en-US" smtClean="0"/>
           </a:p>
           <a:p>
             <a:pPr lvl="3"/>
             <a:r>
-              <a:rPr lang="zh-CN" altLang="en-US" smtClean="0"/>
+              <a:rPr lang="zh-CN" altLang="en-US"/>
               <a:t>第四级</a:t>
             </a:r>
-            <a:endParaRPr lang="zh-CN" altLang="en-US" smtClean="0"/>
           </a:p>
           <a:p>
             <a:pPr lvl="4"/>
             <a:r>
-              <a:rPr lang="zh-CN" altLang="en-US" smtClean="0"/>
+              <a:rPr lang="zh-CN" altLang="en-US"/>
               <a:t>第五级</a:t>
             </a:r>
-            <a:endParaRPr lang="zh-CN" altLang="en-US"/>
           </a:p>
         </p:txBody>
       </p:sp>
@@ -1408,6 +1403,7 @@
           <a:p>
             <a:fld id="{E5ACCDA3-AF6E-43B7-BFD8-4B49DAB3F0EC}" type="datetimeFigureOut">
               <a:rPr lang="zh-CN" altLang="en-US" smtClean="0"/>
+              <a:t>2025/4/5</a:t>
             </a:fld>
             <a:endParaRPr lang="zh-CN" altLang="en-US"/>
           </a:p>
@@ -1449,6 +1445,7 @@
           <a:p>
             <a:fld id="{270A8B1F-62E6-4FD6-A0B0-93288694D17F}" type="slidenum">
               <a:rPr lang="zh-CN" altLang="en-US" smtClean="0"/>
+              <a:t>‹#›</a:t>
             </a:fld>
             <a:endParaRPr lang="zh-CN" altLang="en-US"/>
           </a:p>
@@ -1500,10 +1497,9 @@
           <a:lstStyle/>
           <a:p>
             <a:r>
-              <a:rPr lang="zh-CN" altLang="en-US" smtClean="0"/>
+              <a:rPr lang="zh-CN" altLang="en-US"/>
               <a:t>单击此处编辑母版标题样式</a:t>
             </a:r>
-            <a:endParaRPr lang="zh-CN" altLang="en-US"/>
           </a:p>
         </p:txBody>
       </p:sp>
@@ -1566,10 +1562,9 @@
           <a:p>
             <a:pPr lvl="0"/>
             <a:r>
-              <a:rPr lang="zh-CN" altLang="en-US" smtClean="0"/>
+              <a:rPr lang="zh-CN" altLang="en-US"/>
               <a:t>编辑母版文本样式</a:t>
             </a:r>
-            <a:endParaRPr lang="zh-CN" altLang="en-US" smtClean="0"/>
           </a:p>
         </p:txBody>
       </p:sp>
@@ -1595,42 +1590,37 @@
           <a:p>
             <a:pPr lvl="0"/>
             <a:r>
-              <a:rPr lang="zh-CN" altLang="en-US" smtClean="0"/>
+              <a:rPr lang="zh-CN" altLang="en-US"/>
               <a:t>编辑母版文本样式</a:t>
             </a:r>
-            <a:endParaRPr lang="zh-CN" altLang="en-US" smtClean="0"/>
           </a:p>
           <a:p>
             <a:pPr lvl="1"/>
             <a:r>
-              <a:rPr lang="zh-CN" altLang="en-US" smtClean="0"/>
+              <a:rPr lang="zh-CN" altLang="en-US"/>
               <a:t>第二级</a:t>
             </a:r>
-            <a:endParaRPr lang="zh-CN" altLang="en-US" smtClean="0"/>
           </a:p>
           <a:p>
             <a:pPr lvl="2"/>
             <a:r>
-              <a:rPr lang="zh-CN" altLang="en-US" smtClean="0"/>
+              <a:rPr lang="zh-CN" altLang="en-US"/>
               <a:t>第三级</a:t>
             </a:r>
-            <a:endParaRPr lang="zh-CN" altLang="en-US" smtClean="0"/>
           </a:p>
           <a:p>
             <a:pPr lvl="3"/>
             <a:r>
-              <a:rPr lang="zh-CN" altLang="en-US" smtClean="0"/>
+              <a:rPr lang="zh-CN" altLang="en-US"/>
               <a:t>第四级</a:t>
             </a:r>
-            <a:endParaRPr lang="zh-CN" altLang="en-US" smtClean="0"/>
           </a:p>
           <a:p>
             <a:pPr lvl="4"/>
             <a:r>
-              <a:rPr lang="zh-CN" altLang="en-US" smtClean="0"/>
+              <a:rPr lang="zh-CN" altLang="en-US"/>
               <a:t>第五级</a:t>
             </a:r>
-            <a:endParaRPr lang="zh-CN" altLang="en-US"/>
           </a:p>
         </p:txBody>
       </p:sp>
@@ -1693,10 +1683,9 @@
           <a:p>
             <a:pPr lvl="0"/>
             <a:r>
-              <a:rPr lang="zh-CN" altLang="en-US" smtClean="0"/>
+              <a:rPr lang="zh-CN" altLang="en-US"/>
               <a:t>编辑母版文本样式</a:t>
             </a:r>
-            <a:endParaRPr lang="zh-CN" altLang="en-US" smtClean="0"/>
           </a:p>
         </p:txBody>
       </p:sp>
@@ -1722,42 +1711,37 @@
           <a:p>
             <a:pPr lvl="0"/>
             <a:r>
-              <a:rPr lang="zh-CN" altLang="en-US" smtClean="0"/>
+              <a:rPr lang="zh-CN" altLang="en-US"/>
               <a:t>编辑母版文本样式</a:t>
             </a:r>
-            <a:endParaRPr lang="zh-CN" altLang="en-US" smtClean="0"/>
           </a:p>
           <a:p>
             <a:pPr lvl="1"/>
             <a:r>
-              <a:rPr lang="zh-CN" altLang="en-US" smtClean="0"/>
+              <a:rPr lang="zh-CN" altLang="en-US"/>
               <a:t>第二级</a:t>
             </a:r>
-            <a:endParaRPr lang="zh-CN" altLang="en-US" smtClean="0"/>
           </a:p>
           <a:p>
             <a:pPr lvl="2"/>
             <a:r>
-              <a:rPr lang="zh-CN" altLang="en-US" smtClean="0"/>
+              <a:rPr lang="zh-CN" altLang="en-US"/>
               <a:t>第三级</a:t>
             </a:r>
-            <a:endParaRPr lang="zh-CN" altLang="en-US" smtClean="0"/>
           </a:p>
           <a:p>
             <a:pPr lvl="3"/>
             <a:r>
-              <a:rPr lang="zh-CN" altLang="en-US" smtClean="0"/>
+              <a:rPr lang="zh-CN" altLang="en-US"/>
               <a:t>第四级</a:t>
             </a:r>
-            <a:endParaRPr lang="zh-CN" altLang="en-US" smtClean="0"/>
           </a:p>
           <a:p>
             <a:pPr lvl="4"/>
             <a:r>
-              <a:rPr lang="zh-CN" altLang="en-US" smtClean="0"/>
+              <a:rPr lang="zh-CN" altLang="en-US"/>
               <a:t>第五级</a:t>
             </a:r>
-            <a:endParaRPr lang="zh-CN" altLang="en-US"/>
           </a:p>
         </p:txBody>
       </p:sp>
@@ -1778,6 +1762,7 @@
           <a:p>
             <a:fld id="{E5ACCDA3-AF6E-43B7-BFD8-4B49DAB3F0EC}" type="datetimeFigureOut">
               <a:rPr lang="zh-CN" altLang="en-US" smtClean="0"/>
+              <a:t>2025/4/5</a:t>
             </a:fld>
             <a:endParaRPr lang="zh-CN" altLang="en-US"/>
           </a:p>
@@ -1819,6 +1804,7 @@
           <a:p>
             <a:fld id="{270A8B1F-62E6-4FD6-A0B0-93288694D17F}" type="slidenum">
               <a:rPr lang="zh-CN" altLang="en-US" smtClean="0"/>
+              <a:t>‹#›</a:t>
             </a:fld>
             <a:endParaRPr lang="zh-CN" altLang="en-US"/>
           </a:p>
@@ -1865,10 +1851,9 @@
           <a:lstStyle/>
           <a:p>
             <a:r>
-              <a:rPr lang="zh-CN" altLang="en-US" smtClean="0"/>
+              <a:rPr lang="zh-CN" altLang="en-US"/>
               <a:t>单击此处编辑母版标题样式</a:t>
             </a:r>
-            <a:endParaRPr lang="zh-CN" altLang="en-US"/>
           </a:p>
         </p:txBody>
       </p:sp>
@@ -1889,6 +1874,7 @@
           <a:p>
             <a:fld id="{E5ACCDA3-AF6E-43B7-BFD8-4B49DAB3F0EC}" type="datetimeFigureOut">
               <a:rPr lang="zh-CN" altLang="en-US" smtClean="0"/>
+              <a:t>2025/4/5</a:t>
             </a:fld>
             <a:endParaRPr lang="zh-CN" altLang="en-US"/>
           </a:p>
@@ -1930,6 +1916,7 @@
           <a:p>
             <a:fld id="{270A8B1F-62E6-4FD6-A0B0-93288694D17F}" type="slidenum">
               <a:rPr lang="zh-CN" altLang="en-US" smtClean="0"/>
+              <a:t>‹#›</a:t>
             </a:fld>
             <a:endParaRPr lang="zh-CN" altLang="en-US"/>
           </a:p>
@@ -1977,6 +1964,7 @@
           <a:p>
             <a:fld id="{E5ACCDA3-AF6E-43B7-BFD8-4B49DAB3F0EC}" type="datetimeFigureOut">
               <a:rPr lang="zh-CN" altLang="en-US" smtClean="0"/>
+              <a:t>2025/4/5</a:t>
             </a:fld>
             <a:endParaRPr lang="zh-CN" altLang="en-US"/>
           </a:p>
@@ -2018,6 +2006,7 @@
           <a:p>
             <a:fld id="{270A8B1F-62E6-4FD6-A0B0-93288694D17F}" type="slidenum">
               <a:rPr lang="zh-CN" altLang="en-US" smtClean="0"/>
+              <a:t>‹#›</a:t>
             </a:fld>
             <a:endParaRPr lang="zh-CN" altLang="en-US"/>
           </a:p>
@@ -2073,10 +2062,9 @@
           </a:lstStyle>
           <a:p>
             <a:r>
-              <a:rPr lang="zh-CN" altLang="en-US" smtClean="0"/>
+              <a:rPr lang="zh-CN" altLang="en-US"/>
               <a:t>单击此处编辑母版标题样式</a:t>
             </a:r>
-            <a:endParaRPr lang="zh-CN" altLang="en-US"/>
           </a:p>
         </p:txBody>
       </p:sp>
@@ -2130,42 +2118,37 @@
           <a:p>
             <a:pPr lvl="0"/>
             <a:r>
-              <a:rPr lang="zh-CN" altLang="en-US" smtClean="0"/>
+              <a:rPr lang="zh-CN" altLang="en-US"/>
               <a:t>编辑母版文本样式</a:t>
             </a:r>
-            <a:endParaRPr lang="zh-CN" altLang="en-US" smtClean="0"/>
           </a:p>
           <a:p>
             <a:pPr lvl="1"/>
             <a:r>
-              <a:rPr lang="zh-CN" altLang="en-US" smtClean="0"/>
+              <a:rPr lang="zh-CN" altLang="en-US"/>
               <a:t>第二级</a:t>
             </a:r>
-            <a:endParaRPr lang="zh-CN" altLang="en-US" smtClean="0"/>
           </a:p>
           <a:p>
             <a:pPr lvl="2"/>
             <a:r>
-              <a:rPr lang="zh-CN" altLang="en-US" smtClean="0"/>
+              <a:rPr lang="zh-CN" altLang="en-US"/>
               <a:t>第三级</a:t>
             </a:r>
-            <a:endParaRPr lang="zh-CN" altLang="en-US" smtClean="0"/>
           </a:p>
           <a:p>
             <a:pPr lvl="3"/>
             <a:r>
-              <a:rPr lang="zh-CN" altLang="en-US" smtClean="0"/>
+              <a:rPr lang="zh-CN" altLang="en-US"/>
               <a:t>第四级</a:t>
             </a:r>
-            <a:endParaRPr lang="zh-CN" altLang="en-US" smtClean="0"/>
           </a:p>
           <a:p>
             <a:pPr lvl="4"/>
             <a:r>
-              <a:rPr lang="zh-CN" altLang="en-US" smtClean="0"/>
+              <a:rPr lang="zh-CN" altLang="en-US"/>
               <a:t>第五级</a:t>
             </a:r>
-            <a:endParaRPr lang="zh-CN" altLang="en-US"/>
           </a:p>
         </p:txBody>
       </p:sp>
@@ -2228,10 +2211,9 @@
           <a:p>
             <a:pPr lvl="0"/>
             <a:r>
-              <a:rPr lang="zh-CN" altLang="en-US" smtClean="0"/>
+              <a:rPr lang="zh-CN" altLang="en-US"/>
               <a:t>编辑母版文本样式</a:t>
             </a:r>
-            <a:endParaRPr lang="zh-CN" altLang="en-US" smtClean="0"/>
           </a:p>
         </p:txBody>
       </p:sp>
@@ -2252,6 +2234,7 @@
           <a:p>
             <a:fld id="{E5ACCDA3-AF6E-43B7-BFD8-4B49DAB3F0EC}" type="datetimeFigureOut">
               <a:rPr lang="zh-CN" altLang="en-US" smtClean="0"/>
+              <a:t>2025/4/5</a:t>
             </a:fld>
             <a:endParaRPr lang="zh-CN" altLang="en-US"/>
           </a:p>
@@ -2293,6 +2276,7 @@
           <a:p>
             <a:fld id="{270A8B1F-62E6-4FD6-A0B0-93288694D17F}" type="slidenum">
               <a:rPr lang="zh-CN" altLang="en-US" smtClean="0"/>
+              <a:t>‹#›</a:t>
             </a:fld>
             <a:endParaRPr lang="zh-CN" altLang="en-US"/>
           </a:p>
@@ -2348,10 +2332,9 @@
           </a:lstStyle>
           <a:p>
             <a:r>
-              <a:rPr lang="zh-CN" altLang="en-US" smtClean="0"/>
+              <a:rPr lang="zh-CN" altLang="en-US"/>
               <a:t>单击此处编辑母版标题样式</a:t>
             </a:r>
-            <a:endParaRPr lang="zh-CN" altLang="en-US"/>
           </a:p>
         </p:txBody>
       </p:sp>
@@ -2475,10 +2458,9 @@
           <a:p>
             <a:pPr lvl="0"/>
             <a:r>
-              <a:rPr lang="zh-CN" altLang="en-US" smtClean="0"/>
+              <a:rPr lang="zh-CN" altLang="en-US"/>
               <a:t>编辑母版文本样式</a:t>
             </a:r>
-            <a:endParaRPr lang="zh-CN" altLang="en-US" smtClean="0"/>
           </a:p>
         </p:txBody>
       </p:sp>
@@ -2499,6 +2481,7 @@
           <a:p>
             <a:fld id="{E5ACCDA3-AF6E-43B7-BFD8-4B49DAB3F0EC}" type="datetimeFigureOut">
               <a:rPr lang="zh-CN" altLang="en-US" smtClean="0"/>
+              <a:t>2025/4/5</a:t>
             </a:fld>
             <a:endParaRPr lang="zh-CN" altLang="en-US"/>
           </a:p>
@@ -2540,6 +2523,7 @@
           <a:p>
             <a:fld id="{270A8B1F-62E6-4FD6-A0B0-93288694D17F}" type="slidenum">
               <a:rPr lang="zh-CN" altLang="en-US" smtClean="0"/>
+              <a:t>‹#›</a:t>
             </a:fld>
             <a:endParaRPr lang="zh-CN" altLang="en-US"/>
           </a:p>
@@ -2601,10 +2585,9 @@
           <a:lstStyle/>
           <a:p>
             <a:r>
-              <a:rPr lang="zh-CN" altLang="en-US" smtClean="0"/>
+              <a:rPr lang="zh-CN" altLang="en-US"/>
               <a:t>单击此处编辑母版标题样式</a:t>
             </a:r>
-            <a:endParaRPr lang="zh-CN" altLang="en-US"/>
           </a:p>
         </p:txBody>
       </p:sp>
@@ -2635,42 +2618,37 @@
           <a:p>
             <a:pPr lvl="0"/>
             <a:r>
-              <a:rPr lang="zh-CN" altLang="en-US" smtClean="0"/>
+              <a:rPr lang="zh-CN" altLang="en-US"/>
               <a:t>编辑母版文本样式</a:t>
             </a:r>
-            <a:endParaRPr lang="zh-CN" altLang="en-US" smtClean="0"/>
           </a:p>
           <a:p>
             <a:pPr lvl="1"/>
             <a:r>
-              <a:rPr lang="zh-CN" altLang="en-US" smtClean="0"/>
+              <a:rPr lang="zh-CN" altLang="en-US"/>
               <a:t>第二级</a:t>
             </a:r>
-            <a:endParaRPr lang="zh-CN" altLang="en-US" smtClean="0"/>
           </a:p>
           <a:p>
             <a:pPr lvl="2"/>
             <a:r>
-              <a:rPr lang="zh-CN" altLang="en-US" smtClean="0"/>
+              <a:rPr lang="zh-CN" altLang="en-US"/>
               <a:t>第三级</a:t>
             </a:r>
-            <a:endParaRPr lang="zh-CN" altLang="en-US" smtClean="0"/>
           </a:p>
           <a:p>
             <a:pPr lvl="3"/>
             <a:r>
-              <a:rPr lang="zh-CN" altLang="en-US" smtClean="0"/>
+              <a:rPr lang="zh-CN" altLang="en-US"/>
               <a:t>第四级</a:t>
             </a:r>
-            <a:endParaRPr lang="zh-CN" altLang="en-US" smtClean="0"/>
           </a:p>
           <a:p>
             <a:pPr lvl="4"/>
             <a:r>
-              <a:rPr lang="zh-CN" altLang="en-US" smtClean="0"/>
+              <a:rPr lang="zh-CN" altLang="en-US"/>
               <a:t>第五级</a:t>
             </a:r>
-            <a:endParaRPr lang="zh-CN" altLang="en-US"/>
           </a:p>
         </p:txBody>
       </p:sp>
@@ -2709,6 +2687,7 @@
           <a:p>
             <a:fld id="{E5ACCDA3-AF6E-43B7-BFD8-4B49DAB3F0EC}" type="datetimeFigureOut">
               <a:rPr lang="zh-CN" altLang="en-US" smtClean="0"/>
+              <a:t>2025/4/5</a:t>
             </a:fld>
             <a:endParaRPr lang="zh-CN" altLang="en-US"/>
           </a:p>
@@ -2786,6 +2765,7 @@
           <a:p>
             <a:fld id="{270A8B1F-62E6-4FD6-A0B0-93288694D17F}" type="slidenum">
               <a:rPr lang="zh-CN" altLang="en-US" smtClean="0"/>
+              <a:t>‹#›</a:t>
             </a:fld>
             <a:endParaRPr lang="zh-CN" altLang="en-US"/>
           </a:p>
@@ -3125,26 +3105,25 @@
           <a:p>
             <a:pPr algn="r"/>
             <a:r>
-              <a:rPr lang="zh-CN" altLang="en-US" dirty="0" smtClean="0"/>
+              <a:rPr lang="zh-CN" altLang="en-US" dirty="0"/>
               <a:t>第</a:t>
             </a:r>
             <a:r>
-              <a:rPr lang="en-US" altLang="zh-CN" dirty="0" smtClean="0"/>
+              <a:rPr lang="en-US" altLang="zh-CN" dirty="0"/>
               <a:t>8</a:t>
             </a:r>
             <a:r>
-              <a:rPr lang="zh-CN" altLang="en-US" dirty="0" smtClean="0"/>
+              <a:rPr lang="zh-CN" altLang="en-US" dirty="0"/>
               <a:t>章  </a:t>
             </a:r>
             <a:r>
-              <a:rPr lang="en-US" altLang="zh-CN" dirty="0" smtClean="0"/>
+              <a:rPr lang="en-US" altLang="zh-CN" dirty="0"/>
               <a:t>EM</a:t>
             </a:r>
             <a:r>
-              <a:rPr lang="zh-CN" altLang="en-US" dirty="0" smtClean="0"/>
+              <a:rPr lang="zh-CN" altLang="en-US" dirty="0"/>
               <a:t>算法及其应用</a:t>
             </a:r>
-            <a:endParaRPr lang="zh-CN" altLang="en-US" dirty="0"/>
           </a:p>
         </p:txBody>
       </p:sp>
@@ -3165,7 +3144,14 @@
         <p:cNvGrpSpPr/>
         <p:nvPr/>
       </p:nvGrpSpPr>
-      <p:grpSpPr/>
+      <p:grpSpPr>
+        <a:xfrm>
+          <a:off x="0" y="0"/>
+          <a:ext cx="0" cy="0"/>
+          <a:chOff x="0" y="0"/>
+          <a:chExt cx="0" cy="0"/>
+        </a:xfrm>
+      </p:grpSpPr>
       <p:sp>
         <p:nvSpPr>
           <p:cNvPr id="2" name="标题 1"/>
@@ -3184,6 +3170,7 @@
         </p:spPr>
         <p:txBody>
           <a:bodyPr/>
+          <a:lstStyle/>
           <a:p>
             <a:r>
               <a:rPr lang="en-US" altLang="zh-CN" dirty="0">
@@ -3214,6 +3201,7 @@
         <p:spPr/>
         <p:txBody>
           <a:bodyPr/>
+          <a:lstStyle/>
           <a:p>
             <a:r>
               <a:rPr lang="zh-CN" altLang="en-US"/>
@@ -3227,7 +3215,6 @@
               <a:rPr lang="zh-CN" altLang="en-US"/>
               <a:t>函数</a:t>
             </a:r>
-            <a:endParaRPr lang="zh-CN" altLang="en-US"/>
           </a:p>
         </p:txBody>
       </p:sp>
@@ -3245,12 +3232,12 @@
           <a:graphicData uri="http://schemas.openxmlformats.org/presentationml/2006/ole">
             <mc:AlternateContent xmlns:mc="http://schemas.openxmlformats.org/markup-compatibility/2006">
               <mc:Choice xmlns:v="urn:schemas-microsoft-com:vml" Requires="v">
-                <p:oleObj spid="_x0000_s5" name="" r:id="rId1" imgW="1237615" imgH="275590" progId="Word.Document.12">
+                <p:oleObj r:id="rId2" imgW="1237615" imgH="275590" progId="Word.Document.12">
                   <p:embed/>
                 </p:oleObj>
               </mc:Choice>
               <mc:Fallback>
-                <p:oleObj name="" r:id="rId1" imgW="1237615" imgH="275590" progId="Word.Document.12">
+                <p:oleObj r:id="rId2" imgW="1237615" imgH="275590" progId="Word.Document.12">
                   <p:embed/>
                   <p:pic>
                     <p:nvPicPr>
@@ -3259,7 +3246,7 @@
                       <p:nvPr/>
                     </p:nvPicPr>
                     <p:blipFill>
-                      <a:blip r:embed="rId2"/>
+                      <a:blip r:embed="rId3"/>
                       <a:stretch>
                         <a:fillRect/>
                       </a:stretch>
@@ -3294,12 +3281,12 @@
           <a:graphicData uri="http://schemas.openxmlformats.org/presentationml/2006/ole">
             <mc:AlternateContent xmlns:mc="http://schemas.openxmlformats.org/markup-compatibility/2006">
               <mc:Choice xmlns:v="urn:schemas-microsoft-com:vml" Requires="v">
-                <p:oleObj spid="_x0000_s7" name="" r:id="rId3" imgW="800100" imgH="219710" progId="Word.Document.12">
+                <p:oleObj r:id="rId4" imgW="800100" imgH="219710" progId="Word.Document.12">
                   <p:embed/>
                 </p:oleObj>
               </mc:Choice>
               <mc:Fallback>
-                <p:oleObj name="" r:id="rId3" imgW="800100" imgH="219710" progId="Word.Document.12">
+                <p:oleObj r:id="rId4" imgW="800100" imgH="219710" progId="Word.Document.12">
                   <p:embed/>
                   <p:pic>
                     <p:nvPicPr>
@@ -3308,7 +3295,7 @@
                       <p:nvPr/>
                     </p:nvPicPr>
                     <p:blipFill>
-                      <a:blip r:embed="rId4"/>
+                      <a:blip r:embed="rId5"/>
                       <a:stretch>
                         <a:fillRect/>
                       </a:stretch>
@@ -3343,12 +3330,12 @@
           <a:graphicData uri="http://schemas.openxmlformats.org/presentationml/2006/ole">
             <mc:AlternateContent xmlns:mc="http://schemas.openxmlformats.org/markup-compatibility/2006">
               <mc:Choice xmlns:v="urn:schemas-microsoft-com:vml" Requires="v">
-                <p:oleObj spid="_x0000_s9" name="" r:id="rId5" imgW="342900" imgH="219710" progId="Word.Document.12">
+                <p:oleObj r:id="rId6" imgW="342900" imgH="219710" progId="Word.Document.12">
                   <p:embed/>
                 </p:oleObj>
               </mc:Choice>
               <mc:Fallback>
-                <p:oleObj name="" r:id="rId5" imgW="342900" imgH="219710" progId="Word.Document.12">
+                <p:oleObj r:id="rId6" imgW="342900" imgH="219710" progId="Word.Document.12">
                   <p:embed/>
                   <p:pic>
                     <p:nvPicPr>
@@ -3357,7 +3344,7 @@
                       <p:nvPr/>
                     </p:nvPicPr>
                     <p:blipFill>
-                      <a:blip r:embed="rId6"/>
+                      <a:blip r:embed="rId7"/>
                       <a:stretch>
                         <a:fillRect/>
                       </a:stretch>
@@ -3392,12 +3379,12 @@
           <a:graphicData uri="http://schemas.openxmlformats.org/presentationml/2006/ole">
             <mc:AlternateContent xmlns:mc="http://schemas.openxmlformats.org/markup-compatibility/2006">
               <mc:Choice xmlns:v="urn:schemas-microsoft-com:vml" Requires="v">
-                <p:oleObj spid="_x0000_s11" name="" r:id="rId7" imgW="591185" imgH="219710" progId="Word.Document.12">
+                <p:oleObj r:id="rId8" imgW="591185" imgH="219710" progId="Word.Document.12">
                   <p:embed/>
                 </p:oleObj>
               </mc:Choice>
               <mc:Fallback>
-                <p:oleObj name="" r:id="rId7" imgW="591185" imgH="219710" progId="Word.Document.12">
+                <p:oleObj r:id="rId8" imgW="591185" imgH="219710" progId="Word.Document.12">
                   <p:embed/>
                   <p:pic>
                     <p:nvPicPr>
@@ -3406,7 +3393,7 @@
                       <p:nvPr/>
                     </p:nvPicPr>
                     <p:blipFill>
-                      <a:blip r:embed="rId8"/>
+                      <a:blip r:embed="rId9"/>
                       <a:stretch>
                         <a:fillRect/>
                       </a:stretch>
@@ -3441,12 +3428,12 @@
           <a:graphicData uri="http://schemas.openxmlformats.org/presentationml/2006/ole">
             <mc:AlternateContent xmlns:mc="http://schemas.openxmlformats.org/markup-compatibility/2006">
               <mc:Choice xmlns:v="urn:schemas-microsoft-com:vml" Requires="v">
-                <p:oleObj spid="_x0000_s13" name="" r:id="rId9" imgW="334010" imgH="210185" progId="Word.Document.12">
+                <p:oleObj r:id="rId10" imgW="334010" imgH="210185" progId="Word.Document.12">
                   <p:embed/>
                 </p:oleObj>
               </mc:Choice>
               <mc:Fallback>
-                <p:oleObj name="" r:id="rId9" imgW="334010" imgH="210185" progId="Word.Document.12">
+                <p:oleObj r:id="rId10" imgW="334010" imgH="210185" progId="Word.Document.12">
                   <p:embed/>
                   <p:pic>
                     <p:nvPicPr>
@@ -3455,7 +3442,7 @@
                       <p:nvPr/>
                     </p:nvPicPr>
                     <p:blipFill>
-                      <a:blip r:embed="rId10"/>
+                      <a:blip r:embed="rId11"/>
                       <a:stretch>
                         <a:fillRect/>
                       </a:stretch>
@@ -3490,12 +3477,12 @@
           <a:graphicData uri="http://schemas.openxmlformats.org/presentationml/2006/ole">
             <mc:AlternateContent xmlns:mc="http://schemas.openxmlformats.org/markup-compatibility/2006">
               <mc:Choice xmlns:v="urn:schemas-microsoft-com:vml" Requires="v">
-                <p:oleObj spid="_x0000_s15" name="" r:id="rId11" imgW="334010" imgH="210185" progId="Word.Document.12">
+                <p:oleObj r:id="rId12" imgW="334010" imgH="210185" progId="Word.Document.12">
                   <p:embed/>
                 </p:oleObj>
               </mc:Choice>
               <mc:Fallback>
-                <p:oleObj name="" r:id="rId11" imgW="334010" imgH="210185" progId="Word.Document.12">
+                <p:oleObj r:id="rId12" imgW="334010" imgH="210185" progId="Word.Document.12">
                   <p:embed/>
                   <p:pic>
                     <p:nvPicPr>
@@ -3504,7 +3491,7 @@
                       <p:nvPr/>
                     </p:nvPicPr>
                     <p:blipFill>
-                      <a:blip r:embed="rId10"/>
+                      <a:blip r:embed="rId11"/>
                       <a:stretch>
                         <a:fillRect/>
                       </a:stretch>
@@ -3539,12 +3526,12 @@
           <a:graphicData uri="http://schemas.openxmlformats.org/presentationml/2006/ole">
             <mc:AlternateContent xmlns:mc="http://schemas.openxmlformats.org/markup-compatibility/2006">
               <mc:Choice xmlns:v="urn:schemas-microsoft-com:vml" Requires="v">
-                <p:oleObj spid="_x0000_s17" name="" r:id="rId12" imgW="591185" imgH="219710" progId="Word.Document.12">
+                <p:oleObj r:id="rId13" imgW="591185" imgH="219710" progId="Word.Document.12">
                   <p:embed/>
                 </p:oleObj>
               </mc:Choice>
               <mc:Fallback>
-                <p:oleObj name="" r:id="rId12" imgW="591185" imgH="219710" progId="Word.Document.12">
+                <p:oleObj r:id="rId13" imgW="591185" imgH="219710" progId="Word.Document.12">
                   <p:embed/>
                   <p:pic>
                     <p:nvPicPr>
@@ -3553,7 +3540,7 @@
                       <p:nvPr/>
                     </p:nvPicPr>
                     <p:blipFill>
-                      <a:blip r:embed="rId13"/>
+                      <a:blip r:embed="rId14"/>
                       <a:stretch>
                         <a:fillRect/>
                       </a:stretch>
@@ -3588,12 +3575,12 @@
           <a:graphicData uri="http://schemas.openxmlformats.org/presentationml/2006/ole">
             <mc:AlternateContent xmlns:mc="http://schemas.openxmlformats.org/markup-compatibility/2006">
               <mc:Choice xmlns:v="urn:schemas-microsoft-com:vml" Requires="v">
-                <p:oleObj spid="_x0000_s19" name="" r:id="rId14" imgW="123190" imgH="190500" progId="Word.Document.12">
+                <p:oleObj r:id="rId15" imgW="123190" imgH="190500" progId="Word.Document.12">
                   <p:embed/>
                 </p:oleObj>
               </mc:Choice>
               <mc:Fallback>
-                <p:oleObj name="" r:id="rId14" imgW="123190" imgH="190500" progId="Word.Document.12">
+                <p:oleObj r:id="rId15" imgW="123190" imgH="190500" progId="Word.Document.12">
                   <p:embed/>
                   <p:pic>
                     <p:nvPicPr>
@@ -3602,7 +3589,7 @@
                       <p:nvPr/>
                     </p:nvPicPr>
                     <p:blipFill>
-                      <a:blip r:embed="rId15"/>
+                      <a:blip r:embed="rId16"/>
                       <a:stretch>
                         <a:fillRect/>
                       </a:stretch>
@@ -3637,12 +3624,12 @@
           <a:graphicData uri="http://schemas.openxmlformats.org/presentationml/2006/ole">
             <mc:AlternateContent xmlns:mc="http://schemas.openxmlformats.org/markup-compatibility/2006">
               <mc:Choice xmlns:v="urn:schemas-microsoft-com:vml" Requires="v">
-                <p:oleObj spid="_x0000_s21" name="" r:id="rId16" imgW="1248410" imgH="266700" progId="Word.Document.12">
+                <p:oleObj r:id="rId17" imgW="1248410" imgH="266700" progId="Word.Document.12">
                   <p:embed/>
                 </p:oleObj>
               </mc:Choice>
               <mc:Fallback>
-                <p:oleObj name="" r:id="rId16" imgW="1248410" imgH="266700" progId="Word.Document.12">
+                <p:oleObj r:id="rId17" imgW="1248410" imgH="266700" progId="Word.Document.12">
                   <p:embed/>
                   <p:pic>
                     <p:nvPicPr>
@@ -3651,7 +3638,7 @@
                       <p:nvPr/>
                     </p:nvPicPr>
                     <p:blipFill>
-                      <a:blip r:embed="rId17"/>
+                      <a:blip r:embed="rId18"/>
                       <a:stretch>
                         <a:fillRect/>
                       </a:stretch>
@@ -3686,12 +3673,12 @@
           <a:graphicData uri="http://schemas.openxmlformats.org/presentationml/2006/ole">
             <mc:AlternateContent xmlns:mc="http://schemas.openxmlformats.org/markup-compatibility/2006">
               <mc:Choice xmlns:v="urn:schemas-microsoft-com:vml" Requires="v">
-                <p:oleObj spid="_x0000_s23" name="" r:id="rId18" imgW="3209290" imgH="266700" progId="Word.Document.12">
+                <p:oleObj r:id="rId19" imgW="3209290" imgH="266700" progId="Word.Document.12">
                   <p:embed/>
                 </p:oleObj>
               </mc:Choice>
               <mc:Fallback>
-                <p:oleObj name="" r:id="rId18" imgW="3209290" imgH="266700" progId="Word.Document.12">
+                <p:oleObj r:id="rId19" imgW="3209290" imgH="266700" progId="Word.Document.12">
                   <p:embed/>
                   <p:pic>
                     <p:nvPicPr>
@@ -3700,7 +3687,7 @@
                       <p:nvPr/>
                     </p:nvPicPr>
                     <p:blipFill>
-                      <a:blip r:embed="rId19"/>
+                      <a:blip r:embed="rId20"/>
                       <a:stretch>
                         <a:fillRect/>
                       </a:stretch>
@@ -3738,7 +3725,14 @@
         <p:cNvGrpSpPr/>
         <p:nvPr/>
       </p:nvGrpSpPr>
-      <p:grpSpPr/>
+      <p:grpSpPr>
+        <a:xfrm>
+          <a:off x="0" y="0"/>
+          <a:ext cx="0" cy="0"/>
+          <a:chOff x="0" y="0"/>
+          <a:chExt cx="0" cy="0"/>
+        </a:xfrm>
+      </p:grpSpPr>
       <p:sp>
         <p:nvSpPr>
           <p:cNvPr id="2" name="标题 1"/>
@@ -3752,6 +3746,7 @@
         <p:spPr/>
         <p:txBody>
           <a:bodyPr/>
+          <a:lstStyle/>
           <a:p>
             <a:r>
               <a:rPr lang="en-US" altLang="zh-CN" dirty="0">
@@ -3782,6 +3777,7 @@
         <p:spPr/>
         <p:txBody>
           <a:bodyPr/>
+          <a:lstStyle/>
           <a:p>
             <a:r>
               <a:rPr lang="zh-CN" altLang="en-US"/>
@@ -3811,7 +3807,6 @@
               <a:rPr lang="zh-CN" altLang="en-US"/>
               <a:t>函数得到   ，就是EM算法中M(Maximization)的过程。</a:t>
             </a:r>
-            <a:endParaRPr lang="zh-CN" altLang="en-US"/>
           </a:p>
         </p:txBody>
       </p:sp>
@@ -3829,12 +3824,12 @@
           <a:graphicData uri="http://schemas.openxmlformats.org/presentationml/2006/ole">
             <mc:AlternateContent xmlns:mc="http://schemas.openxmlformats.org/markup-compatibility/2006">
               <mc:Choice xmlns:v="urn:schemas-microsoft-com:vml" Requires="v">
-                <p:oleObj spid="_x0000_s5" name="" r:id="rId1" imgW="410210" imgH="266700" progId="Word.Document.12">
+                <p:oleObj r:id="rId2" imgW="410210" imgH="266700" progId="Word.Document.12">
                   <p:embed/>
                 </p:oleObj>
               </mc:Choice>
               <mc:Fallback>
-                <p:oleObj name="" r:id="rId1" imgW="410210" imgH="266700" progId="Word.Document.12">
+                <p:oleObj r:id="rId2" imgW="410210" imgH="266700" progId="Word.Document.12">
                   <p:embed/>
                   <p:pic>
                     <p:nvPicPr>
@@ -3843,7 +3838,7 @@
                       <p:nvPr/>
                     </p:nvPicPr>
                     <p:blipFill>
-                      <a:blip r:embed="rId2"/>
+                      <a:blip r:embed="rId3"/>
                       <a:stretch>
                         <a:fillRect/>
                       </a:stretch>
@@ -3878,12 +3873,12 @@
           <a:graphicData uri="http://schemas.openxmlformats.org/presentationml/2006/ole">
             <mc:AlternateContent xmlns:mc="http://schemas.openxmlformats.org/markup-compatibility/2006">
               <mc:Choice xmlns:v="urn:schemas-microsoft-com:vml" Requires="v">
-                <p:oleObj spid="_x0000_s7" name="" r:id="rId3" imgW="304800" imgH="210185" progId="Word.Document.12">
+                <p:oleObj r:id="rId4" imgW="304800" imgH="210185" progId="Word.Document.12">
                   <p:embed/>
                 </p:oleObj>
               </mc:Choice>
               <mc:Fallback>
-                <p:oleObj name="" r:id="rId3" imgW="304800" imgH="210185" progId="Word.Document.12">
+                <p:oleObj r:id="rId4" imgW="304800" imgH="210185" progId="Word.Document.12">
                   <p:embed/>
                   <p:pic>
                     <p:nvPicPr>
@@ -3892,7 +3887,7 @@
                       <p:nvPr/>
                     </p:nvPicPr>
                     <p:blipFill>
-                      <a:blip r:embed="rId4"/>
+                      <a:blip r:embed="rId5"/>
                       <a:stretch>
                         <a:fillRect/>
                       </a:stretch>
@@ -3927,12 +3922,12 @@
           <a:graphicData uri="http://schemas.openxmlformats.org/presentationml/2006/ole">
             <mc:AlternateContent xmlns:mc="http://schemas.openxmlformats.org/markup-compatibility/2006">
               <mc:Choice xmlns:v="urn:schemas-microsoft-com:vml" Requires="v">
-                <p:oleObj spid="_x0000_s9" name="" r:id="rId5" imgW="829310" imgH="247015" progId="Word.Document.12">
+                <p:oleObj r:id="rId6" imgW="829310" imgH="247015" progId="Word.Document.12">
                   <p:embed/>
                 </p:oleObj>
               </mc:Choice>
               <mc:Fallback>
-                <p:oleObj name="" r:id="rId5" imgW="829310" imgH="247015" progId="Word.Document.12">
+                <p:oleObj r:id="rId6" imgW="829310" imgH="247015" progId="Word.Document.12">
                   <p:embed/>
                   <p:pic>
                     <p:nvPicPr>
@@ -3941,7 +3936,7 @@
                       <p:nvPr/>
                     </p:nvPicPr>
                     <p:blipFill>
-                      <a:blip r:embed="rId6"/>
+                      <a:blip r:embed="rId7"/>
                       <a:stretch>
                         <a:fillRect/>
                       </a:stretch>
@@ -3976,12 +3971,12 @@
           <a:graphicData uri="http://schemas.openxmlformats.org/presentationml/2006/ole">
             <mc:AlternateContent xmlns:mc="http://schemas.openxmlformats.org/markup-compatibility/2006">
               <mc:Choice xmlns:v="urn:schemas-microsoft-com:vml" Requires="v">
-                <p:oleObj spid="_x0000_s11" name="" r:id="rId7" imgW="123190" imgH="190500" progId="Word.Document.12">
+                <p:oleObj r:id="rId8" imgW="123190" imgH="190500" progId="Word.Document.12">
                   <p:embed/>
                 </p:oleObj>
               </mc:Choice>
               <mc:Fallback>
-                <p:oleObj name="" r:id="rId7" imgW="123190" imgH="190500" progId="Word.Document.12">
+                <p:oleObj r:id="rId8" imgW="123190" imgH="190500" progId="Word.Document.12">
                   <p:embed/>
                   <p:pic>
                     <p:nvPicPr>
@@ -3990,7 +3985,7 @@
                       <p:nvPr/>
                     </p:nvPicPr>
                     <p:blipFill>
-                      <a:blip r:embed="rId8"/>
+                      <a:blip r:embed="rId9"/>
                       <a:stretch>
                         <a:fillRect/>
                       </a:stretch>
@@ -4025,12 +4020,12 @@
           <a:graphicData uri="http://schemas.openxmlformats.org/presentationml/2006/ole">
             <mc:AlternateContent xmlns:mc="http://schemas.openxmlformats.org/markup-compatibility/2006">
               <mc:Choice xmlns:v="urn:schemas-microsoft-com:vml" Requires="v">
-                <p:oleObj spid="_x0000_s13" name="" r:id="rId9" imgW="266700" imgH="247015" progId="Word.Document.12">
+                <p:oleObj r:id="rId10" imgW="266700" imgH="247015" progId="Word.Document.12">
                   <p:embed/>
                 </p:oleObj>
               </mc:Choice>
               <mc:Fallback>
-                <p:oleObj name="" r:id="rId9" imgW="266700" imgH="247015" progId="Word.Document.12">
+                <p:oleObj r:id="rId10" imgW="266700" imgH="247015" progId="Word.Document.12">
                   <p:embed/>
                   <p:pic>
                     <p:nvPicPr>
@@ -4039,7 +4034,7 @@
                       <p:nvPr/>
                     </p:nvPicPr>
                     <p:blipFill>
-                      <a:blip r:embed="rId10"/>
+                      <a:blip r:embed="rId11"/>
                       <a:stretch>
                         <a:fillRect/>
                       </a:stretch>
@@ -4077,7 +4072,14 @@
         <p:cNvGrpSpPr/>
         <p:nvPr/>
       </p:nvGrpSpPr>
-      <p:grpSpPr/>
+      <p:grpSpPr>
+        <a:xfrm>
+          <a:off x="0" y="0"/>
+          <a:ext cx="0" cy="0"/>
+          <a:chOff x="0" y="0"/>
+          <a:chExt cx="0" cy="0"/>
+        </a:xfrm>
+      </p:grpSpPr>
       <p:sp>
         <p:nvSpPr>
           <p:cNvPr id="2" name="标题 1"/>
@@ -4091,6 +4093,7 @@
         <p:spPr/>
         <p:txBody>
           <a:bodyPr/>
+          <a:lstStyle/>
           <a:p>
             <a:r>
               <a:rPr lang="en-US" altLang="zh-CN" dirty="0">
@@ -4121,6 +4124,7 @@
         <p:spPr/>
         <p:txBody>
           <a:bodyPr/>
+          <a:lstStyle/>
           <a:p>
             <a:r>
               <a:rPr lang="zh-CN" altLang="en-US"/>
@@ -4134,14 +4138,12 @@
               <a:rPr lang="zh-CN" altLang="en-US"/>
               <a:t>。</a:t>
             </a:r>
-            <a:endParaRPr lang="zh-CN" altLang="en-US"/>
           </a:p>
           <a:p>
             <a:r>
               <a:rPr lang="zh-CN" altLang="en-US"/>
               <a:t>输出：模型  </a:t>
             </a:r>
-            <a:endParaRPr lang="zh-CN" altLang="en-US"/>
           </a:p>
           <a:p>
             <a:endParaRPr lang="zh-CN" altLang="en-US"/>
@@ -4162,12 +4164,12 @@
           <a:graphicData uri="http://schemas.openxmlformats.org/presentationml/2006/ole">
             <mc:AlternateContent xmlns:mc="http://schemas.openxmlformats.org/markup-compatibility/2006">
               <mc:Choice xmlns:v="urn:schemas-microsoft-com:vml" Requires="v">
-                <p:oleObj spid="_x0000_s5" name="" r:id="rId1" imgW="591185" imgH="200025" progId="Word.Document.12">
+                <p:oleObj r:id="rId2" imgW="591185" imgH="200025" progId="Word.Document.12">
                   <p:embed/>
                 </p:oleObj>
               </mc:Choice>
               <mc:Fallback>
-                <p:oleObj name="" r:id="rId1" imgW="591185" imgH="200025" progId="Word.Document.12">
+                <p:oleObj r:id="rId2" imgW="591185" imgH="200025" progId="Word.Document.12">
                   <p:embed/>
                   <p:pic>
                     <p:nvPicPr>
@@ -4176,7 +4178,7 @@
                       <p:nvPr/>
                     </p:nvPicPr>
                     <p:blipFill>
-                      <a:blip r:embed="rId2"/>
+                      <a:blip r:embed="rId3"/>
                       <a:stretch>
                         <a:fillRect/>
                       </a:stretch>
@@ -4211,12 +4213,12 @@
           <a:graphicData uri="http://schemas.openxmlformats.org/presentationml/2006/ole">
             <mc:AlternateContent xmlns:mc="http://schemas.openxmlformats.org/markup-compatibility/2006">
               <mc:Choice xmlns:v="urn:schemas-microsoft-com:vml" Requires="v">
-                <p:oleObj spid="_x0000_s7" name="" r:id="rId3" imgW="867410" imgH="219710" progId="Word.Document.12">
+                <p:oleObj r:id="rId4" imgW="867410" imgH="219710" progId="Word.Document.12">
                   <p:embed/>
                 </p:oleObj>
               </mc:Choice>
               <mc:Fallback>
-                <p:oleObj name="" r:id="rId3" imgW="867410" imgH="219710" progId="Word.Document.12">
+                <p:oleObj r:id="rId4" imgW="867410" imgH="219710" progId="Word.Document.12">
                   <p:embed/>
                   <p:pic>
                     <p:nvPicPr>
@@ -4225,7 +4227,7 @@
                       <p:nvPr/>
                     </p:nvPicPr>
                     <p:blipFill>
-                      <a:blip r:embed="rId4"/>
+                      <a:blip r:embed="rId5"/>
                       <a:stretch>
                         <a:fillRect/>
                       </a:stretch>
@@ -4260,12 +4262,12 @@
           <a:graphicData uri="http://schemas.openxmlformats.org/presentationml/2006/ole">
             <mc:AlternateContent xmlns:mc="http://schemas.openxmlformats.org/markup-compatibility/2006">
               <mc:Choice xmlns:v="urn:schemas-microsoft-com:vml" Requires="v">
-                <p:oleObj spid="_x0000_s9" name="" r:id="rId5" imgW="847725" imgH="219710" progId="Word.Document.12">
+                <p:oleObj r:id="rId6" imgW="847725" imgH="219710" progId="Word.Document.12">
                   <p:embed/>
                 </p:oleObj>
               </mc:Choice>
               <mc:Fallback>
-                <p:oleObj name="" r:id="rId5" imgW="847725" imgH="219710" progId="Word.Document.12">
+                <p:oleObj r:id="rId6" imgW="847725" imgH="219710" progId="Word.Document.12">
                   <p:embed/>
                   <p:pic>
                     <p:nvPicPr>
@@ -4274,7 +4276,7 @@
                       <p:nvPr/>
                     </p:nvPicPr>
                     <p:blipFill>
-                      <a:blip r:embed="rId6"/>
+                      <a:blip r:embed="rId7"/>
                       <a:stretch>
                         <a:fillRect/>
                       </a:stretch>
@@ -4309,12 +4311,12 @@
           <a:graphicData uri="http://schemas.openxmlformats.org/presentationml/2006/ole">
             <mc:AlternateContent xmlns:mc="http://schemas.openxmlformats.org/markup-compatibility/2006">
               <mc:Choice xmlns:v="urn:schemas-microsoft-com:vml" Requires="v">
-                <p:oleObj spid="_x0000_s11" name="" r:id="rId7" imgW="591185" imgH="219710" progId="Word.Document.12">
+                <p:oleObj r:id="rId8" imgW="591185" imgH="219710" progId="Word.Document.12">
                   <p:embed/>
                 </p:oleObj>
               </mc:Choice>
               <mc:Fallback>
-                <p:oleObj name="" r:id="rId7" imgW="591185" imgH="219710" progId="Word.Document.12">
+                <p:oleObj r:id="rId8" imgW="591185" imgH="219710" progId="Word.Document.12">
                   <p:embed/>
                   <p:pic>
                     <p:nvPicPr>
@@ -4323,7 +4325,7 @@
                       <p:nvPr/>
                     </p:nvPicPr>
                     <p:blipFill>
-                      <a:blip r:embed="rId8"/>
+                      <a:blip r:embed="rId9"/>
                       <a:stretch>
                         <a:fillRect/>
                       </a:stretch>
@@ -4353,7 +4355,7 @@
           <p:nvPr/>
         </p:nvPicPr>
         <p:blipFill>
-          <a:blip r:embed="rId9" cstate="print"/>
+          <a:blip r:embed="rId10" cstate="print"/>
           <a:stretch>
             <a:fillRect/>
           </a:stretch>
@@ -4385,7 +4387,14 @@
         <p:cNvGrpSpPr/>
         <p:nvPr/>
       </p:nvGrpSpPr>
-      <p:grpSpPr/>
+      <p:grpSpPr>
+        <a:xfrm>
+          <a:off x="0" y="0"/>
+          <a:ext cx="0" cy="0"/>
+          <a:chOff x="0" y="0"/>
+          <a:chExt cx="0" cy="0"/>
+        </a:xfrm>
+      </p:grpSpPr>
       <p:sp>
         <p:nvSpPr>
           <p:cNvPr id="2" name="标题 1"/>
@@ -4399,6 +4408,7 @@
         <p:spPr/>
         <p:txBody>
           <a:bodyPr/>
+          <a:lstStyle/>
           <a:p>
             <a:r>
               <a:rPr lang="en-US" altLang="zh-CN" dirty="0">
@@ -4420,14 +4430,14 @@
         <p:nvPicPr>
           <p:cNvPr id="18434" name="Picture 2" descr="C:\Users\apple\Desktop\u=4235077771,3212813589&amp;fm=26&amp;gp=0.jpg"/>
           <p:cNvPicPr>
-            <a:picLocks noChangeAspect="1" noChangeArrowheads="1"/>
+            <a:picLocks noGrp="1" noChangeAspect="1" noChangeArrowheads="1"/>
           </p:cNvPicPr>
           <p:nvPr>
             <p:ph idx="1"/>
           </p:nvPr>
         </p:nvPicPr>
         <p:blipFill>
-          <a:blip r:embed="rId1" cstate="print"/>
+          <a:blip r:embed="rId2" cstate="print"/>
           <a:srcRect/>
           <a:stretch>
             <a:fillRect/>
@@ -4461,7 +4471,14 @@
         <p:cNvGrpSpPr/>
         <p:nvPr/>
       </p:nvGrpSpPr>
-      <p:grpSpPr/>
+      <p:grpSpPr>
+        <a:xfrm>
+          <a:off x="0" y="0"/>
+          <a:ext cx="0" cy="0"/>
+          <a:chOff x="0" y="0"/>
+          <a:chExt cx="0" cy="0"/>
+        </a:xfrm>
+      </p:grpSpPr>
       <p:sp>
         <p:nvSpPr>
           <p:cNvPr id="2" name="标题 1"/>
@@ -4475,6 +4492,7 @@
         <p:spPr/>
         <p:txBody>
           <a:bodyPr/>
+          <a:lstStyle/>
           <a:p>
             <a:r>
               <a:rPr lang="en-US" altLang="zh-CN" dirty="0">
@@ -4505,6 +4523,7 @@
         <p:spPr/>
         <p:txBody>
           <a:bodyPr/>
+          <a:lstStyle/>
           <a:p>
             <a:r>
               <a:rPr lang="en-US" altLang="zh-CN" dirty="0">
@@ -4565,7 +4584,14 @@
         <p:cNvGrpSpPr/>
         <p:nvPr/>
       </p:nvGrpSpPr>
-      <p:grpSpPr/>
+      <p:grpSpPr>
+        <a:xfrm>
+          <a:off x="0" y="0"/>
+          <a:ext cx="0" cy="0"/>
+          <a:chOff x="0" y="0"/>
+          <a:chExt cx="0" cy="0"/>
+        </a:xfrm>
+      </p:grpSpPr>
       <p:sp>
         <p:nvSpPr>
           <p:cNvPr id="2" name="标题 1"/>
@@ -4579,6 +4605,7 @@
         <p:spPr/>
         <p:txBody>
           <a:bodyPr/>
+          <a:lstStyle/>
           <a:p>
             <a:r>
               <a:rPr lang="en-US" altLang="zh-CN" dirty="0">
@@ -4609,6 +4636,7 @@
         <p:spPr/>
         <p:txBody>
           <a:bodyPr/>
+          <a:lstStyle/>
           <a:p>
             <a:r>
               <a:rPr lang="en-US" altLang="zh-CN" dirty="0">
@@ -4653,7 +4681,14 @@
         <p:cNvGrpSpPr/>
         <p:nvPr/>
       </p:nvGrpSpPr>
-      <p:grpSpPr/>
+      <p:grpSpPr>
+        <a:xfrm>
+          <a:off x="0" y="0"/>
+          <a:ext cx="0" cy="0"/>
+          <a:chOff x="0" y="0"/>
+          <a:chExt cx="0" cy="0"/>
+        </a:xfrm>
+      </p:grpSpPr>
       <p:sp>
         <p:nvSpPr>
           <p:cNvPr id="2" name="标题 1"/>
@@ -4667,6 +4702,7 @@
         <p:spPr/>
         <p:txBody>
           <a:bodyPr/>
+          <a:lstStyle/>
           <a:p>
             <a:r>
               <a:rPr lang="en-US" altLang="zh-CN" dirty="0">
@@ -4697,12 +4733,12 @@
         <p:spPr/>
         <p:txBody>
           <a:bodyPr/>
+          <a:lstStyle/>
           <a:p>
             <a:r>
               <a:rPr lang="zh-CN" altLang="en-US"/>
               <a:t>高斯混合模型（Gaussian Mixture Model, GMM）是EM算法的一个典型应用。下面以高斯混合聚类来阐述高斯混合模型。根据大数定律，人群中的身高分布应呈高斯分布。现给定一个随机采样而来的学生身高的样本集合          ，设身高服从的高斯分布为         ，其中      为待估计的参数。高斯分布的概率密度函数为</a:t>
             </a:r>
-            <a:endParaRPr lang="zh-CN" altLang="en-US"/>
           </a:p>
         </p:txBody>
       </p:sp>
@@ -4720,12 +4756,12 @@
           <a:graphicData uri="http://schemas.openxmlformats.org/presentationml/2006/ole">
             <mc:AlternateContent xmlns:mc="http://schemas.openxmlformats.org/markup-compatibility/2006">
               <mc:Choice xmlns:v="urn:schemas-microsoft-com:vml" Requires="v">
-                <p:oleObj spid="_x0000_s5" name="" r:id="rId1" imgW="1189990" imgH="266700" progId="Word.Document.12">
+                <p:oleObj r:id="rId2" imgW="1189990" imgH="266700" progId="Word.Document.12">
                   <p:embed/>
                 </p:oleObj>
               </mc:Choice>
               <mc:Fallback>
-                <p:oleObj name="" r:id="rId1" imgW="1189990" imgH="266700" progId="Word.Document.12">
+                <p:oleObj r:id="rId2" imgW="1189990" imgH="266700" progId="Word.Document.12">
                   <p:embed/>
                   <p:pic>
                     <p:nvPicPr>
@@ -4734,7 +4770,7 @@
                       <p:nvPr/>
                     </p:nvPicPr>
                     <p:blipFill>
-                      <a:blip r:embed="rId2"/>
+                      <a:blip r:embed="rId3"/>
                       <a:stretch>
                         <a:fillRect/>
                       </a:stretch>
@@ -4769,12 +4805,12 @@
           <a:graphicData uri="http://schemas.openxmlformats.org/presentationml/2006/ole">
             <mc:AlternateContent xmlns:mc="http://schemas.openxmlformats.org/markup-compatibility/2006">
               <mc:Choice xmlns:v="urn:schemas-microsoft-com:vml" Requires="v">
-                <p:oleObj spid="_x0000_s7" name="" r:id="rId3" imgW="895985" imgH="247015" progId="Word.Document.12">
+                <p:oleObj r:id="rId4" imgW="895985" imgH="247015" progId="Word.Document.12">
                   <p:embed/>
                 </p:oleObj>
               </mc:Choice>
               <mc:Fallback>
-                <p:oleObj name="" r:id="rId3" imgW="895985" imgH="247015" progId="Word.Document.12">
+                <p:oleObj r:id="rId4" imgW="895985" imgH="247015" progId="Word.Document.12">
                   <p:embed/>
                   <p:pic>
                     <p:nvPicPr>
@@ -4783,7 +4819,7 @@
                       <p:nvPr/>
                     </p:nvPicPr>
                     <p:blipFill>
-                      <a:blip r:embed="rId4"/>
+                      <a:blip r:embed="rId5"/>
                       <a:stretch>
                         <a:fillRect/>
                       </a:stretch>
@@ -4818,12 +4854,12 @@
           <a:graphicData uri="http://schemas.openxmlformats.org/presentationml/2006/ole">
             <mc:AlternateContent xmlns:mc="http://schemas.openxmlformats.org/markup-compatibility/2006">
               <mc:Choice xmlns:v="urn:schemas-microsoft-com:vml" Requires="v">
-                <p:oleObj spid="_x0000_s9" name="" r:id="rId5" imgW="714375" imgH="247015" progId="Word.Document.12">
+                <p:oleObj r:id="rId6" imgW="714375" imgH="247015" progId="Word.Document.12">
                   <p:embed/>
                 </p:oleObj>
               </mc:Choice>
               <mc:Fallback>
-                <p:oleObj name="" r:id="rId5" imgW="714375" imgH="247015" progId="Word.Document.12">
+                <p:oleObj r:id="rId6" imgW="714375" imgH="247015" progId="Word.Document.12">
                   <p:embed/>
                   <p:pic>
                     <p:nvPicPr>
@@ -4832,7 +4868,7 @@
                       <p:nvPr/>
                     </p:nvPicPr>
                     <p:blipFill>
-                      <a:blip r:embed="rId6"/>
+                      <a:blip r:embed="rId7"/>
                       <a:stretch>
                         <a:fillRect/>
                       </a:stretch>
@@ -4867,12 +4903,12 @@
           <a:graphicData uri="http://schemas.openxmlformats.org/presentationml/2006/ole">
             <mc:AlternateContent xmlns:mc="http://schemas.openxmlformats.org/markup-compatibility/2006">
               <mc:Choice xmlns:v="urn:schemas-microsoft-com:vml" Requires="v">
-                <p:oleObj spid="_x0000_s11" name="" r:id="rId7" imgW="2075815" imgH="504190" progId="Word.Document.12">
+                <p:oleObj r:id="rId8" imgW="2075815" imgH="504190" progId="Word.Document.12">
                   <p:embed/>
                 </p:oleObj>
               </mc:Choice>
               <mc:Fallback>
-                <p:oleObj name="" r:id="rId7" imgW="2075815" imgH="504190" progId="Word.Document.12">
+                <p:oleObj r:id="rId8" imgW="2075815" imgH="504190" progId="Word.Document.12">
                   <p:embed/>
                   <p:pic>
                     <p:nvPicPr>
@@ -4881,7 +4917,7 @@
                       <p:nvPr/>
                     </p:nvPicPr>
                     <p:blipFill>
-                      <a:blip r:embed="rId8"/>
+                      <a:blip r:embed="rId9"/>
                       <a:stretch>
                         <a:fillRect/>
                       </a:stretch>
@@ -4919,7 +4955,14 @@
         <p:cNvGrpSpPr/>
         <p:nvPr/>
       </p:nvGrpSpPr>
-      <p:grpSpPr/>
+      <p:grpSpPr>
+        <a:xfrm>
+          <a:off x="0" y="0"/>
+          <a:ext cx="0" cy="0"/>
+          <a:chOff x="0" y="0"/>
+          <a:chExt cx="0" cy="0"/>
+        </a:xfrm>
+      </p:grpSpPr>
       <p:sp>
         <p:nvSpPr>
           <p:cNvPr id="2" name="标题 1"/>
@@ -4933,6 +4976,7 @@
         <p:spPr/>
         <p:txBody>
           <a:bodyPr/>
+          <a:lstStyle/>
           <a:p>
             <a:r>
               <a:rPr lang="en-US" altLang="zh-CN" dirty="0">
@@ -4963,12 +5007,12 @@
         <p:spPr/>
         <p:txBody>
           <a:bodyPr/>
+          <a:lstStyle/>
           <a:p>
             <a:r>
               <a:rPr lang="zh-CN" altLang="en-US"/>
               <a:t>根据极大似然估计原理，身高分布的对数似然函数为</a:t>
             </a:r>
-            <a:endParaRPr lang="zh-CN" altLang="en-US"/>
           </a:p>
           <a:p>
             <a:endParaRPr lang="zh-CN" altLang="en-US"/>
@@ -4981,7 +5025,6 @@
               <a:rPr lang="zh-CN" altLang="en-US"/>
               <a:t>令对数似然函数对  和  的导数为0，即可求得 和  的估计值 和 </a:t>
             </a:r>
-            <a:endParaRPr lang="zh-CN" altLang="en-US"/>
           </a:p>
           <a:p>
             <a:endParaRPr lang="zh-CN" altLang="en-US"/>
@@ -5002,12 +5045,12 @@
           <a:graphicData uri="http://schemas.openxmlformats.org/presentationml/2006/ole">
             <mc:AlternateContent xmlns:mc="http://schemas.openxmlformats.org/markup-compatibility/2006">
               <mc:Choice xmlns:v="urn:schemas-microsoft-com:vml" Requires="v">
-                <p:oleObj spid="_x0000_s5" name="" r:id="rId1" imgW="3733800" imgH="438785" progId="Word.Document.12">
+                <p:oleObj r:id="rId2" imgW="3733800" imgH="438785" progId="Word.Document.12">
                   <p:embed/>
                 </p:oleObj>
               </mc:Choice>
               <mc:Fallback>
-                <p:oleObj name="" r:id="rId1" imgW="3733800" imgH="438785" progId="Word.Document.12">
+                <p:oleObj r:id="rId2" imgW="3733800" imgH="438785" progId="Word.Document.12">
                   <p:embed/>
                   <p:pic>
                     <p:nvPicPr>
@@ -5016,7 +5059,7 @@
                       <p:nvPr/>
                     </p:nvPicPr>
                     <p:blipFill>
-                      <a:blip r:embed="rId2"/>
+                      <a:blip r:embed="rId3"/>
                       <a:stretch>
                         <a:fillRect/>
                       </a:stretch>
@@ -5051,12 +5094,12 @@
           <a:graphicData uri="http://schemas.openxmlformats.org/presentationml/2006/ole">
             <mc:AlternateContent xmlns:mc="http://schemas.openxmlformats.org/markup-compatibility/2006">
               <mc:Choice xmlns:v="urn:schemas-microsoft-com:vml" Requires="v">
-                <p:oleObj spid="_x0000_s7" name="" r:id="rId3" imgW="170815" imgH="170815" progId="Word.Document.12">
+                <p:oleObj r:id="rId4" imgW="170815" imgH="170815" progId="Word.Document.12">
                   <p:embed/>
                 </p:oleObj>
               </mc:Choice>
               <mc:Fallback>
-                <p:oleObj name="" r:id="rId3" imgW="170815" imgH="170815" progId="Word.Document.12">
+                <p:oleObj r:id="rId4" imgW="170815" imgH="170815" progId="Word.Document.12">
                   <p:embed/>
                   <p:pic>
                     <p:nvPicPr>
@@ -5065,7 +5108,7 @@
                       <p:nvPr/>
                     </p:nvPicPr>
                     <p:blipFill>
-                      <a:blip r:embed="rId4"/>
+                      <a:blip r:embed="rId5"/>
                       <a:stretch>
                         <a:fillRect/>
                       </a:stretch>
@@ -5100,12 +5143,12 @@
           <a:graphicData uri="http://schemas.openxmlformats.org/presentationml/2006/ole">
             <mc:AlternateContent xmlns:mc="http://schemas.openxmlformats.org/markup-compatibility/2006">
               <mc:Choice xmlns:v="urn:schemas-microsoft-com:vml" Requires="v">
-                <p:oleObj spid="_x0000_s9" name="" r:id="rId5" imgW="210185" imgH="210185" progId="Word.Document.12">
+                <p:oleObj r:id="rId6" imgW="210185" imgH="210185" progId="Word.Document.12">
                   <p:embed/>
                 </p:oleObj>
               </mc:Choice>
               <mc:Fallback>
-                <p:oleObj name="" r:id="rId5" imgW="210185" imgH="210185" progId="Word.Document.12">
+                <p:oleObj r:id="rId6" imgW="210185" imgH="210185" progId="Word.Document.12">
                   <p:embed/>
                   <p:pic>
                     <p:nvPicPr>
@@ -5114,7 +5157,7 @@
                       <p:nvPr/>
                     </p:nvPicPr>
                     <p:blipFill>
-                      <a:blip r:embed="rId6"/>
+                      <a:blip r:embed="rId7"/>
                       <a:stretch>
                         <a:fillRect/>
                       </a:stretch>
@@ -5149,12 +5192,12 @@
           <a:graphicData uri="http://schemas.openxmlformats.org/presentationml/2006/ole">
             <mc:AlternateContent xmlns:mc="http://schemas.openxmlformats.org/markup-compatibility/2006">
               <mc:Choice xmlns:v="urn:schemas-microsoft-com:vml" Requires="v">
-                <p:oleObj spid="_x0000_s11" name="" r:id="rId7" imgW="170815" imgH="170815" progId="Word.Document.12">
+                <p:oleObj r:id="rId8" imgW="170815" imgH="170815" progId="Word.Document.12">
                   <p:embed/>
                 </p:oleObj>
               </mc:Choice>
               <mc:Fallback>
-                <p:oleObj name="" r:id="rId7" imgW="170815" imgH="170815" progId="Word.Document.12">
+                <p:oleObj r:id="rId8" imgW="170815" imgH="170815" progId="Word.Document.12">
                   <p:embed/>
                   <p:pic>
                     <p:nvPicPr>
@@ -5163,7 +5206,7 @@
                       <p:nvPr/>
                     </p:nvPicPr>
                     <p:blipFill>
-                      <a:blip r:embed="rId8"/>
+                      <a:blip r:embed="rId9"/>
                       <a:stretch>
                         <a:fillRect/>
                       </a:stretch>
@@ -5198,12 +5241,12 @@
           <a:graphicData uri="http://schemas.openxmlformats.org/presentationml/2006/ole">
             <mc:AlternateContent xmlns:mc="http://schemas.openxmlformats.org/markup-compatibility/2006">
               <mc:Choice xmlns:v="urn:schemas-microsoft-com:vml" Requires="v">
-                <p:oleObj spid="_x0000_s13" name="" r:id="rId9" imgW="210185" imgH="210185" progId="Word.Document.12">
+                <p:oleObj r:id="rId10" imgW="210185" imgH="210185" progId="Word.Document.12">
                   <p:embed/>
                 </p:oleObj>
               </mc:Choice>
               <mc:Fallback>
-                <p:oleObj name="" r:id="rId9" imgW="210185" imgH="210185" progId="Word.Document.12">
+                <p:oleObj r:id="rId10" imgW="210185" imgH="210185" progId="Word.Document.12">
                   <p:embed/>
                   <p:pic>
                     <p:nvPicPr>
@@ -5212,7 +5255,7 @@
                       <p:nvPr/>
                     </p:nvPicPr>
                     <p:blipFill>
-                      <a:blip r:embed="rId6"/>
+                      <a:blip r:embed="rId7"/>
                       <a:stretch>
                         <a:fillRect/>
                       </a:stretch>
@@ -5247,12 +5290,12 @@
           <a:graphicData uri="http://schemas.openxmlformats.org/presentationml/2006/ole">
             <mc:AlternateContent xmlns:mc="http://schemas.openxmlformats.org/markup-compatibility/2006">
               <mc:Choice xmlns:v="urn:schemas-microsoft-com:vml" Requires="v">
-                <p:oleObj spid="_x0000_s15" name="" r:id="rId10" imgW="170815" imgH="210185" progId="Word.Document.12">
+                <p:oleObj r:id="rId11" imgW="170815" imgH="210185" progId="Word.Document.12">
                   <p:embed/>
                 </p:oleObj>
               </mc:Choice>
               <mc:Fallback>
-                <p:oleObj name="" r:id="rId10" imgW="170815" imgH="210185" progId="Word.Document.12">
+                <p:oleObj r:id="rId11" imgW="170815" imgH="210185" progId="Word.Document.12">
                   <p:embed/>
                   <p:pic>
                     <p:nvPicPr>
@@ -5261,7 +5304,7 @@
                       <p:nvPr/>
                     </p:nvPicPr>
                     <p:blipFill>
-                      <a:blip r:embed="rId11"/>
+                      <a:blip r:embed="rId12"/>
                       <a:stretch>
                         <a:fillRect/>
                       </a:stretch>
@@ -5296,12 +5339,12 @@
           <a:graphicData uri="http://schemas.openxmlformats.org/presentationml/2006/ole">
             <mc:AlternateContent xmlns:mc="http://schemas.openxmlformats.org/markup-compatibility/2006">
               <mc:Choice xmlns:v="urn:schemas-microsoft-com:vml" Requires="v">
-                <p:oleObj spid="_x0000_s17" name="" r:id="rId12" imgW="210185" imgH="210185" progId="Word.Document.12">
+                <p:oleObj r:id="rId13" imgW="210185" imgH="210185" progId="Word.Document.12">
                   <p:embed/>
                 </p:oleObj>
               </mc:Choice>
               <mc:Fallback>
-                <p:oleObj name="" r:id="rId12" imgW="210185" imgH="210185" progId="Word.Document.12">
+                <p:oleObj r:id="rId13" imgW="210185" imgH="210185" progId="Word.Document.12">
                   <p:embed/>
                   <p:pic>
                     <p:nvPicPr>
@@ -5310,7 +5353,7 @@
                       <p:nvPr/>
                     </p:nvPicPr>
                     <p:blipFill>
-                      <a:blip r:embed="rId13"/>
+                      <a:blip r:embed="rId14"/>
                       <a:stretch>
                         <a:fillRect/>
                       </a:stretch>
@@ -5345,12 +5388,12 @@
           <a:graphicData uri="http://schemas.openxmlformats.org/presentationml/2006/ole">
             <mc:AlternateContent xmlns:mc="http://schemas.openxmlformats.org/markup-compatibility/2006">
               <mc:Choice xmlns:v="urn:schemas-microsoft-com:vml" Requires="v">
-                <p:oleObj spid="_x0000_s19" name="" r:id="rId14" imgW="1219200" imgH="847725" progId="Word.Document.12">
+                <p:oleObj r:id="rId15" imgW="1219200" imgH="847725" progId="Word.Document.12">
                   <p:embed/>
                 </p:oleObj>
               </mc:Choice>
               <mc:Fallback>
-                <p:oleObj name="" r:id="rId14" imgW="1219200" imgH="847725" progId="Word.Document.12">
+                <p:oleObj r:id="rId15" imgW="1219200" imgH="847725" progId="Word.Document.12">
                   <p:embed/>
                   <p:pic>
                     <p:nvPicPr>
@@ -5359,7 +5402,7 @@
                       <p:nvPr/>
                     </p:nvPicPr>
                     <p:blipFill>
-                      <a:blip r:embed="rId15"/>
+                      <a:blip r:embed="rId16"/>
                       <a:stretch>
                         <a:fillRect/>
                       </a:stretch>
@@ -5397,7 +5440,14 @@
         <p:cNvGrpSpPr/>
         <p:nvPr/>
       </p:nvGrpSpPr>
-      <p:grpSpPr/>
+      <p:grpSpPr>
+        <a:xfrm>
+          <a:off x="0" y="0"/>
+          <a:ext cx="0" cy="0"/>
+          <a:chOff x="0" y="0"/>
+          <a:chExt cx="0" cy="0"/>
+        </a:xfrm>
+      </p:grpSpPr>
       <p:sp>
         <p:nvSpPr>
           <p:cNvPr id="2" name="标题 1"/>
@@ -5416,6 +5466,7 @@
         </p:spPr>
         <p:txBody>
           <a:bodyPr/>
+          <a:lstStyle/>
           <a:p>
             <a:r>
               <a:rPr lang="en-US" altLang="zh-CN" dirty="0">
@@ -5446,12 +5497,12 @@
         <p:spPr/>
         <p:txBody>
           <a:bodyPr/>
+          <a:lstStyle/>
           <a:p>
             <a:r>
               <a:rPr lang="zh-CN" altLang="en-US"/>
               <a:t>现在，假设我们需要对全部的样本进行聚类，分成男人和女人两个类别。根据大数定律，男人和女人的身高分别服从高斯分布，设其参数分别为      和       。估计出这两个分布的参数，即可估计出任意样本属于这两个分布的概率。高斯混合模型就是基于这样的思想完成聚类任务的。</a:t>
             </a:r>
-            <a:endParaRPr lang="zh-CN" altLang="en-US"/>
           </a:p>
         </p:txBody>
       </p:sp>
@@ -5469,12 +5520,12 @@
           <a:graphicData uri="http://schemas.openxmlformats.org/presentationml/2006/ole">
             <mc:AlternateContent xmlns:mc="http://schemas.openxmlformats.org/markup-compatibility/2006">
               <mc:Choice xmlns:v="urn:schemas-microsoft-com:vml" Requires="v">
-                <p:oleObj spid="_x0000_s5" name="" r:id="rId1" imgW="791210" imgH="266700" progId="Word.Document.12">
+                <p:oleObj r:id="rId2" imgW="791210" imgH="266700" progId="Word.Document.12">
                   <p:embed/>
                 </p:oleObj>
               </mc:Choice>
               <mc:Fallback>
-                <p:oleObj name="" r:id="rId1" imgW="791210" imgH="266700" progId="Word.Document.12">
+                <p:oleObj r:id="rId2" imgW="791210" imgH="266700" progId="Word.Document.12">
                   <p:embed/>
                   <p:pic>
                     <p:nvPicPr>
@@ -5483,7 +5534,7 @@
                       <p:nvPr/>
                     </p:nvPicPr>
                     <p:blipFill>
-                      <a:blip r:embed="rId2"/>
+                      <a:blip r:embed="rId3"/>
                       <a:stretch>
                         <a:fillRect/>
                       </a:stretch>
@@ -5518,12 +5569,12 @@
           <a:graphicData uri="http://schemas.openxmlformats.org/presentationml/2006/ole">
             <mc:AlternateContent xmlns:mc="http://schemas.openxmlformats.org/markup-compatibility/2006">
               <mc:Choice xmlns:v="urn:schemas-microsoft-com:vml" Requires="v">
-                <p:oleObj spid="_x0000_s7" name="" r:id="rId3" imgW="791210" imgH="266700" progId="Word.Document.12">
+                <p:oleObj r:id="rId4" imgW="791210" imgH="266700" progId="Word.Document.12">
                   <p:embed/>
                 </p:oleObj>
               </mc:Choice>
               <mc:Fallback>
-                <p:oleObj name="" r:id="rId3" imgW="791210" imgH="266700" progId="Word.Document.12">
+                <p:oleObj r:id="rId4" imgW="791210" imgH="266700" progId="Word.Document.12">
                   <p:embed/>
                   <p:pic>
                     <p:nvPicPr>
@@ -5532,7 +5583,7 @@
                       <p:nvPr/>
                     </p:nvPicPr>
                     <p:blipFill>
-                      <a:blip r:embed="rId4"/>
+                      <a:blip r:embed="rId5"/>
                       <a:stretch>
                         <a:fillRect/>
                       </a:stretch>
@@ -5570,7 +5621,14 @@
         <p:cNvGrpSpPr/>
         <p:nvPr/>
       </p:nvGrpSpPr>
-      <p:grpSpPr/>
+      <p:grpSpPr>
+        <a:xfrm>
+          <a:off x="0" y="0"/>
+          <a:ext cx="0" cy="0"/>
+          <a:chOff x="0" y="0"/>
+          <a:chExt cx="0" cy="0"/>
+        </a:xfrm>
+      </p:grpSpPr>
       <p:sp>
         <p:nvSpPr>
           <p:cNvPr id="2" name="标题 1"/>
@@ -5584,6 +5642,7 @@
         <p:spPr/>
         <p:txBody>
           <a:bodyPr/>
+          <a:lstStyle/>
           <a:p>
             <a:r>
               <a:rPr lang="en-US" altLang="zh-CN" dirty="0">
@@ -5614,12 +5673,12 @@
         <p:spPr/>
         <p:txBody>
           <a:bodyPr/>
+          <a:lstStyle/>
           <a:p>
             <a:r>
               <a:rPr lang="zh-CN" altLang="en-US"/>
               <a:t>高斯混合模型是若干个高斯模型的加权求和，其形式为</a:t>
             </a:r>
-            <a:endParaRPr lang="zh-CN" altLang="en-US"/>
           </a:p>
           <a:p>
             <a:endParaRPr lang="zh-CN" altLang="en-US"/>
@@ -5640,14 +5699,12 @@
               <a:rPr lang="zh-CN" altLang="en-US"/>
               <a:t>个子模型的权重，        为混合模型的参数。高斯混合假设数据的产生过程分为两步</a:t>
             </a:r>
-            <a:endParaRPr lang="zh-CN" altLang="en-US"/>
           </a:p>
           <a:p>
             <a:r>
               <a:rPr lang="zh-CN" altLang="en-US"/>
               <a:t>1)	以概率         采样选取一个高斯分布 </a:t>
             </a:r>
-            <a:endParaRPr lang="zh-CN" altLang="en-US"/>
           </a:p>
           <a:p>
             <a:r>
@@ -5662,7 +5719,6 @@
               <a:rPr lang="zh-CN" altLang="en-US"/>
               <a:t>次采样后获得观测数据集合</a:t>
             </a:r>
-            <a:endParaRPr lang="zh-CN" altLang="en-US"/>
           </a:p>
           <a:p>
             <a:endParaRPr lang="zh-CN" altLang="en-US"/>
@@ -5683,12 +5739,12 @@
           <a:graphicData uri="http://schemas.openxmlformats.org/presentationml/2006/ole">
             <mc:AlternateContent xmlns:mc="http://schemas.openxmlformats.org/markup-compatibility/2006">
               <mc:Choice xmlns:v="urn:schemas-microsoft-com:vml" Requires="v">
-                <p:oleObj spid="_x0000_s5" name="" r:id="rId1" imgW="1447800" imgH="438785" progId="Word.Document.12">
+                <p:oleObj r:id="rId2" imgW="1447800" imgH="438785" progId="Word.Document.12">
                   <p:embed/>
                 </p:oleObj>
               </mc:Choice>
               <mc:Fallback>
-                <p:oleObj name="" r:id="rId1" imgW="1447800" imgH="438785" progId="Word.Document.12">
+                <p:oleObj r:id="rId2" imgW="1447800" imgH="438785" progId="Word.Document.12">
                   <p:embed/>
                   <p:pic>
                     <p:nvPicPr>
@@ -5697,7 +5753,7 @@
                       <p:nvPr/>
                     </p:nvPicPr>
                     <p:blipFill>
-                      <a:blip r:embed="rId2"/>
+                      <a:blip r:embed="rId3"/>
                       <a:stretch>
                         <a:fillRect/>
                       </a:stretch>
@@ -5732,12 +5788,12 @@
           <a:graphicData uri="http://schemas.openxmlformats.org/presentationml/2006/ole">
             <mc:AlternateContent xmlns:mc="http://schemas.openxmlformats.org/markup-compatibility/2006">
               <mc:Choice xmlns:v="urn:schemas-microsoft-com:vml" Requires="v">
-                <p:oleObj spid="_x0000_s7" name="" r:id="rId3" imgW="170815" imgH="247015" progId="Word.Document.12">
+                <p:oleObj r:id="rId4" imgW="170815" imgH="247015" progId="Word.Document.12">
                   <p:embed/>
                 </p:oleObj>
               </mc:Choice>
               <mc:Fallback>
-                <p:oleObj name="" r:id="rId3" imgW="170815" imgH="247015" progId="Word.Document.12">
+                <p:oleObj r:id="rId4" imgW="170815" imgH="247015" progId="Word.Document.12">
                   <p:embed/>
                   <p:pic>
                     <p:nvPicPr>
@@ -5746,7 +5802,7 @@
                       <p:nvPr/>
                     </p:nvPicPr>
                     <p:blipFill>
-                      <a:blip r:embed="rId4"/>
+                      <a:blip r:embed="rId5"/>
                       <a:stretch>
                         <a:fillRect/>
                       </a:stretch>
@@ -5781,12 +5837,12 @@
           <a:graphicData uri="http://schemas.openxmlformats.org/presentationml/2006/ole">
             <mc:AlternateContent xmlns:mc="http://schemas.openxmlformats.org/markup-compatibility/2006">
               <mc:Choice xmlns:v="urn:schemas-microsoft-com:vml" Requires="v">
-                <p:oleObj spid="_x0000_s9" name="" r:id="rId5" imgW="1181100" imgH="247015" progId="Word.Document.12">
+                <p:oleObj r:id="rId6" imgW="1181100" imgH="247015" progId="Word.Document.12">
                   <p:embed/>
                 </p:oleObj>
               </mc:Choice>
               <mc:Fallback>
-                <p:oleObj name="" r:id="rId5" imgW="1181100" imgH="247015" progId="Word.Document.12">
+                <p:oleObj r:id="rId6" imgW="1181100" imgH="247015" progId="Word.Document.12">
                   <p:embed/>
                   <p:pic>
                     <p:nvPicPr>
@@ -5795,7 +5851,7 @@
                       <p:nvPr/>
                     </p:nvPicPr>
                     <p:blipFill>
-                      <a:blip r:embed="rId6"/>
+                      <a:blip r:embed="rId7"/>
                       <a:stretch>
                         <a:fillRect/>
                       </a:stretch>
@@ -5830,12 +5886,12 @@
           <a:graphicData uri="http://schemas.openxmlformats.org/presentationml/2006/ole">
             <mc:AlternateContent xmlns:mc="http://schemas.openxmlformats.org/markup-compatibility/2006">
               <mc:Choice xmlns:v="urn:schemas-microsoft-com:vml" Requires="v">
-                <p:oleObj spid="_x0000_s11" name="" r:id="rId7" imgW="808990" imgH="247015" progId="Word.Document.12">
+                <p:oleObj r:id="rId8" imgW="808990" imgH="247015" progId="Word.Document.12">
                   <p:embed/>
                 </p:oleObj>
               </mc:Choice>
               <mc:Fallback>
-                <p:oleObj name="" r:id="rId7" imgW="808990" imgH="247015" progId="Word.Document.12">
+                <p:oleObj r:id="rId8" imgW="808990" imgH="247015" progId="Word.Document.12">
                   <p:embed/>
                   <p:pic>
                     <p:nvPicPr>
@@ -5844,7 +5900,7 @@
                       <p:nvPr/>
                     </p:nvPicPr>
                     <p:blipFill>
-                      <a:blip r:embed="rId8"/>
+                      <a:blip r:embed="rId9"/>
                       <a:stretch>
                         <a:fillRect/>
                       </a:stretch>
@@ -5879,12 +5935,12 @@
           <a:graphicData uri="http://schemas.openxmlformats.org/presentationml/2006/ole">
             <mc:AlternateContent xmlns:mc="http://schemas.openxmlformats.org/markup-compatibility/2006">
               <mc:Choice xmlns:v="urn:schemas-microsoft-com:vml" Requires="v">
-                <p:oleObj spid="_x0000_s13" name="" r:id="rId9" imgW="533400" imgH="247015" progId="Word.Document.12">
+                <p:oleObj r:id="rId10" imgW="533400" imgH="247015" progId="Word.Document.12">
                   <p:embed/>
                 </p:oleObj>
               </mc:Choice>
               <mc:Fallback>
-                <p:oleObj name="" r:id="rId9" imgW="533400" imgH="247015" progId="Word.Document.12">
+                <p:oleObj r:id="rId10" imgW="533400" imgH="247015" progId="Word.Document.12">
                   <p:embed/>
                   <p:pic>
                     <p:nvPicPr>
@@ -5893,7 +5949,7 @@
                       <p:nvPr/>
                     </p:nvPicPr>
                     <p:blipFill>
-                      <a:blip r:embed="rId10"/>
+                      <a:blip r:embed="rId11"/>
                       <a:stretch>
                         <a:fillRect/>
                       </a:stretch>
@@ -5928,12 +5984,12 @@
           <a:graphicData uri="http://schemas.openxmlformats.org/presentationml/2006/ole">
             <mc:AlternateContent xmlns:mc="http://schemas.openxmlformats.org/markup-compatibility/2006">
               <mc:Choice xmlns:v="urn:schemas-microsoft-com:vml" Requires="v">
-                <p:oleObj spid="_x0000_s15" name="" r:id="rId11" imgW="533400" imgH="247015" progId="Word.Document.12">
+                <p:oleObj r:id="rId12" imgW="533400" imgH="247015" progId="Word.Document.12">
                   <p:embed/>
                 </p:oleObj>
               </mc:Choice>
               <mc:Fallback>
-                <p:oleObj name="" r:id="rId11" imgW="533400" imgH="247015" progId="Word.Document.12">
+                <p:oleObj r:id="rId12" imgW="533400" imgH="247015" progId="Word.Document.12">
                   <p:embed/>
                   <p:pic>
                     <p:nvPicPr>
@@ -5942,7 +5998,7 @@
                       <p:nvPr/>
                     </p:nvPicPr>
                     <p:blipFill>
-                      <a:blip r:embed="rId12"/>
+                      <a:blip r:embed="rId13"/>
                       <a:stretch>
                         <a:fillRect/>
                       </a:stretch>
@@ -5977,12 +6033,12 @@
           <a:graphicData uri="http://schemas.openxmlformats.org/presentationml/2006/ole">
             <mc:AlternateContent xmlns:mc="http://schemas.openxmlformats.org/markup-compatibility/2006">
               <mc:Choice xmlns:v="urn:schemas-microsoft-com:vml" Requires="v">
-                <p:oleObj spid="_x0000_s17" name="" r:id="rId13" imgW="914400" imgH="266700" progId="Word.Document.12">
+                <p:oleObj r:id="rId14" imgW="914400" imgH="266700" progId="Word.Document.12">
                   <p:embed/>
                 </p:oleObj>
               </mc:Choice>
               <mc:Fallback>
-                <p:oleObj name="" r:id="rId13" imgW="914400" imgH="266700" progId="Word.Document.12">
+                <p:oleObj r:id="rId14" imgW="914400" imgH="266700" progId="Word.Document.12">
                   <p:embed/>
                   <p:pic>
                     <p:nvPicPr>
@@ -5991,7 +6047,7 @@
                       <p:nvPr/>
                     </p:nvPicPr>
                     <p:blipFill>
-                      <a:blip r:embed="rId14"/>
+                      <a:blip r:embed="rId15"/>
                       <a:stretch>
                         <a:fillRect/>
                       </a:stretch>
@@ -6056,7 +6112,6 @@
               <a:rPr lang="zh-CN" altLang="en-US" dirty="0"/>
               <a:t>主要内容</a:t>
             </a:r>
-            <a:endParaRPr lang="zh-CN" altLang="en-US" dirty="0"/>
           </a:p>
         </p:txBody>
       </p:sp>
@@ -6076,100 +6131,100 @@
           <a:lstStyle/>
           <a:p>
             <a:r>
-              <a:rPr lang="en-US" altLang="zh-CN" dirty="0" smtClean="0">
+              <a:rPr lang="en-US" altLang="zh-CN" dirty="0">
                 <a:latin typeface="宋体" panose="02010600030101010101" pitchFamily="2" charset="-122"/>
                 <a:ea typeface="宋体" panose="02010600030101010101" pitchFamily="2" charset="-122"/>
               </a:rPr>
               <a:t>EM</a:t>
             </a:r>
             <a:r>
-              <a:rPr lang="zh-CN" altLang="en-US" dirty="0" smtClean="0">
+              <a:rPr lang="zh-CN" altLang="en-US" dirty="0">
                 <a:latin typeface="宋体" panose="02010600030101010101" pitchFamily="2" charset="-122"/>
                 <a:ea typeface="宋体" panose="02010600030101010101" pitchFamily="2" charset="-122"/>
               </a:rPr>
               <a:t>算法的简介</a:t>
             </a:r>
-            <a:endParaRPr lang="en-US" altLang="zh-CN" dirty="0" smtClean="0">
+            <a:endParaRPr lang="en-US" altLang="zh-CN" dirty="0">
               <a:latin typeface="宋体" panose="02010600030101010101" pitchFamily="2" charset="-122"/>
               <a:ea typeface="宋体" panose="02010600030101010101" pitchFamily="2" charset="-122"/>
             </a:endParaRPr>
           </a:p>
           <a:p>
             <a:r>
-              <a:rPr lang="en-US" altLang="zh-CN" dirty="0" smtClean="0">
+              <a:rPr lang="en-US" altLang="zh-CN" dirty="0">
                 <a:latin typeface="宋体" panose="02010600030101010101" pitchFamily="2" charset="-122"/>
                 <a:ea typeface="宋体" panose="02010600030101010101" pitchFamily="2" charset="-122"/>
               </a:rPr>
               <a:t>EM</a:t>
             </a:r>
             <a:r>
-              <a:rPr lang="zh-CN" altLang="en-US" dirty="0" smtClean="0">
+              <a:rPr lang="zh-CN" altLang="en-US" dirty="0">
                 <a:latin typeface="宋体" panose="02010600030101010101" pitchFamily="2" charset="-122"/>
                 <a:ea typeface="宋体" panose="02010600030101010101" pitchFamily="2" charset="-122"/>
               </a:rPr>
               <a:t>算法的数学推导</a:t>
             </a:r>
-            <a:endParaRPr lang="en-US" altLang="zh-CN" dirty="0" smtClean="0">
+            <a:endParaRPr lang="en-US" altLang="zh-CN" dirty="0">
               <a:latin typeface="宋体" panose="02010600030101010101" pitchFamily="2" charset="-122"/>
               <a:ea typeface="宋体" panose="02010600030101010101" pitchFamily="2" charset="-122"/>
             </a:endParaRPr>
           </a:p>
           <a:p>
             <a:r>
-              <a:rPr lang="en-US" altLang="zh-CN" dirty="0" smtClean="0">
+              <a:rPr lang="en-US" altLang="zh-CN" dirty="0">
                 <a:latin typeface="宋体" panose="02010600030101010101" pitchFamily="2" charset="-122"/>
                 <a:ea typeface="宋体" panose="02010600030101010101" pitchFamily="2" charset="-122"/>
               </a:rPr>
               <a:t>EM</a:t>
             </a:r>
             <a:r>
-              <a:rPr lang="zh-CN" altLang="en-US" dirty="0" smtClean="0">
+              <a:rPr lang="zh-CN" altLang="en-US" dirty="0">
                 <a:latin typeface="宋体" panose="02010600030101010101" pitchFamily="2" charset="-122"/>
                 <a:ea typeface="宋体" panose="02010600030101010101" pitchFamily="2" charset="-122"/>
               </a:rPr>
               <a:t>算法的流程</a:t>
             </a:r>
-            <a:endParaRPr lang="en-US" altLang="zh-CN" dirty="0" smtClean="0">
+            <a:endParaRPr lang="en-US" altLang="zh-CN" dirty="0">
               <a:latin typeface="宋体" panose="02010600030101010101" pitchFamily="2" charset="-122"/>
               <a:ea typeface="宋体" panose="02010600030101010101" pitchFamily="2" charset="-122"/>
             </a:endParaRPr>
           </a:p>
           <a:p>
             <a:r>
-              <a:rPr lang="en-US" altLang="zh-CN" dirty="0" smtClean="0">
+              <a:rPr lang="en-US" altLang="zh-CN" dirty="0">
                 <a:latin typeface="宋体" panose="02010600030101010101" pitchFamily="2" charset="-122"/>
                 <a:ea typeface="宋体" panose="02010600030101010101" pitchFamily="2" charset="-122"/>
               </a:rPr>
               <a:t>EM</a:t>
             </a:r>
             <a:r>
-              <a:rPr lang="zh-CN" altLang="en-US" dirty="0" smtClean="0">
+              <a:rPr lang="zh-CN" altLang="en-US" dirty="0">
                 <a:latin typeface="宋体" panose="02010600030101010101" pitchFamily="2" charset="-122"/>
                 <a:ea typeface="宋体" panose="02010600030101010101" pitchFamily="2" charset="-122"/>
               </a:rPr>
               <a:t>算法的优缺点</a:t>
             </a:r>
-            <a:endParaRPr lang="en-US" altLang="zh-CN" dirty="0" smtClean="0">
+            <a:endParaRPr lang="en-US" altLang="zh-CN" dirty="0">
               <a:latin typeface="宋体" panose="02010600030101010101" pitchFamily="2" charset="-122"/>
               <a:ea typeface="宋体" panose="02010600030101010101" pitchFamily="2" charset="-122"/>
             </a:endParaRPr>
           </a:p>
           <a:p>
             <a:r>
-              <a:rPr lang="en-US" altLang="zh-CN" dirty="0" smtClean="0">
+              <a:rPr lang="en-US" altLang="zh-CN" dirty="0">
                 <a:latin typeface="宋体" panose="02010600030101010101" pitchFamily="2" charset="-122"/>
                 <a:ea typeface="宋体" panose="02010600030101010101" pitchFamily="2" charset="-122"/>
               </a:rPr>
               <a:t>EM</a:t>
             </a:r>
             <a:r>
-              <a:rPr lang="zh-CN" altLang="en-US" dirty="0" smtClean="0">
+              <a:rPr lang="zh-CN" altLang="en-US" dirty="0">
                 <a:latin typeface="宋体" panose="02010600030101010101" pitchFamily="2" charset="-122"/>
                 <a:ea typeface="宋体" panose="02010600030101010101" pitchFamily="2" charset="-122"/>
               </a:rPr>
               <a:t>算法的应用</a:t>
             </a:r>
-            <a:endParaRPr lang="en-US" altLang="zh-CN" dirty="0" smtClean="0">
+            <a:endParaRPr lang="en-US" altLang="zh-CN" dirty="0">
               <a:latin typeface="宋体" panose="02010600030101010101" pitchFamily="2" charset="-122"/>
               <a:ea typeface="宋体" panose="02010600030101010101" pitchFamily="2" charset="-122"/>
             </a:endParaRPr>
@@ -6196,7 +6251,14 @@
         <p:cNvGrpSpPr/>
         <p:nvPr/>
       </p:nvGrpSpPr>
-      <p:grpSpPr/>
+      <p:grpSpPr>
+        <a:xfrm>
+          <a:off x="0" y="0"/>
+          <a:ext cx="0" cy="0"/>
+          <a:chOff x="0" y="0"/>
+          <a:chExt cx="0" cy="0"/>
+        </a:xfrm>
+      </p:grpSpPr>
       <p:sp>
         <p:nvSpPr>
           <p:cNvPr id="2" name="标题 1"/>
@@ -6210,6 +6272,7 @@
         <p:spPr/>
         <p:txBody>
           <a:bodyPr/>
+          <a:lstStyle/>
           <a:p>
             <a:r>
               <a:rPr lang="en-US" altLang="zh-CN" dirty="0">
@@ -6240,6 +6303,7 @@
         <p:spPr/>
         <p:txBody>
           <a:bodyPr/>
+          <a:lstStyle/>
           <a:p>
             <a:r>
               <a:rPr lang="zh-CN" altLang="en-US"/>
@@ -6253,7 +6317,6 @@
               <a:rPr lang="zh-CN" altLang="en-US"/>
               <a:t>次采样过程中选择的高斯分布编号。由于  不可观测，所以称  为隐变量。</a:t>
             </a:r>
-            <a:endParaRPr lang="zh-CN" altLang="en-US"/>
           </a:p>
         </p:txBody>
       </p:sp>
@@ -6271,12 +6334,12 @@
           <a:graphicData uri="http://schemas.openxmlformats.org/presentationml/2006/ole">
             <mc:AlternateContent xmlns:mc="http://schemas.openxmlformats.org/markup-compatibility/2006">
               <mc:Choice xmlns:v="urn:schemas-microsoft-com:vml" Requires="v">
-                <p:oleObj spid="_x0000_s5" name="" r:id="rId1" imgW="914400" imgH="266700" progId="Word.Document.12">
+                <p:oleObj r:id="rId2" imgW="914400" imgH="266700" progId="Word.Document.12">
                   <p:embed/>
                 </p:oleObj>
               </mc:Choice>
               <mc:Fallback>
-                <p:oleObj name="" r:id="rId1" imgW="914400" imgH="266700" progId="Word.Document.12">
+                <p:oleObj r:id="rId2" imgW="914400" imgH="266700" progId="Word.Document.12">
                   <p:embed/>
                   <p:pic>
                     <p:nvPicPr>
@@ -6285,7 +6348,7 @@
                       <p:nvPr/>
                     </p:nvPicPr>
                     <p:blipFill>
-                      <a:blip r:embed="rId2"/>
+                      <a:blip r:embed="rId3"/>
                       <a:stretch>
                         <a:fillRect/>
                       </a:stretch>
@@ -6320,12 +6383,12 @@
           <a:graphicData uri="http://schemas.openxmlformats.org/presentationml/2006/ole">
             <mc:AlternateContent xmlns:mc="http://schemas.openxmlformats.org/markup-compatibility/2006">
               <mc:Choice xmlns:v="urn:schemas-microsoft-com:vml" Requires="v">
-                <p:oleObj spid="_x0000_s7" name="" r:id="rId3" imgW="1114425" imgH="275590" progId="Word.Document.12">
+                <p:oleObj r:id="rId4" imgW="1114425" imgH="275590" progId="Word.Document.12">
                   <p:embed/>
                 </p:oleObj>
               </mc:Choice>
               <mc:Fallback>
-                <p:oleObj name="" r:id="rId3" imgW="1114425" imgH="275590" progId="Word.Document.12">
+                <p:oleObj r:id="rId4" imgW="1114425" imgH="275590" progId="Word.Document.12">
                   <p:embed/>
                   <p:pic>
                     <p:nvPicPr>
@@ -6334,7 +6397,7 @@
                       <p:nvPr/>
                     </p:nvPicPr>
                     <p:blipFill>
-                      <a:blip r:embed="rId4"/>
+                      <a:blip r:embed="rId5"/>
                       <a:stretch>
                         <a:fillRect/>
                       </a:stretch>
@@ -6369,12 +6432,12 @@
           <a:graphicData uri="http://schemas.openxmlformats.org/presentationml/2006/ole">
             <mc:AlternateContent xmlns:mc="http://schemas.openxmlformats.org/markup-compatibility/2006">
               <mc:Choice xmlns:v="urn:schemas-microsoft-com:vml" Requires="v">
-                <p:oleObj spid="_x0000_s9" name="" r:id="rId5" imgW="152400" imgH="247015" progId="Word.Document.12">
+                <p:oleObj r:id="rId6" imgW="152400" imgH="247015" progId="Word.Document.12">
                   <p:embed/>
                 </p:oleObj>
               </mc:Choice>
               <mc:Fallback>
-                <p:oleObj name="" r:id="rId5" imgW="152400" imgH="247015" progId="Word.Document.12">
+                <p:oleObj r:id="rId6" imgW="152400" imgH="247015" progId="Word.Document.12">
                   <p:embed/>
                   <p:pic>
                     <p:nvPicPr>
@@ -6383,7 +6446,7 @@
                       <p:nvPr/>
                     </p:nvPicPr>
                     <p:blipFill>
-                      <a:blip r:embed="rId6"/>
+                      <a:blip r:embed="rId7"/>
                       <a:stretch>
                         <a:fillRect/>
                       </a:stretch>
@@ -6418,12 +6481,12 @@
           <a:graphicData uri="http://schemas.openxmlformats.org/presentationml/2006/ole">
             <mc:AlternateContent xmlns:mc="http://schemas.openxmlformats.org/markup-compatibility/2006">
               <mc:Choice xmlns:v="urn:schemas-microsoft-com:vml" Requires="v">
-                <p:oleObj spid="_x0000_s11" name="" r:id="rId7" imgW="152400" imgH="247015" progId="Word.Document.12">
+                <p:oleObj r:id="rId8" imgW="152400" imgH="247015" progId="Word.Document.12">
                   <p:embed/>
                 </p:oleObj>
               </mc:Choice>
               <mc:Fallback>
-                <p:oleObj name="" r:id="rId7" imgW="152400" imgH="247015" progId="Word.Document.12">
+                <p:oleObj r:id="rId8" imgW="152400" imgH="247015" progId="Word.Document.12">
                   <p:embed/>
                   <p:pic>
                     <p:nvPicPr>
@@ -6432,7 +6495,7 @@
                       <p:nvPr/>
                     </p:nvPicPr>
                     <p:blipFill>
-                      <a:blip r:embed="rId6"/>
+                      <a:blip r:embed="rId7"/>
                       <a:stretch>
                         <a:fillRect/>
                       </a:stretch>
@@ -6470,7 +6533,14 @@
         <p:cNvGrpSpPr/>
         <p:nvPr/>
       </p:nvGrpSpPr>
-      <p:grpSpPr/>
+      <p:grpSpPr>
+        <a:xfrm>
+          <a:off x="0" y="0"/>
+          <a:ext cx="0" cy="0"/>
+          <a:chOff x="0" y="0"/>
+          <a:chExt cx="0" cy="0"/>
+        </a:xfrm>
+      </p:grpSpPr>
       <p:sp>
         <p:nvSpPr>
           <p:cNvPr id="2" name="标题 1"/>
@@ -6484,6 +6554,7 @@
         <p:spPr/>
         <p:txBody>
           <a:bodyPr/>
+          <a:lstStyle/>
           <a:p>
             <a:r>
               <a:rPr lang="en-US" altLang="zh-CN" dirty="0">
@@ -6514,26 +6585,24 @@
         <p:spPr/>
         <p:txBody>
           <a:bodyPr/>
+          <a:lstStyle/>
           <a:p>
             <a:r>
               <a:rPr lang="zh-CN" altLang="en-US"/>
               <a:t>以人群身高的聚类问题为例，可以认为采样获得学生身高数据集的过程为</a:t>
             </a:r>
-            <a:endParaRPr lang="zh-CN" altLang="en-US"/>
           </a:p>
           <a:p>
             <a:r>
               <a:rPr lang="zh-CN" altLang="en-US"/>
               <a:t>1)	以概率    随机选择一个性别   ，设这个性别的身高服从高斯分布 </a:t>
             </a:r>
-            <a:endParaRPr lang="zh-CN" altLang="en-US"/>
           </a:p>
           <a:p>
             <a:r>
               <a:rPr lang="zh-CN" altLang="en-US"/>
               <a:t>2)	在     中进行采样获得一个身高数据 </a:t>
             </a:r>
-            <a:endParaRPr lang="zh-CN" altLang="en-US"/>
           </a:p>
           <a:p>
             <a:r>
@@ -6548,7 +6617,6 @@
               <a:rPr lang="zh-CN" altLang="en-US"/>
               <a:t>个高斯分布的概率。</a:t>
             </a:r>
-            <a:endParaRPr lang="zh-CN" altLang="en-US"/>
           </a:p>
         </p:txBody>
       </p:sp>
@@ -6566,12 +6634,12 @@
           <a:graphicData uri="http://schemas.openxmlformats.org/presentationml/2006/ole">
             <mc:AlternateContent xmlns:mc="http://schemas.openxmlformats.org/markup-compatibility/2006">
               <mc:Choice xmlns:v="urn:schemas-microsoft-com:vml" Requires="v">
-                <p:oleObj spid="_x0000_s5" name="" r:id="rId1" imgW="381000" imgH="247015" progId="Word.Document.12">
+                <p:oleObj r:id="rId2" imgW="381000" imgH="247015" progId="Word.Document.12">
                   <p:embed/>
                 </p:oleObj>
               </mc:Choice>
               <mc:Fallback>
-                <p:oleObj name="" r:id="rId1" imgW="381000" imgH="247015" progId="Word.Document.12">
+                <p:oleObj r:id="rId2" imgW="381000" imgH="247015" progId="Word.Document.12">
                   <p:embed/>
                   <p:pic>
                     <p:nvPicPr>
@@ -6580,7 +6648,7 @@
                       <p:nvPr/>
                     </p:nvPicPr>
                     <p:blipFill>
-                      <a:blip r:embed="rId2"/>
+                      <a:blip r:embed="rId3"/>
                       <a:stretch>
                         <a:fillRect/>
                       </a:stretch>
@@ -6615,12 +6683,12 @@
           <a:graphicData uri="http://schemas.openxmlformats.org/presentationml/2006/ole">
             <mc:AlternateContent xmlns:mc="http://schemas.openxmlformats.org/markup-compatibility/2006">
               <mc:Choice xmlns:v="urn:schemas-microsoft-com:vml" Requires="v">
-                <p:oleObj spid="_x0000_s7" name="" r:id="rId3" imgW="152400" imgH="247015" progId="Word.Document.12">
+                <p:oleObj r:id="rId4" imgW="152400" imgH="247015" progId="Word.Document.12">
                   <p:embed/>
                 </p:oleObj>
               </mc:Choice>
               <mc:Fallback>
-                <p:oleObj name="" r:id="rId3" imgW="152400" imgH="247015" progId="Word.Document.12">
+                <p:oleObj r:id="rId4" imgW="152400" imgH="247015" progId="Word.Document.12">
                   <p:embed/>
                   <p:pic>
                     <p:nvPicPr>
@@ -6629,7 +6697,7 @@
                       <p:nvPr/>
                     </p:nvPicPr>
                     <p:blipFill>
-                      <a:blip r:embed="rId4"/>
+                      <a:blip r:embed="rId5"/>
                       <a:stretch>
                         <a:fillRect/>
                       </a:stretch>
@@ -6664,12 +6732,12 @@
           <a:graphicData uri="http://schemas.openxmlformats.org/presentationml/2006/ole">
             <mc:AlternateContent xmlns:mc="http://schemas.openxmlformats.org/markup-compatibility/2006">
               <mc:Choice xmlns:v="urn:schemas-microsoft-com:vml" Requires="v">
-                <p:oleObj spid="_x0000_s9" name="" r:id="rId5" imgW="533400" imgH="247015" progId="Word.Document.12">
+                <p:oleObj r:id="rId6" imgW="533400" imgH="247015" progId="Word.Document.12">
                   <p:embed/>
                 </p:oleObj>
               </mc:Choice>
               <mc:Fallback>
-                <p:oleObj name="" r:id="rId5" imgW="533400" imgH="247015" progId="Word.Document.12">
+                <p:oleObj r:id="rId6" imgW="533400" imgH="247015" progId="Word.Document.12">
                   <p:embed/>
                   <p:pic>
                     <p:nvPicPr>
@@ -6678,7 +6746,7 @@
                       <p:nvPr/>
                     </p:nvPicPr>
                     <p:blipFill>
-                      <a:blip r:embed="rId6"/>
+                      <a:blip r:embed="rId7"/>
                       <a:stretch>
                         <a:fillRect/>
                       </a:stretch>
@@ -6713,12 +6781,12 @@
           <a:graphicData uri="http://schemas.openxmlformats.org/presentationml/2006/ole">
             <mc:AlternateContent xmlns:mc="http://schemas.openxmlformats.org/markup-compatibility/2006">
               <mc:Choice xmlns:v="urn:schemas-microsoft-com:vml" Requires="v">
-                <p:oleObj spid="_x0000_s11" name="" r:id="rId7" imgW="533400" imgH="247015" progId="Word.Document.12">
+                <p:oleObj r:id="rId8" imgW="533400" imgH="247015" progId="Word.Document.12">
                   <p:embed/>
                 </p:oleObj>
               </mc:Choice>
               <mc:Fallback>
-                <p:oleObj name="" r:id="rId7" imgW="533400" imgH="247015" progId="Word.Document.12">
+                <p:oleObj r:id="rId8" imgW="533400" imgH="247015" progId="Word.Document.12">
                   <p:embed/>
                   <p:pic>
                     <p:nvPicPr>
@@ -6727,7 +6795,7 @@
                       <p:nvPr/>
                     </p:nvPicPr>
                     <p:blipFill>
-                      <a:blip r:embed="rId8"/>
+                      <a:blip r:embed="rId9"/>
                       <a:stretch>
                         <a:fillRect/>
                       </a:stretch>
@@ -6762,12 +6830,12 @@
           <a:graphicData uri="http://schemas.openxmlformats.org/presentationml/2006/ole">
             <mc:AlternateContent xmlns:mc="http://schemas.openxmlformats.org/markup-compatibility/2006">
               <mc:Choice xmlns:v="urn:schemas-microsoft-com:vml" Requires="v">
-                <p:oleObj spid="_x0000_s13" name="" r:id="rId9" imgW="170815" imgH="247015" progId="Word.Document.12">
+                <p:oleObj r:id="rId10" imgW="170815" imgH="247015" progId="Word.Document.12">
                   <p:embed/>
                 </p:oleObj>
               </mc:Choice>
               <mc:Fallback>
-                <p:oleObj name="" r:id="rId9" imgW="170815" imgH="247015" progId="Word.Document.12">
+                <p:oleObj r:id="rId10" imgW="170815" imgH="247015" progId="Word.Document.12">
                   <p:embed/>
                   <p:pic>
                     <p:nvPicPr>
@@ -6776,7 +6844,7 @@
                       <p:nvPr/>
                     </p:nvPicPr>
                     <p:blipFill>
-                      <a:blip r:embed="rId10"/>
+                      <a:blip r:embed="rId11"/>
                       <a:stretch>
                         <a:fillRect/>
                       </a:stretch>
@@ -6811,12 +6879,12 @@
           <a:graphicData uri="http://schemas.openxmlformats.org/presentationml/2006/ole">
             <mc:AlternateContent xmlns:mc="http://schemas.openxmlformats.org/markup-compatibility/2006">
               <mc:Choice xmlns:v="urn:schemas-microsoft-com:vml" Requires="v">
-                <p:oleObj spid="_x0000_s15" name="" r:id="rId11" imgW="791210" imgH="247015" progId="Word.Document.12">
+                <p:oleObj r:id="rId12" imgW="791210" imgH="247015" progId="Word.Document.12">
                   <p:embed/>
                 </p:oleObj>
               </mc:Choice>
               <mc:Fallback>
-                <p:oleObj name="" r:id="rId11" imgW="791210" imgH="247015" progId="Word.Document.12">
+                <p:oleObj r:id="rId12" imgW="791210" imgH="247015" progId="Word.Document.12">
                   <p:embed/>
                   <p:pic>
                     <p:nvPicPr>
@@ -6825,7 +6893,7 @@
                       <p:nvPr/>
                     </p:nvPicPr>
                     <p:blipFill>
-                      <a:blip r:embed="rId12"/>
+                      <a:blip r:embed="rId13"/>
                       <a:stretch>
                         <a:fillRect/>
                       </a:stretch>
@@ -6860,12 +6928,12 @@
           <a:graphicData uri="http://schemas.openxmlformats.org/presentationml/2006/ole">
             <mc:AlternateContent xmlns:mc="http://schemas.openxmlformats.org/markup-compatibility/2006">
               <mc:Choice xmlns:v="urn:schemas-microsoft-com:vml" Requires="v">
-                <p:oleObj spid="_x0000_s17" name="" r:id="rId13" imgW="1066800" imgH="295275" progId="Word.Document.12">
+                <p:oleObj r:id="rId14" imgW="1066800" imgH="295275" progId="Word.Document.12">
                   <p:embed/>
                 </p:oleObj>
               </mc:Choice>
               <mc:Fallback>
-                <p:oleObj name="" r:id="rId13" imgW="1066800" imgH="295275" progId="Word.Document.12">
+                <p:oleObj r:id="rId14" imgW="1066800" imgH="295275" progId="Word.Document.12">
                   <p:embed/>
                   <p:pic>
                     <p:nvPicPr>
@@ -6874,7 +6942,7 @@
                       <p:nvPr/>
                     </p:nvPicPr>
                     <p:blipFill>
-                      <a:blip r:embed="rId14"/>
+                      <a:blip r:embed="rId15"/>
                       <a:stretch>
                         <a:fillRect/>
                       </a:stretch>
@@ -6909,12 +6977,12 @@
           <a:graphicData uri="http://schemas.openxmlformats.org/presentationml/2006/ole">
             <mc:AlternateContent xmlns:mc="http://schemas.openxmlformats.org/markup-compatibility/2006">
               <mc:Choice xmlns:v="urn:schemas-microsoft-com:vml" Requires="v">
-                <p:oleObj spid="_x0000_s19" name="" r:id="rId15" imgW="791210" imgH="247015" progId="Word.Document.12">
+                <p:oleObj r:id="rId16" imgW="791210" imgH="247015" progId="Word.Document.12">
                   <p:embed/>
                 </p:oleObj>
               </mc:Choice>
               <mc:Fallback>
-                <p:oleObj name="" r:id="rId15" imgW="791210" imgH="247015" progId="Word.Document.12">
+                <p:oleObj r:id="rId16" imgW="791210" imgH="247015" progId="Word.Document.12">
                   <p:embed/>
                   <p:pic>
                     <p:nvPicPr>
@@ -6923,7 +6991,7 @@
                       <p:nvPr/>
                     </p:nvPicPr>
                     <p:blipFill>
-                      <a:blip r:embed="rId16"/>
+                      <a:blip r:embed="rId17"/>
                       <a:stretch>
                         <a:fillRect/>
                       </a:stretch>
@@ -6958,12 +7026,12 @@
           <a:graphicData uri="http://schemas.openxmlformats.org/presentationml/2006/ole">
             <mc:AlternateContent xmlns:mc="http://schemas.openxmlformats.org/markup-compatibility/2006">
               <mc:Choice xmlns:v="urn:schemas-microsoft-com:vml" Requires="v">
-                <p:oleObj spid="_x0000_s21" name="" r:id="rId17" imgW="152400" imgH="247015" progId="Word.Document.12">
+                <p:oleObj r:id="rId18" imgW="152400" imgH="247015" progId="Word.Document.12">
                   <p:embed/>
                 </p:oleObj>
               </mc:Choice>
               <mc:Fallback>
-                <p:oleObj name="" r:id="rId17" imgW="152400" imgH="247015" progId="Word.Document.12">
+                <p:oleObj r:id="rId18" imgW="152400" imgH="247015" progId="Word.Document.12">
                   <p:embed/>
                   <p:pic>
                     <p:nvPicPr>
@@ -6972,7 +7040,7 @@
                       <p:nvPr/>
                     </p:nvPicPr>
                     <p:blipFill>
-                      <a:blip r:embed="rId18"/>
+                      <a:blip r:embed="rId19"/>
                       <a:stretch>
                         <a:fillRect/>
                       </a:stretch>
@@ -7007,12 +7075,12 @@
           <a:graphicData uri="http://schemas.openxmlformats.org/presentationml/2006/ole">
             <mc:AlternateContent xmlns:mc="http://schemas.openxmlformats.org/markup-compatibility/2006">
               <mc:Choice xmlns:v="urn:schemas-microsoft-com:vml" Requires="v">
-                <p:oleObj spid="_x0000_s23" name="" r:id="rId19" imgW="170815" imgH="247015" progId="Word.Document.12">
+                <p:oleObj r:id="rId20" imgW="170815" imgH="247015" progId="Word.Document.12">
                   <p:embed/>
                 </p:oleObj>
               </mc:Choice>
               <mc:Fallback>
-                <p:oleObj name="" r:id="rId19" imgW="170815" imgH="247015" progId="Word.Document.12">
+                <p:oleObj r:id="rId20" imgW="170815" imgH="247015" progId="Word.Document.12">
                   <p:embed/>
                   <p:pic>
                     <p:nvPicPr>
@@ -7021,7 +7089,7 @@
                       <p:nvPr/>
                     </p:nvPicPr>
                     <p:blipFill>
-                      <a:blip r:embed="rId20"/>
+                      <a:blip r:embed="rId21"/>
                       <a:stretch>
                         <a:fillRect/>
                       </a:stretch>
@@ -7059,7 +7127,14 @@
         <p:cNvGrpSpPr/>
         <p:nvPr/>
       </p:nvGrpSpPr>
-      <p:grpSpPr/>
+      <p:grpSpPr>
+        <a:xfrm>
+          <a:off x="0" y="0"/>
+          <a:ext cx="0" cy="0"/>
+          <a:chOff x="0" y="0"/>
+          <a:chExt cx="0" cy="0"/>
+        </a:xfrm>
+      </p:grpSpPr>
       <p:sp>
         <p:nvSpPr>
           <p:cNvPr id="2" name="标题 1"/>
@@ -7073,6 +7148,7 @@
         <p:spPr/>
         <p:txBody>
           <a:bodyPr/>
+          <a:lstStyle/>
           <a:p>
             <a:r>
               <a:rPr lang="en-US" altLang="zh-CN" dirty="0">
@@ -7103,12 +7179,12 @@
         <p:spPr/>
         <p:txBody>
           <a:bodyPr/>
+          <a:lstStyle/>
           <a:p>
             <a:r>
               <a:rPr lang="zh-CN" altLang="en-US"/>
               <a:t>根据贝叶斯定理有</a:t>
             </a:r>
-            <a:endParaRPr lang="zh-CN" altLang="en-US"/>
           </a:p>
           <a:p>
             <a:endParaRPr lang="zh-CN" altLang="en-US"/>
@@ -7129,7 +7205,6 @@
               <a:rPr lang="zh-CN" altLang="en-US"/>
               <a:t>次迭代后的模型参数。当  给定时，记          ，此时  为常数。根据上式写出Q函数，即EM算法的E步</a:t>
             </a:r>
-            <a:endParaRPr lang="zh-CN" altLang="en-US"/>
           </a:p>
           <a:p>
             <a:endParaRPr lang="zh-CN" altLang="en-US"/>
@@ -7150,12 +7225,12 @@
           <a:graphicData uri="http://schemas.openxmlformats.org/presentationml/2006/ole">
             <mc:AlternateContent xmlns:mc="http://schemas.openxmlformats.org/markup-compatibility/2006">
               <mc:Choice xmlns:v="urn:schemas-microsoft-com:vml" Requires="v">
-                <p:oleObj spid="_x0000_s5" name="" r:id="rId1" imgW="3495675" imgH="667385" progId="Word.Document.12">
+                <p:oleObj r:id="rId2" imgW="3495675" imgH="667385" progId="Word.Document.12">
                   <p:embed/>
                 </p:oleObj>
               </mc:Choice>
               <mc:Fallback>
-                <p:oleObj name="" r:id="rId1" imgW="3495675" imgH="667385" progId="Word.Document.12">
+                <p:oleObj r:id="rId2" imgW="3495675" imgH="667385" progId="Word.Document.12">
                   <p:embed/>
                   <p:pic>
                     <p:nvPicPr>
@@ -7164,7 +7239,7 @@
                       <p:nvPr/>
                     </p:nvPicPr>
                     <p:blipFill>
-                      <a:blip r:embed="rId2"/>
+                      <a:blip r:embed="rId3"/>
                       <a:stretch>
                         <a:fillRect/>
                       </a:stretch>
@@ -7199,12 +7274,12 @@
           <a:graphicData uri="http://schemas.openxmlformats.org/presentationml/2006/ole">
             <mc:AlternateContent xmlns:mc="http://schemas.openxmlformats.org/markup-compatibility/2006">
               <mc:Choice xmlns:v="urn:schemas-microsoft-com:vml" Requires="v">
-                <p:oleObj spid="_x0000_s7" name="" r:id="rId3" imgW="170815" imgH="247015" progId="Word.Document.12">
+                <p:oleObj r:id="rId4" imgW="170815" imgH="247015" progId="Word.Document.12">
                   <p:embed/>
                 </p:oleObj>
               </mc:Choice>
               <mc:Fallback>
-                <p:oleObj name="" r:id="rId3" imgW="170815" imgH="247015" progId="Word.Document.12">
+                <p:oleObj r:id="rId4" imgW="170815" imgH="247015" progId="Word.Document.12">
                   <p:embed/>
                   <p:pic>
                     <p:nvPicPr>
@@ -7213,7 +7288,7 @@
                       <p:nvPr/>
                     </p:nvPicPr>
                     <p:blipFill>
-                      <a:blip r:embed="rId4"/>
+                      <a:blip r:embed="rId5"/>
                       <a:stretch>
                         <a:fillRect/>
                       </a:stretch>
@@ -7248,12 +7323,12 @@
           <a:graphicData uri="http://schemas.openxmlformats.org/presentationml/2006/ole">
             <mc:AlternateContent xmlns:mc="http://schemas.openxmlformats.org/markup-compatibility/2006">
               <mc:Choice xmlns:v="urn:schemas-microsoft-com:vml" Requires="v">
-                <p:oleObj spid="_x0000_s9" name="" r:id="rId5" imgW="170815" imgH="247015" progId="Word.Document.12">
+                <p:oleObj r:id="rId6" imgW="170815" imgH="247015" progId="Word.Document.12">
                   <p:embed/>
                 </p:oleObj>
               </mc:Choice>
               <mc:Fallback>
-                <p:oleObj name="" r:id="rId5" imgW="170815" imgH="247015" progId="Word.Document.12">
+                <p:oleObj r:id="rId6" imgW="170815" imgH="247015" progId="Word.Document.12">
                   <p:embed/>
                   <p:pic>
                     <p:nvPicPr>
@@ -7262,7 +7337,7 @@
                       <p:nvPr/>
                     </p:nvPicPr>
                     <p:blipFill>
-                      <a:blip r:embed="rId6"/>
+                      <a:blip r:embed="rId7"/>
                       <a:stretch>
                         <a:fillRect/>
                       </a:stretch>
@@ -7297,12 +7372,12 @@
           <a:graphicData uri="http://schemas.openxmlformats.org/presentationml/2006/ole">
             <mc:AlternateContent xmlns:mc="http://schemas.openxmlformats.org/markup-compatibility/2006">
               <mc:Choice xmlns:v="urn:schemas-microsoft-com:vml" Requires="v">
-                <p:oleObj spid="_x0000_s11" name="" r:id="rId7" imgW="1304925" imgH="266700" progId="Word.Document.12">
+                <p:oleObj r:id="rId8" imgW="1304925" imgH="266700" progId="Word.Document.12">
                   <p:embed/>
                 </p:oleObj>
               </mc:Choice>
               <mc:Fallback>
-                <p:oleObj name="" r:id="rId7" imgW="1304925" imgH="266700" progId="Word.Document.12">
+                <p:oleObj r:id="rId8" imgW="1304925" imgH="266700" progId="Word.Document.12">
                   <p:embed/>
                   <p:pic>
                     <p:nvPicPr>
@@ -7311,7 +7386,7 @@
                       <p:nvPr/>
                     </p:nvPicPr>
                     <p:blipFill>
-                      <a:blip r:embed="rId8"/>
+                      <a:blip r:embed="rId9"/>
                       <a:stretch>
                         <a:fillRect/>
                       </a:stretch>
@@ -7346,12 +7421,12 @@
           <a:graphicData uri="http://schemas.openxmlformats.org/presentationml/2006/ole">
             <mc:AlternateContent xmlns:mc="http://schemas.openxmlformats.org/markup-compatibility/2006">
               <mc:Choice xmlns:v="urn:schemas-microsoft-com:vml" Requires="v">
-                <p:oleObj spid="_x0000_s13" name="" r:id="rId9" imgW="210185" imgH="266700" progId="Word.Document.12">
+                <p:oleObj r:id="rId10" imgW="210185" imgH="266700" progId="Word.Document.12">
                   <p:embed/>
                 </p:oleObj>
               </mc:Choice>
               <mc:Fallback>
-                <p:oleObj name="" r:id="rId9" imgW="210185" imgH="266700" progId="Word.Document.12">
+                <p:oleObj r:id="rId10" imgW="210185" imgH="266700" progId="Word.Document.12">
                   <p:embed/>
                   <p:pic>
                     <p:nvPicPr>
@@ -7360,7 +7435,7 @@
                       <p:nvPr/>
                     </p:nvPicPr>
                     <p:blipFill>
-                      <a:blip r:embed="rId10"/>
+                      <a:blip r:embed="rId11"/>
                       <a:stretch>
                         <a:fillRect/>
                       </a:stretch>
@@ -7395,12 +7470,12 @@
           <a:graphicData uri="http://schemas.openxmlformats.org/presentationml/2006/ole">
             <mc:AlternateContent xmlns:mc="http://schemas.openxmlformats.org/markup-compatibility/2006">
               <mc:Choice xmlns:v="urn:schemas-microsoft-com:vml" Requires="v">
-                <p:oleObj spid="_x0000_s15" name="" r:id="rId11" imgW="3077210" imgH="867410" progId="Word.Document.12">
+                <p:oleObj r:id="rId12" imgW="3077210" imgH="867410" progId="Word.Document.12">
                   <p:embed/>
                 </p:oleObj>
               </mc:Choice>
               <mc:Fallback>
-                <p:oleObj name="" r:id="rId11" imgW="3077210" imgH="867410" progId="Word.Document.12">
+                <p:oleObj r:id="rId12" imgW="3077210" imgH="867410" progId="Word.Document.12">
                   <p:embed/>
                   <p:pic>
                     <p:nvPicPr>
@@ -7409,7 +7484,7 @@
                       <p:nvPr/>
                     </p:nvPicPr>
                     <p:blipFill>
-                      <a:blip r:embed="rId12"/>
+                      <a:blip r:embed="rId13"/>
                       <a:stretch>
                         <a:fillRect/>
                       </a:stretch>
@@ -7447,7 +7522,14 @@
         <p:cNvGrpSpPr/>
         <p:nvPr/>
       </p:nvGrpSpPr>
-      <p:grpSpPr/>
+      <p:grpSpPr>
+        <a:xfrm>
+          <a:off x="0" y="0"/>
+          <a:ext cx="0" cy="0"/>
+          <a:chOff x="0" y="0"/>
+          <a:chExt cx="0" cy="0"/>
+        </a:xfrm>
+      </p:grpSpPr>
       <p:sp>
         <p:nvSpPr>
           <p:cNvPr id="2" name="标题 1"/>
@@ -7461,6 +7543,7 @@
         <p:spPr/>
         <p:txBody>
           <a:bodyPr/>
+          <a:lstStyle/>
           <a:p>
             <a:r>
               <a:rPr lang="en-US" altLang="zh-CN" dirty="0">
@@ -7491,6 +7574,7 @@
         <p:spPr/>
         <p:txBody>
           <a:bodyPr/>
+          <a:lstStyle/>
           <a:p>
             <a:r>
               <a:rPr lang="zh-CN" altLang="en-US"/>
@@ -7512,7 +7596,6 @@
               <a:rPr lang="zh-CN" altLang="en-US"/>
               <a:t>函数对      的导数为0可得</a:t>
             </a:r>
-            <a:endParaRPr lang="zh-CN" altLang="en-US"/>
           </a:p>
           <a:p>
             <a:endParaRPr lang="zh-CN" altLang="en-US"/>
@@ -7536,7 +7619,6 @@
               <a:rPr lang="zh-CN" altLang="en-US"/>
               <a:t>函数，这是一个带有约束条件的最优化问题，可通过拉格朗日乘子法求解。构造拉格朗日函数</a:t>
             </a:r>
-            <a:endParaRPr lang="zh-CN" altLang="en-US"/>
           </a:p>
         </p:txBody>
       </p:sp>
@@ -7554,12 +7636,12 @@
           <a:graphicData uri="http://schemas.openxmlformats.org/presentationml/2006/ole">
             <mc:AlternateContent xmlns:mc="http://schemas.openxmlformats.org/markup-compatibility/2006">
               <mc:Choice xmlns:v="urn:schemas-microsoft-com:vml" Requires="v">
-                <p:oleObj spid="_x0000_s5" name="" r:id="rId1" imgW="591185" imgH="313690" progId="Word.Document.12">
+                <p:oleObj r:id="rId2" imgW="591185" imgH="313690" progId="Word.Document.12">
                   <p:embed/>
                 </p:oleObj>
               </mc:Choice>
               <mc:Fallback>
-                <p:oleObj name="" r:id="rId1" imgW="591185" imgH="313690" progId="Word.Document.12">
+                <p:oleObj r:id="rId2" imgW="591185" imgH="313690" progId="Word.Document.12">
                   <p:embed/>
                   <p:pic>
                     <p:nvPicPr>
@@ -7568,7 +7650,7 @@
                       <p:nvPr/>
                     </p:nvPicPr>
                     <p:blipFill>
-                      <a:blip r:embed="rId2"/>
+                      <a:blip r:embed="rId3"/>
                       <a:stretch>
                         <a:fillRect/>
                       </a:stretch>
@@ -7603,12 +7685,12 @@
           <a:graphicData uri="http://schemas.openxmlformats.org/presentationml/2006/ole">
             <mc:AlternateContent xmlns:mc="http://schemas.openxmlformats.org/markup-compatibility/2006">
               <mc:Choice xmlns:v="urn:schemas-microsoft-com:vml" Requires="v">
-                <p:oleObj spid="_x0000_s7" name="" r:id="rId3" imgW="2104390" imgH="1009015" progId="Word.Document.12">
+                <p:oleObj r:id="rId4" imgW="2104390" imgH="1009015" progId="Word.Document.12">
                   <p:embed/>
                 </p:oleObj>
               </mc:Choice>
               <mc:Fallback>
-                <p:oleObj name="" r:id="rId3" imgW="2104390" imgH="1009015" progId="Word.Document.12">
+                <p:oleObj r:id="rId4" imgW="2104390" imgH="1009015" progId="Word.Document.12">
                   <p:embed/>
                   <p:pic>
                     <p:nvPicPr>
@@ -7617,7 +7699,7 @@
                       <p:nvPr/>
                     </p:nvPicPr>
                     <p:blipFill>
-                      <a:blip r:embed="rId4"/>
+                      <a:blip r:embed="rId5"/>
                       <a:stretch>
                         <a:fillRect/>
                       </a:stretch>
@@ -7652,12 +7734,12 @@
           <a:graphicData uri="http://schemas.openxmlformats.org/presentationml/2006/ole">
             <mc:AlternateContent xmlns:mc="http://schemas.openxmlformats.org/markup-compatibility/2006">
               <mc:Choice xmlns:v="urn:schemas-microsoft-com:vml" Requires="v">
-                <p:oleObj spid="_x0000_s9" name="" r:id="rId5" imgW="219710" imgH="247015" progId="Word.Document.12">
+                <p:oleObj r:id="rId6" imgW="219710" imgH="247015" progId="Word.Document.12">
                   <p:embed/>
                 </p:oleObj>
               </mc:Choice>
               <mc:Fallback>
-                <p:oleObj name="" r:id="rId5" imgW="219710" imgH="247015" progId="Word.Document.12">
+                <p:oleObj r:id="rId6" imgW="219710" imgH="247015" progId="Word.Document.12">
                   <p:embed/>
                   <p:pic>
                     <p:nvPicPr>
@@ -7666,7 +7748,7 @@
                       <p:nvPr/>
                     </p:nvPicPr>
                     <p:blipFill>
-                      <a:blip r:embed="rId6"/>
+                      <a:blip r:embed="rId7"/>
                       <a:stretch>
                         <a:fillRect/>
                       </a:stretch>
@@ -7701,12 +7783,12 @@
           <a:graphicData uri="http://schemas.openxmlformats.org/presentationml/2006/ole">
             <mc:AlternateContent xmlns:mc="http://schemas.openxmlformats.org/markup-compatibility/2006">
               <mc:Choice xmlns:v="urn:schemas-microsoft-com:vml" Requires="v">
-                <p:oleObj spid="_x0000_s11" name="" r:id="rId7" imgW="591185" imgH="438785" progId="Word.Document.12">
+                <p:oleObj r:id="rId8" imgW="591185" imgH="438785" progId="Word.Document.12">
                   <p:embed/>
                 </p:oleObj>
               </mc:Choice>
               <mc:Fallback>
-                <p:oleObj name="" r:id="rId7" imgW="591185" imgH="438785" progId="Word.Document.12">
+                <p:oleObj r:id="rId8" imgW="591185" imgH="438785" progId="Word.Document.12">
                   <p:embed/>
                   <p:pic>
                     <p:nvPicPr>
@@ -7715,7 +7797,7 @@
                       <p:nvPr/>
                     </p:nvPicPr>
                     <p:blipFill>
-                      <a:blip r:embed="rId8"/>
+                      <a:blip r:embed="rId9"/>
                       <a:stretch>
                         <a:fillRect/>
                       </a:stretch>
@@ -7750,12 +7832,12 @@
           <a:graphicData uri="http://schemas.openxmlformats.org/presentationml/2006/ole">
             <mc:AlternateContent xmlns:mc="http://schemas.openxmlformats.org/markup-compatibility/2006">
               <mc:Choice xmlns:v="urn:schemas-microsoft-com:vml" Requires="v">
-                <p:oleObj spid="_x0000_s13" name="" r:id="rId9" imgW="438785" imgH="247015" progId="Word.Document.12">
+                <p:oleObj r:id="rId10" imgW="438785" imgH="247015" progId="Word.Document.12">
                   <p:embed/>
                 </p:oleObj>
               </mc:Choice>
               <mc:Fallback>
-                <p:oleObj name="" r:id="rId9" imgW="438785" imgH="247015" progId="Word.Document.12">
+                <p:oleObj r:id="rId10" imgW="438785" imgH="247015" progId="Word.Document.12">
                   <p:embed/>
                   <p:pic>
                     <p:nvPicPr>
@@ -7764,7 +7846,7 @@
                       <p:nvPr/>
                     </p:nvPicPr>
                     <p:blipFill>
-                      <a:blip r:embed="rId10"/>
+                      <a:blip r:embed="rId11"/>
                       <a:stretch>
                         <a:fillRect/>
                       </a:stretch>
@@ -7799,12 +7881,12 @@
           <a:graphicData uri="http://schemas.openxmlformats.org/presentationml/2006/ole">
             <mc:AlternateContent xmlns:mc="http://schemas.openxmlformats.org/markup-compatibility/2006">
               <mc:Choice xmlns:v="urn:schemas-microsoft-com:vml" Requires="v">
-                <p:oleObj spid="_x0000_s15" name="" r:id="rId11" imgW="2075815" imgH="485775" progId="Word.Document.12">
+                <p:oleObj r:id="rId12" imgW="2075815" imgH="485775" progId="Word.Document.12">
                   <p:embed/>
                 </p:oleObj>
               </mc:Choice>
               <mc:Fallback>
-                <p:oleObj name="" r:id="rId11" imgW="2075815" imgH="485775" progId="Word.Document.12">
+                <p:oleObj r:id="rId12" imgW="2075815" imgH="485775" progId="Word.Document.12">
                   <p:embed/>
                   <p:pic>
                     <p:nvPicPr>
@@ -7813,7 +7895,7 @@
                       <p:nvPr/>
                     </p:nvPicPr>
                     <p:blipFill>
-                      <a:blip r:embed="rId12"/>
+                      <a:blip r:embed="rId13"/>
                       <a:stretch>
                         <a:fillRect/>
                       </a:stretch>
@@ -7851,7 +7933,14 @@
         <p:cNvGrpSpPr/>
         <p:nvPr/>
       </p:nvGrpSpPr>
-      <p:grpSpPr/>
+      <p:grpSpPr>
+        <a:xfrm>
+          <a:off x="0" y="0"/>
+          <a:ext cx="0" cy="0"/>
+          <a:chOff x="0" y="0"/>
+          <a:chExt cx="0" cy="0"/>
+        </a:xfrm>
+      </p:grpSpPr>
       <p:sp>
         <p:nvSpPr>
           <p:cNvPr id="2" name="标题 1"/>
@@ -7865,6 +7954,7 @@
         <p:spPr/>
         <p:txBody>
           <a:bodyPr/>
+          <a:lstStyle/>
           <a:p>
             <a:r>
               <a:rPr lang="en-US" altLang="zh-CN" dirty="0">
@@ -7900,12 +7990,12 @@
         </p:spPr>
         <p:txBody>
           <a:bodyPr/>
+          <a:lstStyle/>
           <a:p>
             <a:r>
               <a:rPr lang="zh-CN" altLang="en-US"/>
               <a:t>令拉格朗日函数对  的导数为0</a:t>
             </a:r>
-            <a:endParaRPr lang="zh-CN" altLang="en-US"/>
           </a:p>
           <a:p>
             <a:endParaRPr lang="zh-CN" altLang="en-US"/>
@@ -7918,7 +8008,6 @@
               <a:rPr lang="zh-CN" altLang="en-US"/>
               <a:t>可得</a:t>
             </a:r>
-            <a:endParaRPr lang="zh-CN" altLang="en-US"/>
           </a:p>
           <a:p>
             <a:endParaRPr lang="zh-CN" altLang="en-US"/>
@@ -7928,7 +8017,6 @@
               <a:rPr lang="zh-CN" altLang="en-US"/>
               <a:t>于是</a:t>
             </a:r>
-            <a:endParaRPr lang="zh-CN" altLang="en-US"/>
           </a:p>
         </p:txBody>
       </p:sp>
@@ -7946,12 +8034,12 @@
           <a:graphicData uri="http://schemas.openxmlformats.org/presentationml/2006/ole">
             <mc:AlternateContent xmlns:mc="http://schemas.openxmlformats.org/markup-compatibility/2006">
               <mc:Choice xmlns:v="urn:schemas-microsoft-com:vml" Requires="v">
-                <p:oleObj spid="_x0000_s5" name="" r:id="rId1" imgW="190500" imgH="247015" progId="Word.Document.12">
+                <p:oleObj r:id="rId2" imgW="190500" imgH="247015" progId="Word.Document.12">
                   <p:embed/>
                 </p:oleObj>
               </mc:Choice>
               <mc:Fallback>
-                <p:oleObj name="" r:id="rId1" imgW="190500" imgH="247015" progId="Word.Document.12">
+                <p:oleObj r:id="rId2" imgW="190500" imgH="247015" progId="Word.Document.12">
                   <p:embed/>
                   <p:pic>
                     <p:nvPicPr>
@@ -7960,7 +8048,7 @@
                       <p:nvPr/>
                     </p:nvPicPr>
                     <p:blipFill>
-                      <a:blip r:embed="rId2"/>
+                      <a:blip r:embed="rId3"/>
                       <a:stretch>
                         <a:fillRect/>
                       </a:stretch>
@@ -7995,12 +8083,12 @@
           <a:graphicData uri="http://schemas.openxmlformats.org/presentationml/2006/ole">
             <mc:AlternateContent xmlns:mc="http://schemas.openxmlformats.org/markup-compatibility/2006">
               <mc:Choice xmlns:v="urn:schemas-microsoft-com:vml" Requires="v">
-                <p:oleObj spid="_x0000_s7" name="" r:id="rId3" imgW="1380490" imgH="466090" progId="Word.Document.12">
+                <p:oleObj r:id="rId4" imgW="1380490" imgH="466090" progId="Word.Document.12">
                   <p:embed/>
                 </p:oleObj>
               </mc:Choice>
               <mc:Fallback>
-                <p:oleObj name="" r:id="rId3" imgW="1380490" imgH="466090" progId="Word.Document.12">
+                <p:oleObj r:id="rId4" imgW="1380490" imgH="466090" progId="Word.Document.12">
                   <p:embed/>
                   <p:pic>
                     <p:nvPicPr>
@@ -8009,7 +8097,7 @@
                       <p:nvPr/>
                     </p:nvPicPr>
                     <p:blipFill>
-                      <a:blip r:embed="rId4"/>
+                      <a:blip r:embed="rId5"/>
                       <a:stretch>
                         <a:fillRect/>
                       </a:stretch>
@@ -8044,12 +8132,12 @@
           <a:graphicData uri="http://schemas.openxmlformats.org/presentationml/2006/ole">
             <mc:AlternateContent xmlns:mc="http://schemas.openxmlformats.org/markup-compatibility/2006">
               <mc:Choice xmlns:v="urn:schemas-microsoft-com:vml" Requires="v">
-                <p:oleObj spid="_x0000_s9" name="" r:id="rId5" imgW="3218815" imgH="438785" progId="Word.Document.12">
+                <p:oleObj r:id="rId6" imgW="3218815" imgH="438785" progId="Word.Document.12">
                   <p:embed/>
                 </p:oleObj>
               </mc:Choice>
               <mc:Fallback>
-                <p:oleObj name="" r:id="rId5" imgW="3218815" imgH="438785" progId="Word.Document.12">
+                <p:oleObj r:id="rId6" imgW="3218815" imgH="438785" progId="Word.Document.12">
                   <p:embed/>
                   <p:pic>
                     <p:nvPicPr>
@@ -8058,7 +8146,7 @@
                       <p:nvPr/>
                     </p:nvPicPr>
                     <p:blipFill>
-                      <a:blip r:embed="rId6"/>
+                      <a:blip r:embed="rId7"/>
                       <a:stretch>
                         <a:fillRect/>
                       </a:stretch>
@@ -8093,12 +8181,12 @@
           <a:graphicData uri="http://schemas.openxmlformats.org/presentationml/2006/ole">
             <mc:AlternateContent xmlns:mc="http://schemas.openxmlformats.org/markup-compatibility/2006">
               <mc:Choice xmlns:v="urn:schemas-microsoft-com:vml" Requires="v">
-                <p:oleObj spid="_x0000_s11" name="" r:id="rId7" imgW="876300" imgH="438785" progId="Word.Document.12">
+                <p:oleObj r:id="rId8" imgW="876300" imgH="438785" progId="Word.Document.12">
                   <p:embed/>
                 </p:oleObj>
               </mc:Choice>
               <mc:Fallback>
-                <p:oleObj name="" r:id="rId7" imgW="876300" imgH="438785" progId="Word.Document.12">
+                <p:oleObj r:id="rId8" imgW="876300" imgH="438785" progId="Word.Document.12">
                   <p:embed/>
                   <p:pic>
                     <p:nvPicPr>
@@ -8107,7 +8195,7 @@
                       <p:nvPr/>
                     </p:nvPicPr>
                     <p:blipFill>
-                      <a:blip r:embed="rId8"/>
+                      <a:blip r:embed="rId9"/>
                       <a:stretch>
                         <a:fillRect/>
                       </a:stretch>
@@ -8145,7 +8233,14 @@
         <p:cNvGrpSpPr/>
         <p:nvPr/>
       </p:nvGrpSpPr>
-      <p:grpSpPr/>
+      <p:grpSpPr>
+        <a:xfrm>
+          <a:off x="0" y="0"/>
+          <a:ext cx="0" cy="0"/>
+          <a:chOff x="0" y="0"/>
+          <a:chExt cx="0" cy="0"/>
+        </a:xfrm>
+      </p:grpSpPr>
       <p:sp>
         <p:nvSpPr>
           <p:cNvPr id="2" name="标题 1"/>
@@ -8159,6 +8254,7 @@
         <p:spPr/>
         <p:txBody>
           <a:bodyPr/>
+          <a:lstStyle/>
           <a:p>
             <a:r>
               <a:rPr lang="en-US" altLang="zh-CN" dirty="0">
@@ -8189,12 +8285,12 @@
         <p:spPr/>
         <p:txBody>
           <a:bodyPr/>
+          <a:lstStyle/>
           <a:p>
             <a:r>
               <a:rPr lang="zh-CN" altLang="en-US"/>
               <a:t>对于前述人群分类的例子，假设以毫米（mm）为单位的男女身高对应高斯分布分别为</a:t>
             </a:r>
-            <a:endParaRPr lang="zh-CN" altLang="en-US"/>
           </a:p>
           <a:p>
             <a:endParaRPr lang="zh-CN" altLang="en-US"/>
@@ -8207,7 +8303,6 @@
               <a:rPr lang="zh-CN" altLang="en-US"/>
               <a:t>使用计算机模拟采样得到10000个男性身高样本和10000个女性身高样本，共20000个样本。采样的频数分布直方图如图所示</a:t>
             </a:r>
-            <a:endParaRPr lang="zh-CN" altLang="en-US"/>
           </a:p>
         </p:txBody>
       </p:sp>
@@ -8225,12 +8320,12 @@
           <a:graphicData uri="http://schemas.openxmlformats.org/presentationml/2006/ole">
             <mc:AlternateContent xmlns:mc="http://schemas.openxmlformats.org/markup-compatibility/2006">
               <mc:Choice xmlns:v="urn:schemas-microsoft-com:vml" Requires="v">
-                <p:oleObj spid="_x0000_s5" name="" r:id="rId1" imgW="1762125" imgH="523875" progId="Word.Document.12">
+                <p:oleObj r:id="rId2" imgW="1762125" imgH="523875" progId="Word.Document.12">
                   <p:embed/>
                 </p:oleObj>
               </mc:Choice>
               <mc:Fallback>
-                <p:oleObj name="" r:id="rId1" imgW="1762125" imgH="523875" progId="Word.Document.12">
+                <p:oleObj r:id="rId2" imgW="1762125" imgH="523875" progId="Word.Document.12">
                   <p:embed/>
                   <p:pic>
                     <p:nvPicPr>
@@ -8239,7 +8334,7 @@
                       <p:nvPr/>
                     </p:nvPicPr>
                     <p:blipFill>
-                      <a:blip r:embed="rId2"/>
+                      <a:blip r:embed="rId3"/>
                       <a:stretch>
                         <a:fillRect/>
                       </a:stretch>
@@ -8295,7 +8390,7 @@
           <p:nvPr/>
         </p:nvPicPr>
         <p:blipFill>
-          <a:blip r:embed="rId3"/>
+          <a:blip r:embed="rId4"/>
           <a:stretch>
             <a:fillRect/>
           </a:stretch>
@@ -8327,7 +8422,14 @@
         <p:cNvGrpSpPr/>
         <p:nvPr/>
       </p:nvGrpSpPr>
-      <p:grpSpPr/>
+      <p:grpSpPr>
+        <a:xfrm>
+          <a:off x="0" y="0"/>
+          <a:ext cx="0" cy="0"/>
+          <a:chOff x="0" y="0"/>
+          <a:chExt cx="0" cy="0"/>
+        </a:xfrm>
+      </p:grpSpPr>
       <p:sp>
         <p:nvSpPr>
           <p:cNvPr id="2" name="标题 1"/>
@@ -8341,6 +8443,7 @@
         <p:spPr/>
         <p:txBody>
           <a:bodyPr/>
+          <a:lstStyle/>
           <a:p>
             <a:r>
               <a:rPr lang="en-US" altLang="zh-CN" dirty="0">
@@ -8371,12 +8474,12 @@
         <p:spPr/>
         <p:txBody>
           <a:bodyPr/>
+          <a:lstStyle/>
           <a:p>
             <a:r>
               <a:rPr lang="zh-CN" altLang="en-US"/>
               <a:t>现对其利用高斯混合模型聚类，可以估计出男女的高斯分布分布为</a:t>
             </a:r>
-            <a:endParaRPr lang="zh-CN" altLang="en-US"/>
           </a:p>
           <a:p>
             <a:endParaRPr lang="zh-CN" altLang="en-US"/>
@@ -8389,7 +8492,6 @@
               <a:rPr lang="zh-CN" altLang="en-US"/>
               <a:t>对应的模型权重分别为</a:t>
             </a:r>
-            <a:endParaRPr lang="zh-CN" altLang="en-US"/>
           </a:p>
         </p:txBody>
       </p:sp>
@@ -8407,12 +8509,12 @@
           <a:graphicData uri="http://schemas.openxmlformats.org/presentationml/2006/ole">
             <mc:AlternateContent xmlns:mc="http://schemas.openxmlformats.org/markup-compatibility/2006">
               <mc:Choice xmlns:v="urn:schemas-microsoft-com:vml" Requires="v">
-                <p:oleObj spid="_x0000_s5" name="" r:id="rId1" imgW="1762125" imgH="562610" progId="Word.Document.12">
+                <p:oleObj r:id="rId2" imgW="1762125" imgH="562610" progId="Word.Document.12">
                   <p:embed/>
                 </p:oleObj>
               </mc:Choice>
               <mc:Fallback>
-                <p:oleObj name="" r:id="rId1" imgW="1762125" imgH="562610" progId="Word.Document.12">
+                <p:oleObj r:id="rId2" imgW="1762125" imgH="562610" progId="Word.Document.12">
                   <p:embed/>
                   <p:pic>
                     <p:nvPicPr>
@@ -8421,7 +8523,7 @@
                       <p:nvPr/>
                     </p:nvPicPr>
                     <p:blipFill>
-                      <a:blip r:embed="rId2"/>
+                      <a:blip r:embed="rId3"/>
                       <a:stretch>
                         <a:fillRect/>
                       </a:stretch>
@@ -8456,12 +8558,12 @@
           <a:graphicData uri="http://schemas.openxmlformats.org/presentationml/2006/ole">
             <mc:AlternateContent xmlns:mc="http://schemas.openxmlformats.org/markup-compatibility/2006">
               <mc:Choice xmlns:v="urn:schemas-microsoft-com:vml" Requires="v">
-                <p:oleObj spid="_x0000_s7" name="" r:id="rId3" imgW="714375" imgH="523875" progId="Word.Document.12">
+                <p:oleObj r:id="rId4" imgW="714375" imgH="523875" progId="Word.Document.12">
                   <p:embed/>
                 </p:oleObj>
               </mc:Choice>
               <mc:Fallback>
-                <p:oleObj name="" r:id="rId3" imgW="714375" imgH="523875" progId="Word.Document.12">
+                <p:oleObj r:id="rId4" imgW="714375" imgH="523875" progId="Word.Document.12">
                   <p:embed/>
                   <p:pic>
                     <p:nvPicPr>
@@ -8470,7 +8572,7 @@
                       <p:nvPr/>
                     </p:nvPicPr>
                     <p:blipFill>
-                      <a:blip r:embed="rId4"/>
+                      <a:blip r:embed="rId5"/>
                       <a:stretch>
                         <a:fillRect/>
                       </a:stretch>
@@ -8508,7 +8610,14 @@
         <p:cNvGrpSpPr/>
         <p:nvPr/>
       </p:nvGrpSpPr>
-      <p:grpSpPr/>
+      <p:grpSpPr>
+        <a:xfrm>
+          <a:off x="0" y="0"/>
+          <a:ext cx="0" cy="0"/>
+          <a:chOff x="0" y="0"/>
+          <a:chExt cx="0" cy="0"/>
+        </a:xfrm>
+      </p:grpSpPr>
       <p:sp>
         <p:nvSpPr>
           <p:cNvPr id="2" name="标题 1"/>
@@ -8522,6 +8631,7 @@
         <p:spPr/>
         <p:txBody>
           <a:bodyPr/>
+          <a:lstStyle/>
           <a:p>
             <a:r>
               <a:rPr lang="en-US" altLang="zh-CN" dirty="0">
@@ -8552,12 +8662,12 @@
         <p:spPr/>
         <p:txBody>
           <a:bodyPr/>
+          <a:lstStyle/>
           <a:p>
             <a:r>
               <a:rPr lang="zh-CN" altLang="en-US"/>
               <a:t>从下图中可以看到，通过高斯混合模型得到的高斯分布与采样用的高斯分布非常接近。高斯聚类的分类准确率约为83.2%。本例中两个高斯分布有较大面积的重叠，如果高斯混合模型的各个子模型均值之间距离更大、方差更小，则聚类准确率会更高。</a:t>
             </a:r>
-            <a:endParaRPr lang="zh-CN" altLang="en-US"/>
           </a:p>
         </p:txBody>
       </p:sp>
@@ -8570,7 +8680,7 @@
           <p:nvPr/>
         </p:nvPicPr>
         <p:blipFill>
-          <a:blip r:embed="rId1"/>
+          <a:blip r:embed="rId2"/>
           <a:stretch>
             <a:fillRect/>
           </a:stretch>
@@ -8602,7 +8712,14 @@
         <p:cNvGrpSpPr/>
         <p:nvPr/>
       </p:nvGrpSpPr>
-      <p:grpSpPr/>
+      <p:grpSpPr>
+        <a:xfrm>
+          <a:off x="0" y="0"/>
+          <a:ext cx="0" cy="0"/>
+          <a:chOff x="0" y="0"/>
+          <a:chExt cx="0" cy="0"/>
+        </a:xfrm>
+      </p:grpSpPr>
       <p:sp>
         <p:nvSpPr>
           <p:cNvPr id="2" name="标题 1"/>
@@ -8616,6 +8733,7 @@
         <p:spPr/>
         <p:txBody>
           <a:bodyPr/>
+          <a:lstStyle/>
           <a:p>
             <a:r>
               <a:rPr lang="en-US" altLang="zh-CN" dirty="0">
@@ -8646,19 +8764,18 @@
         <p:spPr/>
         <p:txBody>
           <a:bodyPr/>
+          <a:lstStyle/>
           <a:p>
             <a:r>
               <a:rPr lang="zh-CN" altLang="en-US"/>
               <a:t>EM算法的另一个典型应用就是隐马尔可夫模型。隐马尔可夫模型是经典的序列建模算法，在语音识别、词性标注、机器翻译等领域有着广泛的应用。</a:t>
             </a:r>
-            <a:endParaRPr lang="zh-CN" altLang="en-US"/>
           </a:p>
           <a:p>
             <a:r>
               <a:rPr lang="zh-CN" altLang="en-US"/>
               <a:t>估计隐马尔可夫模型的参数就是带有隐变量的极大似然估计问题，所以可以用EM算法进行参数估计。</a:t>
             </a:r>
-            <a:endParaRPr lang="zh-CN" altLang="en-US"/>
           </a:p>
         </p:txBody>
       </p:sp>
@@ -8679,7 +8796,14 @@
         <p:cNvGrpSpPr/>
         <p:nvPr/>
       </p:nvGrpSpPr>
-      <p:grpSpPr/>
+      <p:grpSpPr>
+        <a:xfrm>
+          <a:off x="0" y="0"/>
+          <a:ext cx="0" cy="0"/>
+          <a:chOff x="0" y="0"/>
+          <a:chExt cx="0" cy="0"/>
+        </a:xfrm>
+      </p:grpSpPr>
       <p:sp>
         <p:nvSpPr>
           <p:cNvPr id="2" name="标题 1"/>
@@ -8693,6 +8817,7 @@
         <p:spPr/>
         <p:txBody>
           <a:bodyPr/>
+          <a:lstStyle/>
           <a:p>
             <a:r>
               <a:rPr lang="en-US" altLang="zh-CN" dirty="0">
@@ -8723,6 +8848,7 @@
         <p:spPr/>
         <p:txBody>
           <a:bodyPr/>
+          <a:lstStyle/>
           <a:p>
             <a:r>
               <a:rPr lang="zh-CN" altLang="en-US"/>
@@ -8736,7 +8862,6 @@
               <a:rPr lang="zh-CN" altLang="en-US"/>
               <a:t>轮迭代得到的参数为        ，令随机变量  表示可能的状态序列，则Q函数为</a:t>
             </a:r>
-            <a:endParaRPr lang="zh-CN" altLang="en-US"/>
           </a:p>
           <a:p>
             <a:endParaRPr lang="zh-CN" altLang="en-US"/>
@@ -8752,7 +8877,6 @@
               <a:rPr lang="zh-CN" altLang="en-US"/>
               <a:t>因为参数  已知，所以      为常数。于是有隐变量的概率分布</a:t>
             </a:r>
-            <a:endParaRPr lang="zh-CN" altLang="en-US"/>
           </a:p>
           <a:p>
             <a:endParaRPr lang="zh-CN" altLang="en-US"/>
@@ -8773,12 +8897,12 @@
           <a:graphicData uri="http://schemas.openxmlformats.org/presentationml/2006/ole">
             <mc:AlternateContent xmlns:mc="http://schemas.openxmlformats.org/markup-compatibility/2006">
               <mc:Choice xmlns:v="urn:schemas-microsoft-com:vml" Requires="v">
-                <p:oleObj spid="_x0000_s5" name="" r:id="rId1" imgW="723900" imgH="266700" progId="Word.Document.12">
+                <p:oleObj r:id="rId2" imgW="723900" imgH="266700" progId="Word.Document.12">
                   <p:embed/>
                 </p:oleObj>
               </mc:Choice>
               <mc:Fallback>
-                <p:oleObj name="" r:id="rId1" imgW="723900" imgH="266700" progId="Word.Document.12">
+                <p:oleObj r:id="rId2" imgW="723900" imgH="266700" progId="Word.Document.12">
                   <p:embed/>
                   <p:pic>
                     <p:nvPicPr>
@@ -8787,7 +8911,7 @@
                       <p:nvPr/>
                     </p:nvPicPr>
                     <p:blipFill>
-                      <a:blip r:embed="rId2"/>
+                      <a:blip r:embed="rId3"/>
                       <a:stretch>
                         <a:fillRect/>
                       </a:stretch>
@@ -8822,12 +8946,12 @@
           <a:graphicData uri="http://schemas.openxmlformats.org/presentationml/2006/ole">
             <mc:AlternateContent xmlns:mc="http://schemas.openxmlformats.org/markup-compatibility/2006">
               <mc:Choice xmlns:v="urn:schemas-microsoft-com:vml" Requires="v">
-                <p:oleObj spid="_x0000_s7" name="" r:id="rId3" imgW="1009015" imgH="247015" progId="Word.Document.12">
+                <p:oleObj r:id="rId4" imgW="1009015" imgH="247015" progId="Word.Document.12">
                   <p:embed/>
                 </p:oleObj>
               </mc:Choice>
               <mc:Fallback>
-                <p:oleObj name="" r:id="rId3" imgW="1009015" imgH="247015" progId="Word.Document.12">
+                <p:oleObj r:id="rId4" imgW="1009015" imgH="247015" progId="Word.Document.12">
                   <p:embed/>
                   <p:pic>
                     <p:nvPicPr>
@@ -8836,7 +8960,7 @@
                       <p:nvPr/>
                     </p:nvPicPr>
                     <p:blipFill>
-                      <a:blip r:embed="rId4"/>
+                      <a:blip r:embed="rId5"/>
                       <a:stretch>
                         <a:fillRect/>
                       </a:stretch>
@@ -8871,12 +8995,12 @@
           <a:graphicData uri="http://schemas.openxmlformats.org/presentationml/2006/ole">
             <mc:AlternateContent xmlns:mc="http://schemas.openxmlformats.org/markup-compatibility/2006">
               <mc:Choice xmlns:v="urn:schemas-microsoft-com:vml" Requires="v">
-                <p:oleObj spid="_x0000_s9" name="" r:id="rId5" imgW="123190" imgH="190500" progId="Word.Document.12">
+                <p:oleObj r:id="rId6" imgW="123190" imgH="190500" progId="Word.Document.12">
                   <p:embed/>
                 </p:oleObj>
               </mc:Choice>
               <mc:Fallback>
-                <p:oleObj name="" r:id="rId5" imgW="123190" imgH="190500" progId="Word.Document.12">
+                <p:oleObj r:id="rId6" imgW="123190" imgH="190500" progId="Word.Document.12">
                   <p:embed/>
                   <p:pic>
                     <p:nvPicPr>
@@ -8885,7 +9009,7 @@
                       <p:nvPr/>
                     </p:nvPicPr>
                     <p:blipFill>
-                      <a:blip r:embed="rId6"/>
+                      <a:blip r:embed="rId7"/>
                       <a:stretch>
                         <a:fillRect/>
                       </a:stretch>
@@ -8920,12 +9044,12 @@
           <a:graphicData uri="http://schemas.openxmlformats.org/presentationml/2006/ole">
             <mc:AlternateContent xmlns:mc="http://schemas.openxmlformats.org/markup-compatibility/2006">
               <mc:Choice xmlns:v="urn:schemas-microsoft-com:vml" Requires="v">
-                <p:oleObj spid="_x0000_s11" name="" r:id="rId7" imgW="4334510" imgH="876300" progId="Word.Document.12">
+                <p:oleObj r:id="rId8" imgW="4334510" imgH="876300" progId="Word.Document.12">
                   <p:embed/>
                 </p:oleObj>
               </mc:Choice>
               <mc:Fallback>
-                <p:oleObj name="" r:id="rId7" imgW="4334510" imgH="876300" progId="Word.Document.12">
+                <p:oleObj r:id="rId8" imgW="4334510" imgH="876300" progId="Word.Document.12">
                   <p:embed/>
                   <p:pic>
                     <p:nvPicPr>
@@ -8934,7 +9058,7 @@
                       <p:nvPr/>
                     </p:nvPicPr>
                     <p:blipFill>
-                      <a:blip r:embed="rId8"/>
+                      <a:blip r:embed="rId9"/>
                       <a:stretch>
                         <a:fillRect/>
                       </a:stretch>
@@ -8969,12 +9093,12 @@
           <a:graphicData uri="http://schemas.openxmlformats.org/presentationml/2006/ole">
             <mc:AlternateContent xmlns:mc="http://schemas.openxmlformats.org/markup-compatibility/2006">
               <mc:Choice xmlns:v="urn:schemas-microsoft-com:vml" Requires="v">
-                <p:oleObj spid="_x0000_s15" name="" r:id="rId9" imgW="190500" imgH="219710" progId="Word.Document.12">
+                <p:oleObj r:id="rId10" imgW="190500" imgH="219710" progId="Word.Document.12">
                   <p:embed/>
                 </p:oleObj>
               </mc:Choice>
               <mc:Fallback>
-                <p:oleObj name="" r:id="rId9" imgW="190500" imgH="219710" progId="Word.Document.12">
+                <p:oleObj r:id="rId10" imgW="190500" imgH="219710" progId="Word.Document.12">
                   <p:embed/>
                   <p:pic>
                     <p:nvPicPr>
@@ -8983,7 +9107,7 @@
                       <p:nvPr/>
                     </p:nvPicPr>
                     <p:blipFill>
-                      <a:blip r:embed="rId10"/>
+                      <a:blip r:embed="rId11"/>
                       <a:stretch>
                         <a:fillRect/>
                       </a:stretch>
@@ -9018,12 +9142,12 @@
           <a:graphicData uri="http://schemas.openxmlformats.org/presentationml/2006/ole">
             <mc:AlternateContent xmlns:mc="http://schemas.openxmlformats.org/markup-compatibility/2006">
               <mc:Choice xmlns:v="urn:schemas-microsoft-com:vml" Requires="v">
-                <p:oleObj spid="_x0000_s17" name="" r:id="rId11" imgW="609600" imgH="247015" progId="Word.Document.12">
+                <p:oleObj r:id="rId12" imgW="609600" imgH="247015" progId="Word.Document.12">
                   <p:embed/>
                 </p:oleObj>
               </mc:Choice>
               <mc:Fallback>
-                <p:oleObj name="" r:id="rId11" imgW="609600" imgH="247015" progId="Word.Document.12">
+                <p:oleObj r:id="rId12" imgW="609600" imgH="247015" progId="Word.Document.12">
                   <p:embed/>
                   <p:pic>
                     <p:nvPicPr>
@@ -9032,7 +9156,7 @@
                       <p:nvPr/>
                     </p:nvPicPr>
                     <p:blipFill>
-                      <a:blip r:embed="rId12"/>
+                      <a:blip r:embed="rId13"/>
                       <a:stretch>
                         <a:fillRect/>
                       </a:stretch>
@@ -9067,12 +9191,12 @@
           <a:graphicData uri="http://schemas.openxmlformats.org/presentationml/2006/ole">
             <mc:AlternateContent xmlns:mc="http://schemas.openxmlformats.org/markup-compatibility/2006">
               <mc:Choice xmlns:v="urn:schemas-microsoft-com:vml" Requires="v">
-                <p:oleObj spid="_x0000_s19" name="" r:id="rId13" imgW="3420110" imgH="457200" progId="Word.Document.12">
+                <p:oleObj r:id="rId14" imgW="3420110" imgH="457200" progId="Word.Document.12">
                   <p:embed/>
                 </p:oleObj>
               </mc:Choice>
               <mc:Fallback>
-                <p:oleObj name="" r:id="rId13" imgW="3420110" imgH="457200" progId="Word.Document.12">
+                <p:oleObj r:id="rId14" imgW="3420110" imgH="457200" progId="Word.Document.12">
                   <p:embed/>
                   <p:pic>
                     <p:nvPicPr>
@@ -9081,7 +9205,7 @@
                       <p:nvPr/>
                     </p:nvPicPr>
                     <p:blipFill>
-                      <a:blip r:embed="rId14"/>
+                      <a:blip r:embed="rId15"/>
                       <a:stretch>
                         <a:fillRect/>
                       </a:stretch>
@@ -9143,14 +9267,13 @@
           <a:lstStyle/>
           <a:p>
             <a:r>
-              <a:rPr lang="en-US" altLang="zh-CN" dirty="0" smtClean="0"/>
+              <a:rPr lang="en-US" altLang="zh-CN" dirty="0"/>
               <a:t>EM</a:t>
             </a:r>
             <a:r>
-              <a:rPr lang="zh-CN" altLang="en-US" dirty="0" smtClean="0"/>
+              <a:rPr lang="zh-CN" altLang="en-US" dirty="0"/>
               <a:t>算法的简介</a:t>
             </a:r>
-            <a:endParaRPr lang="zh-CN" altLang="en-US" dirty="0"/>
           </a:p>
         </p:txBody>
       </p:sp>
@@ -9170,56 +9293,56 @@
           <a:lstStyle/>
           <a:p>
             <a:r>
-              <a:rPr lang="en-US" altLang="zh-CN" dirty="0" smtClean="0">
+              <a:rPr lang="en-US" altLang="zh-CN" dirty="0">
                 <a:latin typeface="宋体" panose="02010600030101010101" pitchFamily="2" charset="-122"/>
                 <a:ea typeface="宋体" panose="02010600030101010101" pitchFamily="2" charset="-122"/>
               </a:rPr>
               <a:t>EM</a:t>
             </a:r>
             <a:r>
-              <a:rPr lang="zh-CN" altLang="zh-CN" dirty="0" smtClean="0">
+              <a:rPr lang="zh-CN" altLang="zh-CN" dirty="0">
                 <a:latin typeface="宋体" panose="02010600030101010101" pitchFamily="2" charset="-122"/>
                 <a:ea typeface="宋体" panose="02010600030101010101" pitchFamily="2" charset="-122"/>
               </a:rPr>
               <a:t>算法是一种迭代优化算法。主要用于含有隐变量的模型的参数估计。含有隐变量的模型往往用于对不完全数据进行建模。</a:t>
             </a:r>
             <a:r>
-              <a:rPr lang="en-US" altLang="zh-CN" dirty="0" smtClean="0">
+              <a:rPr lang="en-US" altLang="zh-CN" dirty="0">
                 <a:latin typeface="宋体" panose="02010600030101010101" pitchFamily="2" charset="-122"/>
                 <a:ea typeface="宋体" panose="02010600030101010101" pitchFamily="2" charset="-122"/>
               </a:rPr>
               <a:t>EM</a:t>
             </a:r>
             <a:r>
-              <a:rPr lang="zh-CN" altLang="zh-CN" dirty="0" smtClean="0">
+              <a:rPr lang="zh-CN" altLang="zh-CN" dirty="0">
                 <a:latin typeface="宋体" panose="02010600030101010101" pitchFamily="2" charset="-122"/>
                 <a:ea typeface="宋体" panose="02010600030101010101" pitchFamily="2" charset="-122"/>
               </a:rPr>
               <a:t>算法是一种参数估计的思想，典型的</a:t>
             </a:r>
             <a:r>
-              <a:rPr lang="en-US" altLang="zh-CN" dirty="0" smtClean="0">
+              <a:rPr lang="en-US" altLang="zh-CN" dirty="0">
                 <a:latin typeface="宋体" panose="02010600030101010101" pitchFamily="2" charset="-122"/>
                 <a:ea typeface="宋体" panose="02010600030101010101" pitchFamily="2" charset="-122"/>
               </a:rPr>
               <a:t>EM</a:t>
             </a:r>
             <a:r>
-              <a:rPr lang="zh-CN" altLang="zh-CN" dirty="0" smtClean="0">
+              <a:rPr lang="zh-CN" altLang="zh-CN" dirty="0">
                 <a:latin typeface="宋体" panose="02010600030101010101" pitchFamily="2" charset="-122"/>
                 <a:ea typeface="宋体" panose="02010600030101010101" pitchFamily="2" charset="-122"/>
               </a:rPr>
               <a:t>算法有高斯混合模型、隐马尔可夫模型和</a:t>
             </a:r>
             <a:r>
-              <a:rPr lang="en-US" altLang="zh-CN" dirty="0" smtClean="0">
+              <a:rPr lang="en-US" altLang="zh-CN" dirty="0">
                 <a:latin typeface="宋体" panose="02010600030101010101" pitchFamily="2" charset="-122"/>
                 <a:ea typeface="宋体" panose="02010600030101010101" pitchFamily="2" charset="-122"/>
               </a:rPr>
               <a:t>K-</a:t>
             </a:r>
             <a:r>
-              <a:rPr lang="zh-CN" altLang="zh-CN" dirty="0" smtClean="0">
+              <a:rPr lang="zh-CN" altLang="zh-CN" dirty="0">
                 <a:latin typeface="宋体" panose="02010600030101010101" pitchFamily="2" charset="-122"/>
                 <a:ea typeface="宋体" panose="02010600030101010101" pitchFamily="2" charset="-122"/>
               </a:rPr>
@@ -9249,7 +9372,14 @@
         <p:cNvGrpSpPr/>
         <p:nvPr/>
       </p:nvGrpSpPr>
-      <p:grpSpPr/>
+      <p:grpSpPr>
+        <a:xfrm>
+          <a:off x="0" y="0"/>
+          <a:ext cx="0" cy="0"/>
+          <a:chOff x="0" y="0"/>
+          <a:chExt cx="0" cy="0"/>
+        </a:xfrm>
+      </p:grpSpPr>
       <p:sp>
         <p:nvSpPr>
           <p:cNvPr id="2" name="标题 1"/>
@@ -9263,6 +9393,7 @@
         <p:spPr/>
         <p:txBody>
           <a:bodyPr/>
+          <a:lstStyle/>
           <a:p>
             <a:r>
               <a:rPr lang="en-US" altLang="zh-CN" dirty="0">
@@ -9293,12 +9424,12 @@
         <p:spPr/>
         <p:txBody>
           <a:bodyPr/>
+          <a:lstStyle/>
           <a:p>
             <a:r>
               <a:rPr lang="zh-CN" altLang="en-US"/>
               <a:t>因此Q函数可以写作</a:t>
             </a:r>
-            <a:endParaRPr lang="zh-CN" altLang="en-US"/>
           </a:p>
           <a:p>
             <a:endParaRPr lang="zh-CN" altLang="en-US"/>
@@ -9311,7 +9442,6 @@
               <a:rPr lang="zh-CN" altLang="en-US"/>
               <a:t>首先通过拉格朗日乘子法求  。由于    ，所以拉格朗日函数为</a:t>
             </a:r>
-            <a:endParaRPr lang="zh-CN" altLang="en-US"/>
           </a:p>
           <a:p>
             <a:endParaRPr lang="zh-CN" altLang="en-US"/>
@@ -9321,7 +9451,6 @@
               <a:rPr lang="zh-CN" altLang="en-US"/>
               <a:t>令拉格朗日函数对  的导数为0</a:t>
             </a:r>
-            <a:endParaRPr lang="zh-CN" altLang="en-US"/>
           </a:p>
           <a:p>
             <a:endParaRPr lang="zh-CN" altLang="en-US"/>
@@ -9342,12 +9471,12 @@
           <a:graphicData uri="http://schemas.openxmlformats.org/presentationml/2006/ole">
             <mc:AlternateContent xmlns:mc="http://schemas.openxmlformats.org/markup-compatibility/2006">
               <mc:Choice xmlns:v="urn:schemas-microsoft-com:vml" Requires="v">
-                <p:oleObj spid="_x0000_s5" name="" r:id="rId1" imgW="4305300" imgH="457200" progId="Word.Document.12">
+                <p:oleObj r:id="rId2" imgW="4305300" imgH="457200" progId="Word.Document.12">
                   <p:embed/>
                 </p:oleObj>
               </mc:Choice>
               <mc:Fallback>
-                <p:oleObj name="" r:id="rId1" imgW="4305300" imgH="457200" progId="Word.Document.12">
+                <p:oleObj r:id="rId2" imgW="4305300" imgH="457200" progId="Word.Document.12">
                   <p:embed/>
                   <p:pic>
                     <p:nvPicPr>
@@ -9356,7 +9485,7 @@
                       <p:nvPr/>
                     </p:nvPicPr>
                     <p:blipFill>
-                      <a:blip r:embed="rId2"/>
+                      <a:blip r:embed="rId3"/>
                       <a:stretch>
                         <a:fillRect/>
                       </a:stretch>
@@ -9391,12 +9520,12 @@
           <a:graphicData uri="http://schemas.openxmlformats.org/presentationml/2006/ole">
             <mc:AlternateContent xmlns:mc="http://schemas.openxmlformats.org/markup-compatibility/2006">
               <mc:Choice xmlns:v="urn:schemas-microsoft-com:vml" Requires="v">
-                <p:oleObj spid="_x0000_s7" name="" r:id="rId3" imgW="170815" imgH="247015" progId="Word.Document.12">
+                <p:oleObj r:id="rId4" imgW="170815" imgH="247015" progId="Word.Document.12">
                   <p:embed/>
                 </p:oleObj>
               </mc:Choice>
               <mc:Fallback>
-                <p:oleObj name="" r:id="rId3" imgW="170815" imgH="247015" progId="Word.Document.12">
+                <p:oleObj r:id="rId4" imgW="170815" imgH="247015" progId="Word.Document.12">
                   <p:embed/>
                   <p:pic>
                     <p:nvPicPr>
@@ -9405,7 +9534,7 @@
                       <p:nvPr/>
                     </p:nvPicPr>
                     <p:blipFill>
-                      <a:blip r:embed="rId4"/>
+                      <a:blip r:embed="rId5"/>
                       <a:stretch>
                         <a:fillRect/>
                       </a:stretch>
@@ -9440,12 +9569,12 @@
           <a:graphicData uri="http://schemas.openxmlformats.org/presentationml/2006/ole">
             <mc:AlternateContent xmlns:mc="http://schemas.openxmlformats.org/markup-compatibility/2006">
               <mc:Choice xmlns:v="urn:schemas-microsoft-com:vml" Requires="v">
-                <p:oleObj spid="_x0000_s9" name="" r:id="rId5" imgW="551815" imgH="438785" progId="Word.Document.12">
+                <p:oleObj r:id="rId6" imgW="551815" imgH="438785" progId="Word.Document.12">
                   <p:embed/>
                 </p:oleObj>
               </mc:Choice>
               <mc:Fallback>
-                <p:oleObj name="" r:id="rId5" imgW="551815" imgH="438785" progId="Word.Document.12">
+                <p:oleObj r:id="rId6" imgW="551815" imgH="438785" progId="Word.Document.12">
                   <p:embed/>
                   <p:pic>
                     <p:nvPicPr>
@@ -9454,7 +9583,7 @@
                       <p:nvPr/>
                     </p:nvPicPr>
                     <p:blipFill>
-                      <a:blip r:embed="rId6"/>
+                      <a:blip r:embed="rId7"/>
                       <a:stretch>
                         <a:fillRect/>
                       </a:stretch>
@@ -9489,12 +9618,12 @@
           <a:graphicData uri="http://schemas.openxmlformats.org/presentationml/2006/ole">
             <mc:AlternateContent xmlns:mc="http://schemas.openxmlformats.org/markup-compatibility/2006">
               <mc:Choice xmlns:v="urn:schemas-microsoft-com:vml" Requires="v">
-                <p:oleObj spid="_x0000_s11" name="" r:id="rId7" imgW="1981200" imgH="438785" progId="Word.Document.12">
+                <p:oleObj r:id="rId8" imgW="1981200" imgH="438785" progId="Word.Document.12">
                   <p:embed/>
                 </p:oleObj>
               </mc:Choice>
               <mc:Fallback>
-                <p:oleObj name="" r:id="rId7" imgW="1981200" imgH="438785" progId="Word.Document.12">
+                <p:oleObj r:id="rId8" imgW="1981200" imgH="438785" progId="Word.Document.12">
                   <p:embed/>
                   <p:pic>
                     <p:nvPicPr>
@@ -9503,7 +9632,7 @@
                       <p:nvPr/>
                     </p:nvPicPr>
                     <p:blipFill>
-                      <a:blip r:embed="rId8"/>
+                      <a:blip r:embed="rId9"/>
                       <a:stretch>
                         <a:fillRect/>
                       </a:stretch>
@@ -9538,12 +9667,12 @@
           <a:graphicData uri="http://schemas.openxmlformats.org/presentationml/2006/ole">
             <mc:AlternateContent xmlns:mc="http://schemas.openxmlformats.org/markup-compatibility/2006">
               <mc:Choice xmlns:v="urn:schemas-microsoft-com:vml" Requires="v">
-                <p:oleObj spid="_x0000_s13" name="" r:id="rId9" imgW="170815" imgH="247015" progId="Word.Document.12">
+                <p:oleObj r:id="rId10" imgW="170815" imgH="247015" progId="Word.Document.12">
                   <p:embed/>
                 </p:oleObj>
               </mc:Choice>
               <mc:Fallback>
-                <p:oleObj name="" r:id="rId9" imgW="170815" imgH="247015" progId="Word.Document.12">
+                <p:oleObj r:id="rId10" imgW="170815" imgH="247015" progId="Word.Document.12">
                   <p:embed/>
                   <p:pic>
                     <p:nvPicPr>
@@ -9552,7 +9681,7 @@
                       <p:nvPr/>
                     </p:nvPicPr>
                     <p:blipFill>
-                      <a:blip r:embed="rId10"/>
+                      <a:blip r:embed="rId11"/>
                       <a:stretch>
                         <a:fillRect/>
                       </a:stretch>
@@ -9587,12 +9716,12 @@
           <a:graphicData uri="http://schemas.openxmlformats.org/presentationml/2006/ole">
             <mc:AlternateContent xmlns:mc="http://schemas.openxmlformats.org/markup-compatibility/2006">
               <mc:Choice xmlns:v="urn:schemas-microsoft-com:vml" Requires="v">
-                <p:oleObj spid="_x0000_s15" name="" r:id="rId11" imgW="2391410" imgH="457200" progId="Word.Document.12">
+                <p:oleObj r:id="rId12" imgW="2391410" imgH="457200" progId="Word.Document.12">
                   <p:embed/>
                 </p:oleObj>
               </mc:Choice>
               <mc:Fallback>
-                <p:oleObj name="" r:id="rId11" imgW="2391410" imgH="457200" progId="Word.Document.12">
+                <p:oleObj r:id="rId12" imgW="2391410" imgH="457200" progId="Word.Document.12">
                   <p:embed/>
                   <p:pic>
                     <p:nvPicPr>
@@ -9601,7 +9730,7 @@
                       <p:nvPr/>
                     </p:nvPicPr>
                     <p:blipFill>
-                      <a:blip r:embed="rId12"/>
+                      <a:blip r:embed="rId13"/>
                       <a:stretch>
                         <a:fillRect/>
                       </a:stretch>
@@ -9639,7 +9768,14 @@
         <p:cNvGrpSpPr/>
         <p:nvPr/>
       </p:nvGrpSpPr>
-      <p:grpSpPr/>
+      <p:grpSpPr>
+        <a:xfrm>
+          <a:off x="0" y="0"/>
+          <a:ext cx="0" cy="0"/>
+          <a:chOff x="0" y="0"/>
+          <a:chExt cx="0" cy="0"/>
+        </a:xfrm>
+      </p:grpSpPr>
       <p:sp>
         <p:nvSpPr>
           <p:cNvPr id="2" name="标题 1"/>
@@ -9658,6 +9794,7 @@
         </p:spPr>
         <p:txBody>
           <a:bodyPr/>
+          <a:lstStyle/>
           <a:p>
             <a:r>
               <a:rPr lang="en-US" altLang="zh-CN" dirty="0">
@@ -9688,12 +9825,12 @@
         <p:spPr/>
         <p:txBody>
           <a:bodyPr/>
+          <a:lstStyle/>
           <a:p>
             <a:r>
               <a:rPr lang="zh-CN" altLang="en-US"/>
               <a:t>可得</a:t>
             </a:r>
-            <a:endParaRPr lang="zh-CN" altLang="en-US"/>
           </a:p>
           <a:p>
             <a:endParaRPr lang="zh-CN" altLang="en-US"/>
@@ -9709,7 +9846,6 @@
               <a:rPr lang="zh-CN" altLang="en-US"/>
               <a:t>于是</a:t>
             </a:r>
-            <a:endParaRPr lang="zh-CN" altLang="en-US"/>
           </a:p>
         </p:txBody>
       </p:sp>
@@ -9727,12 +9863,12 @@
           <a:graphicData uri="http://schemas.openxmlformats.org/presentationml/2006/ole">
             <mc:AlternateContent xmlns:mc="http://schemas.openxmlformats.org/markup-compatibility/2006">
               <mc:Choice xmlns:v="urn:schemas-microsoft-com:vml" Requires="v">
-                <p:oleObj spid="_x0000_s5" name="" r:id="rId1" imgW="2277110" imgH="1324610" progId="Word.Document.12">
+                <p:oleObj r:id="rId2" imgW="2277110" imgH="1324610" progId="Word.Document.12">
                   <p:embed/>
                 </p:oleObj>
               </mc:Choice>
               <mc:Fallback>
-                <p:oleObj name="" r:id="rId1" imgW="2277110" imgH="1324610" progId="Word.Document.12">
+                <p:oleObj r:id="rId2" imgW="2277110" imgH="1324610" progId="Word.Document.12">
                   <p:embed/>
                   <p:pic>
                     <p:nvPicPr>
@@ -9741,7 +9877,7 @@
                       <p:nvPr/>
                     </p:nvPicPr>
                     <p:blipFill>
-                      <a:blip r:embed="rId2"/>
+                      <a:blip r:embed="rId3"/>
                       <a:stretch>
                         <a:fillRect/>
                       </a:stretch>
@@ -9776,12 +9912,12 @@
           <a:graphicData uri="http://schemas.openxmlformats.org/presentationml/2006/ole">
             <mc:AlternateContent xmlns:mc="http://schemas.openxmlformats.org/markup-compatibility/2006">
               <mc:Choice xmlns:v="urn:schemas-microsoft-com:vml" Requires="v">
-                <p:oleObj spid="_x0000_s7" name="" r:id="rId3" imgW="2476500" imgH="808990" progId="Word.Document.12">
+                <p:oleObj r:id="rId4" imgW="2476500" imgH="808990" progId="Word.Document.12">
                   <p:embed/>
                 </p:oleObj>
               </mc:Choice>
               <mc:Fallback>
-                <p:oleObj name="" r:id="rId3" imgW="2476500" imgH="808990" progId="Word.Document.12">
+                <p:oleObj r:id="rId4" imgW="2476500" imgH="808990" progId="Word.Document.12">
                   <p:embed/>
                   <p:pic>
                     <p:nvPicPr>
@@ -9790,7 +9926,7 @@
                       <p:nvPr/>
                     </p:nvPicPr>
                     <p:blipFill>
-                      <a:blip r:embed="rId4"/>
+                      <a:blip r:embed="rId5"/>
                       <a:stretch>
                         <a:fillRect/>
                       </a:stretch>
@@ -9828,7 +9964,14 @@
         <p:cNvGrpSpPr/>
         <p:nvPr/>
       </p:nvGrpSpPr>
-      <p:grpSpPr/>
+      <p:grpSpPr>
+        <a:xfrm>
+          <a:off x="0" y="0"/>
+          <a:ext cx="0" cy="0"/>
+          <a:chOff x="0" y="0"/>
+          <a:chExt cx="0" cy="0"/>
+        </a:xfrm>
+      </p:grpSpPr>
       <p:sp>
         <p:nvSpPr>
           <p:cNvPr id="2" name="标题 1"/>
@@ -9842,6 +9985,7 @@
         <p:spPr/>
         <p:txBody>
           <a:bodyPr/>
+          <a:lstStyle/>
           <a:p>
             <a:r>
               <a:rPr lang="en-US" altLang="zh-CN" dirty="0">
@@ -9872,12 +10016,12 @@
         <p:spPr/>
         <p:txBody>
           <a:bodyPr/>
+          <a:lstStyle/>
           <a:p>
             <a:r>
               <a:rPr lang="zh-CN" altLang="en-US"/>
               <a:t>下面通过拉格朗日乘子法求   。由于     ，所以拉格朗日函数为</a:t>
             </a:r>
-            <a:endParaRPr lang="zh-CN" altLang="en-US"/>
           </a:p>
           <a:p>
             <a:endParaRPr lang="zh-CN" altLang="en-US"/>
@@ -9887,7 +10031,6 @@
               <a:rPr lang="zh-CN" altLang="en-US"/>
               <a:t>令拉格朗日函数对  的导数为0</a:t>
             </a:r>
-            <a:endParaRPr lang="zh-CN" altLang="en-US"/>
           </a:p>
           <a:p>
             <a:endParaRPr lang="zh-CN" altLang="en-US"/>
@@ -9908,12 +10051,12 @@
           <a:graphicData uri="http://schemas.openxmlformats.org/presentationml/2006/ole">
             <mc:AlternateContent xmlns:mc="http://schemas.openxmlformats.org/markup-compatibility/2006">
               <mc:Choice xmlns:v="urn:schemas-microsoft-com:vml" Requires="v">
-                <p:oleObj spid="_x0000_s5" name="" r:id="rId1" imgW="190500" imgH="266700" progId="Word.Document.12">
+                <p:oleObj r:id="rId2" imgW="190500" imgH="266700" progId="Word.Document.12">
                   <p:embed/>
                 </p:oleObj>
               </mc:Choice>
               <mc:Fallback>
-                <p:oleObj name="" r:id="rId1" imgW="190500" imgH="266700" progId="Word.Document.12">
+                <p:oleObj r:id="rId2" imgW="190500" imgH="266700" progId="Word.Document.12">
                   <p:embed/>
                   <p:pic>
                     <p:nvPicPr>
@@ -9922,7 +10065,7 @@
                       <p:nvPr/>
                     </p:nvPicPr>
                     <p:blipFill>
-                      <a:blip r:embed="rId2"/>
+                      <a:blip r:embed="rId3"/>
                       <a:stretch>
                         <a:fillRect/>
                       </a:stretch>
@@ -9957,12 +10100,12 @@
           <a:graphicData uri="http://schemas.openxmlformats.org/presentationml/2006/ole">
             <mc:AlternateContent xmlns:mc="http://schemas.openxmlformats.org/markup-compatibility/2006">
               <mc:Choice xmlns:v="urn:schemas-microsoft-com:vml" Requires="v">
-                <p:oleObj spid="_x0000_s7" name="" r:id="rId3" imgW="580390" imgH="448310" progId="Word.Document.12">
+                <p:oleObj r:id="rId4" imgW="580390" imgH="448310" progId="Word.Document.12">
                   <p:embed/>
                 </p:oleObj>
               </mc:Choice>
               <mc:Fallback>
-                <p:oleObj name="" r:id="rId3" imgW="580390" imgH="448310" progId="Word.Document.12">
+                <p:oleObj r:id="rId4" imgW="580390" imgH="448310" progId="Word.Document.12">
                   <p:embed/>
                   <p:pic>
                     <p:nvPicPr>
@@ -9971,7 +10114,7 @@
                       <p:nvPr/>
                     </p:nvPicPr>
                     <p:blipFill>
-                      <a:blip r:embed="rId4"/>
+                      <a:blip r:embed="rId5"/>
                       <a:stretch>
                         <a:fillRect/>
                       </a:stretch>
@@ -10006,12 +10149,12 @@
           <a:graphicData uri="http://schemas.openxmlformats.org/presentationml/2006/ole">
             <mc:AlternateContent xmlns:mc="http://schemas.openxmlformats.org/markup-compatibility/2006">
               <mc:Choice xmlns:v="urn:schemas-microsoft-com:vml" Requires="v">
-                <p:oleObj spid="_x0000_s9" name="" r:id="rId5" imgW="1990725" imgH="448310" progId="Word.Document.12">
+                <p:oleObj r:id="rId6" imgW="1990725" imgH="448310" progId="Word.Document.12">
                   <p:embed/>
                 </p:oleObj>
               </mc:Choice>
               <mc:Fallback>
-                <p:oleObj name="" r:id="rId5" imgW="1990725" imgH="448310" progId="Word.Document.12">
+                <p:oleObj r:id="rId6" imgW="1990725" imgH="448310" progId="Word.Document.12">
                   <p:embed/>
                   <p:pic>
                     <p:nvPicPr>
@@ -10020,7 +10163,7 @@
                       <p:nvPr/>
                     </p:nvPicPr>
                     <p:blipFill>
-                      <a:blip r:embed="rId6"/>
+                      <a:blip r:embed="rId7"/>
                       <a:stretch>
                         <a:fillRect/>
                       </a:stretch>
@@ -10055,12 +10198,12 @@
           <a:graphicData uri="http://schemas.openxmlformats.org/presentationml/2006/ole">
             <mc:AlternateContent xmlns:mc="http://schemas.openxmlformats.org/markup-compatibility/2006">
               <mc:Choice xmlns:v="urn:schemas-microsoft-com:vml" Requires="v">
-                <p:oleObj spid="_x0000_s11" name="" r:id="rId7" imgW="190500" imgH="266700" progId="Word.Document.12">
+                <p:oleObj r:id="rId8" imgW="190500" imgH="266700" progId="Word.Document.12">
                   <p:embed/>
                 </p:oleObj>
               </mc:Choice>
               <mc:Fallback>
-                <p:oleObj name="" r:id="rId7" imgW="190500" imgH="266700" progId="Word.Document.12">
+                <p:oleObj r:id="rId8" imgW="190500" imgH="266700" progId="Word.Document.12">
                   <p:embed/>
                   <p:pic>
                     <p:nvPicPr>
@@ -10069,7 +10212,7 @@
                       <p:nvPr/>
                     </p:nvPicPr>
                     <p:blipFill>
-                      <a:blip r:embed="rId8"/>
+                      <a:blip r:embed="rId9"/>
                       <a:stretch>
                         <a:fillRect/>
                       </a:stretch>
@@ -10104,12 +10247,12 @@
           <a:graphicData uri="http://schemas.openxmlformats.org/presentationml/2006/ole">
             <mc:AlternateContent xmlns:mc="http://schemas.openxmlformats.org/markup-compatibility/2006">
               <mc:Choice xmlns:v="urn:schemas-microsoft-com:vml" Requires="v">
-                <p:oleObj spid="_x0000_s13" name="" r:id="rId9" imgW="3115310" imgH="457200" progId="Word.Document.12">
+                <p:oleObj r:id="rId10" imgW="3115310" imgH="457200" progId="Word.Document.12">
                   <p:embed/>
                 </p:oleObj>
               </mc:Choice>
               <mc:Fallback>
-                <p:oleObj name="" r:id="rId9" imgW="3115310" imgH="457200" progId="Word.Document.12">
+                <p:oleObj r:id="rId10" imgW="3115310" imgH="457200" progId="Word.Document.12">
                   <p:embed/>
                   <p:pic>
                     <p:nvPicPr>
@@ -10118,7 +10261,7 @@
                       <p:nvPr/>
                     </p:nvPicPr>
                     <p:blipFill>
-                      <a:blip r:embed="rId10"/>
+                      <a:blip r:embed="rId11"/>
                       <a:stretch>
                         <a:fillRect/>
                       </a:stretch>
@@ -10156,7 +10299,14 @@
         <p:cNvGrpSpPr/>
         <p:nvPr/>
       </p:nvGrpSpPr>
-      <p:grpSpPr/>
+      <p:grpSpPr>
+        <a:xfrm>
+          <a:off x="0" y="0"/>
+          <a:ext cx="0" cy="0"/>
+          <a:chOff x="0" y="0"/>
+          <a:chExt cx="0" cy="0"/>
+        </a:xfrm>
+      </p:grpSpPr>
       <p:sp>
         <p:nvSpPr>
           <p:cNvPr id="2" name="标题 1"/>
@@ -10170,6 +10320,7 @@
         <p:spPr/>
         <p:txBody>
           <a:bodyPr/>
+          <a:lstStyle/>
           <a:p>
             <a:r>
               <a:rPr lang="en-US" altLang="zh-CN" dirty="0">
@@ -10200,12 +10351,12 @@
         <p:spPr/>
         <p:txBody>
           <a:bodyPr/>
+          <a:lstStyle/>
           <a:p>
             <a:r>
               <a:rPr lang="zh-CN" altLang="en-US"/>
               <a:t>可得</a:t>
             </a:r>
-            <a:endParaRPr lang="zh-CN" altLang="en-US"/>
           </a:p>
           <a:p>
             <a:endParaRPr lang="zh-CN" altLang="en-US"/>
@@ -10221,7 +10372,6 @@
               <a:rPr lang="zh-CN" altLang="en-US"/>
               <a:t>于是</a:t>
             </a:r>
-            <a:endParaRPr lang="zh-CN" altLang="en-US"/>
           </a:p>
         </p:txBody>
       </p:sp>
@@ -10239,12 +10389,12 @@
           <a:graphicData uri="http://schemas.openxmlformats.org/presentationml/2006/ole">
             <mc:AlternateContent xmlns:mc="http://schemas.openxmlformats.org/markup-compatibility/2006">
               <mc:Choice xmlns:v="urn:schemas-microsoft-com:vml" Requires="v">
-                <p:oleObj spid="_x0000_s5" name="" r:id="rId1" imgW="3000375" imgH="1324610" progId="Word.Document.12">
+                <p:oleObj r:id="rId2" imgW="3000375" imgH="1324610" progId="Word.Document.12">
                   <p:embed/>
                 </p:oleObj>
               </mc:Choice>
               <mc:Fallback>
-                <p:oleObj name="" r:id="rId1" imgW="3000375" imgH="1324610" progId="Word.Document.12">
+                <p:oleObj r:id="rId2" imgW="3000375" imgH="1324610" progId="Word.Document.12">
                   <p:embed/>
                   <p:pic>
                     <p:nvPicPr>
@@ -10253,7 +10403,7 @@
                       <p:nvPr/>
                     </p:nvPicPr>
                     <p:blipFill>
-                      <a:blip r:embed="rId2"/>
+                      <a:blip r:embed="rId3"/>
                       <a:stretch>
                         <a:fillRect/>
                       </a:stretch>
@@ -10288,12 +10438,12 @@
           <a:graphicData uri="http://schemas.openxmlformats.org/presentationml/2006/ole">
             <mc:AlternateContent xmlns:mc="http://schemas.openxmlformats.org/markup-compatibility/2006">
               <mc:Choice xmlns:v="urn:schemas-microsoft-com:vml" Requires="v">
-                <p:oleObj spid="_x0000_s7" name="" r:id="rId3" imgW="2294890" imgH="1647190" progId="Word.Document.12">
+                <p:oleObj r:id="rId4" imgW="2294890" imgH="1647190" progId="Word.Document.12">
                   <p:embed/>
                 </p:oleObj>
               </mc:Choice>
               <mc:Fallback>
-                <p:oleObj name="" r:id="rId3" imgW="2294890" imgH="1647190" progId="Word.Document.12">
+                <p:oleObj r:id="rId4" imgW="2294890" imgH="1647190" progId="Word.Document.12">
                   <p:embed/>
                   <p:pic>
                     <p:nvPicPr>
@@ -10302,7 +10452,7 @@
                       <p:nvPr/>
                     </p:nvPicPr>
                     <p:blipFill>
-                      <a:blip r:embed="rId4"/>
+                      <a:blip r:embed="rId5"/>
                       <a:stretch>
                         <a:fillRect/>
                       </a:stretch>
@@ -10340,7 +10490,14 @@
         <p:cNvGrpSpPr/>
         <p:nvPr/>
       </p:nvGrpSpPr>
-      <p:grpSpPr/>
+      <p:grpSpPr>
+        <a:xfrm>
+          <a:off x="0" y="0"/>
+          <a:ext cx="0" cy="0"/>
+          <a:chOff x="0" y="0"/>
+          <a:chExt cx="0" cy="0"/>
+        </a:xfrm>
+      </p:grpSpPr>
       <p:sp>
         <p:nvSpPr>
           <p:cNvPr id="2" name="标题 1"/>
@@ -10354,6 +10511,7 @@
         <p:spPr/>
         <p:txBody>
           <a:bodyPr/>
+          <a:lstStyle/>
           <a:p>
             <a:r>
               <a:rPr lang="en-US" altLang="zh-CN" dirty="0">
@@ -10384,12 +10542,12 @@
         <p:spPr/>
         <p:txBody>
           <a:bodyPr/>
+          <a:lstStyle/>
           <a:p>
             <a:r>
               <a:rPr lang="zh-CN" altLang="en-US"/>
               <a:t>最后通过拉格朗日乘子法求   。由于    ，所以拉格朗日函数为</a:t>
             </a:r>
-            <a:endParaRPr lang="zh-CN" altLang="en-US"/>
           </a:p>
           <a:p>
             <a:endParaRPr lang="zh-CN" altLang="en-US"/>
@@ -10402,7 +10560,6 @@
               <a:rPr lang="zh-CN" altLang="en-US"/>
               <a:t>令拉格朗日函数对  的导数为0</a:t>
             </a:r>
-            <a:endParaRPr lang="zh-CN" altLang="en-US"/>
           </a:p>
         </p:txBody>
       </p:sp>
@@ -10420,12 +10577,12 @@
           <a:graphicData uri="http://schemas.openxmlformats.org/presentationml/2006/ole">
             <mc:AlternateContent xmlns:mc="http://schemas.openxmlformats.org/markup-compatibility/2006">
               <mc:Choice xmlns:v="urn:schemas-microsoft-com:vml" Requires="v">
-                <p:oleObj spid="_x0000_s5" name="" r:id="rId1" imgW="170815" imgH="266700" progId="Word.Document.12">
+                <p:oleObj r:id="rId2" imgW="170815" imgH="266700" progId="Word.Document.12">
                   <p:embed/>
                 </p:oleObj>
               </mc:Choice>
               <mc:Fallback>
-                <p:oleObj name="" r:id="rId1" imgW="170815" imgH="266700" progId="Word.Document.12">
+                <p:oleObj r:id="rId2" imgW="170815" imgH="266700" progId="Word.Document.12">
                   <p:embed/>
                   <p:pic>
                     <p:nvPicPr>
@@ -10434,7 +10591,7 @@
                       <p:nvPr/>
                     </p:nvPicPr>
                     <p:blipFill>
-                      <a:blip r:embed="rId2"/>
+                      <a:blip r:embed="rId3"/>
                       <a:stretch>
                         <a:fillRect/>
                       </a:stretch>
@@ -10469,12 +10626,12 @@
           <a:graphicData uri="http://schemas.openxmlformats.org/presentationml/2006/ole">
             <mc:AlternateContent xmlns:mc="http://schemas.openxmlformats.org/markup-compatibility/2006">
               <mc:Choice xmlns:v="urn:schemas-microsoft-com:vml" Requires="v">
-                <p:oleObj spid="_x0000_s7" name="" r:id="rId3" imgW="551815" imgH="448310" progId="Word.Document.12">
+                <p:oleObj r:id="rId4" imgW="551815" imgH="448310" progId="Word.Document.12">
                   <p:embed/>
                 </p:oleObj>
               </mc:Choice>
               <mc:Fallback>
-                <p:oleObj name="" r:id="rId3" imgW="551815" imgH="448310" progId="Word.Document.12">
+                <p:oleObj r:id="rId4" imgW="551815" imgH="448310" progId="Word.Document.12">
                   <p:embed/>
                   <p:pic>
                     <p:nvPicPr>
@@ -10483,7 +10640,7 @@
                       <p:nvPr/>
                     </p:nvPicPr>
                     <p:blipFill>
-                      <a:blip r:embed="rId4"/>
+                      <a:blip r:embed="rId5"/>
                       <a:stretch>
                         <a:fillRect/>
                       </a:stretch>
@@ -10518,12 +10675,12 @@
           <a:graphicData uri="http://schemas.openxmlformats.org/presentationml/2006/ole">
             <mc:AlternateContent xmlns:mc="http://schemas.openxmlformats.org/markup-compatibility/2006">
               <mc:Choice xmlns:v="urn:schemas-microsoft-com:vml" Requires="v">
-                <p:oleObj spid="_x0000_s9" name="" r:id="rId5" imgW="1981200" imgH="448310" progId="Word.Document.12">
+                <p:oleObj r:id="rId6" imgW="1981200" imgH="448310" progId="Word.Document.12">
                   <p:embed/>
                 </p:oleObj>
               </mc:Choice>
               <mc:Fallback>
-                <p:oleObj name="" r:id="rId5" imgW="1981200" imgH="448310" progId="Word.Document.12">
+                <p:oleObj r:id="rId6" imgW="1981200" imgH="448310" progId="Word.Document.12">
                   <p:embed/>
                   <p:pic>
                     <p:nvPicPr>
@@ -10532,7 +10689,7 @@
                       <p:nvPr/>
                     </p:nvPicPr>
                     <p:blipFill>
-                      <a:blip r:embed="rId6"/>
+                      <a:blip r:embed="rId7"/>
                       <a:stretch>
                         <a:fillRect/>
                       </a:stretch>
@@ -10567,12 +10724,12 @@
           <a:graphicData uri="http://schemas.openxmlformats.org/presentationml/2006/ole">
             <mc:AlternateContent xmlns:mc="http://schemas.openxmlformats.org/markup-compatibility/2006">
               <mc:Choice xmlns:v="urn:schemas-microsoft-com:vml" Requires="v">
-                <p:oleObj spid="_x0000_s11" name="" r:id="rId7" imgW="170815" imgH="266700" progId="Word.Document.12">
+                <p:oleObj r:id="rId8" imgW="170815" imgH="266700" progId="Word.Document.12">
                   <p:embed/>
                 </p:oleObj>
               </mc:Choice>
               <mc:Fallback>
-                <p:oleObj name="" r:id="rId7" imgW="170815" imgH="266700" progId="Word.Document.12">
+                <p:oleObj r:id="rId8" imgW="170815" imgH="266700" progId="Word.Document.12">
                   <p:embed/>
                   <p:pic>
                     <p:nvPicPr>
@@ -10581,7 +10738,7 @@
                       <p:nvPr/>
                     </p:nvPicPr>
                     <p:blipFill>
-                      <a:blip r:embed="rId8"/>
+                      <a:blip r:embed="rId9"/>
                       <a:stretch>
                         <a:fillRect/>
                       </a:stretch>
@@ -10616,12 +10773,12 @@
           <a:graphicData uri="http://schemas.openxmlformats.org/presentationml/2006/ole">
             <mc:AlternateContent xmlns:mc="http://schemas.openxmlformats.org/markup-compatibility/2006">
               <mc:Choice xmlns:v="urn:schemas-microsoft-com:vml" Requires="v">
-                <p:oleObj spid="_x0000_s13" name="" r:id="rId9" imgW="2572385" imgH="457200" progId="Word.Document.12">
+                <p:oleObj r:id="rId10" imgW="2572385" imgH="457200" progId="Word.Document.12">
                   <p:embed/>
                 </p:oleObj>
               </mc:Choice>
               <mc:Fallback>
-                <p:oleObj name="" r:id="rId9" imgW="2572385" imgH="457200" progId="Word.Document.12">
+                <p:oleObj r:id="rId10" imgW="2572385" imgH="457200" progId="Word.Document.12">
                   <p:embed/>
                   <p:pic>
                     <p:nvPicPr>
@@ -10630,7 +10787,7 @@
                       <p:nvPr/>
                     </p:nvPicPr>
                     <p:blipFill>
-                      <a:blip r:embed="rId10"/>
+                      <a:blip r:embed="rId11"/>
                       <a:stretch>
                         <a:fillRect/>
                       </a:stretch>
@@ -10668,7 +10825,14 @@
         <p:cNvGrpSpPr/>
         <p:nvPr/>
       </p:nvGrpSpPr>
-      <p:grpSpPr/>
+      <p:grpSpPr>
+        <a:xfrm>
+          <a:off x="0" y="0"/>
+          <a:ext cx="0" cy="0"/>
+          <a:chOff x="0" y="0"/>
+          <a:chExt cx="0" cy="0"/>
+        </a:xfrm>
+      </p:grpSpPr>
       <p:sp>
         <p:nvSpPr>
           <p:cNvPr id="2" name="标题 1"/>
@@ -10682,6 +10846,7 @@
         <p:spPr/>
         <p:txBody>
           <a:bodyPr/>
+          <a:lstStyle/>
           <a:p>
             <a:r>
               <a:rPr lang="en-US" altLang="zh-CN" dirty="0">
@@ -10717,12 +10882,12 @@
           <a:bodyPr>
             <a:normAutofit lnSpcReduction="20000"/>
           </a:bodyPr>
+          <a:lstStyle/>
           <a:p>
             <a:r>
               <a:rPr lang="zh-CN" altLang="en-US" sz="2000"/>
               <a:t>可得</a:t>
             </a:r>
-            <a:endParaRPr lang="zh-CN" altLang="en-US" sz="2000"/>
           </a:p>
           <a:p>
             <a:endParaRPr lang="zh-CN" altLang="en-US"/>
@@ -10757,7 +10922,6 @@
               <a:rPr lang="zh-CN" altLang="en-US" sz="2000"/>
               <a:t>至此，我们解出了隐马尔可夫模型中所有的参数。该方法称为Baum-Welch算法。</a:t>
             </a:r>
-            <a:endParaRPr lang="zh-CN" altLang="en-US" sz="2000"/>
           </a:p>
         </p:txBody>
       </p:sp>
@@ -10775,12 +10939,12 @@
           <a:graphicData uri="http://schemas.openxmlformats.org/presentationml/2006/ole">
             <mc:AlternateContent xmlns:mc="http://schemas.openxmlformats.org/markup-compatibility/2006">
               <mc:Choice xmlns:v="urn:schemas-microsoft-com:vml" Requires="v">
-                <p:oleObj spid="_x0000_s5" name="" r:id="rId1" imgW="3077210" imgH="1324610" progId="Word.Document.12">
+                <p:oleObj r:id="rId2" imgW="3077210" imgH="1324610" progId="Word.Document.12">
                   <p:embed/>
                 </p:oleObj>
               </mc:Choice>
               <mc:Fallback>
-                <p:oleObj name="" r:id="rId1" imgW="3077210" imgH="1324610" progId="Word.Document.12">
+                <p:oleObj r:id="rId2" imgW="3077210" imgH="1324610" progId="Word.Document.12">
                   <p:embed/>
                   <p:pic>
                     <p:nvPicPr>
@@ -10789,7 +10953,7 @@
                       <p:nvPr/>
                     </p:nvPicPr>
                     <p:blipFill>
-                      <a:blip r:embed="rId2"/>
+                      <a:blip r:embed="rId3"/>
                       <a:stretch>
                         <a:fillRect/>
                       </a:stretch>
@@ -10824,12 +10988,12 @@
           <a:graphicData uri="http://schemas.openxmlformats.org/presentationml/2006/ole">
             <mc:AlternateContent xmlns:mc="http://schemas.openxmlformats.org/markup-compatibility/2006">
               <mc:Choice xmlns:v="urn:schemas-microsoft-com:vml" Requires="v">
-                <p:oleObj spid="_x0000_s7" name="" r:id="rId3" imgW="2409190" imgH="1647190" progId="Word.Document.12">
+                <p:oleObj r:id="rId4" imgW="2409190" imgH="1647190" progId="Word.Document.12">
                   <p:embed/>
                 </p:oleObj>
               </mc:Choice>
               <mc:Fallback>
-                <p:oleObj name="" r:id="rId3" imgW="2409190" imgH="1647190" progId="Word.Document.12">
+                <p:oleObj r:id="rId4" imgW="2409190" imgH="1647190" progId="Word.Document.12">
                   <p:embed/>
                   <p:pic>
                     <p:nvPicPr>
@@ -10838,7 +11002,7 @@
                       <p:nvPr/>
                     </p:nvPicPr>
                     <p:blipFill>
-                      <a:blip r:embed="rId4"/>
+                      <a:blip r:embed="rId5"/>
                       <a:stretch>
                         <a:fillRect/>
                       </a:stretch>
@@ -10876,7 +11040,14 @@
         <p:cNvGrpSpPr/>
         <p:nvPr/>
       </p:nvGrpSpPr>
-      <p:grpSpPr/>
+      <p:grpSpPr>
+        <a:xfrm>
+          <a:off x="0" y="0"/>
+          <a:ext cx="0" cy="0"/>
+          <a:chOff x="0" y="0"/>
+          <a:chExt cx="0" cy="0"/>
+        </a:xfrm>
+      </p:grpSpPr>
       <p:sp>
         <p:nvSpPr>
           <p:cNvPr id="2" name="标题 1"/>
@@ -10890,6 +11061,7 @@
         <p:spPr/>
         <p:txBody>
           <a:bodyPr/>
+          <a:lstStyle/>
           <a:p>
             <a:endParaRPr lang="zh-CN" altLang="en-US"/>
           </a:p>
@@ -10913,13 +11085,13 @@
               <a:lightRig rig="threePt" dir="t"/>
             </a:scene3d>
           </a:bodyPr>
+          <a:lstStyle/>
           <a:p>
             <a:pPr marL="0" indent="0" algn="ctr">
               <a:buNone/>
             </a:pPr>
             <a:r>
               <a:rPr lang="zh-CN" altLang="en-US" sz="9600">
-                <a:ln/>
                 <a:solidFill>
                   <a:schemeClr val="accent1"/>
                 </a:solidFill>
@@ -10933,19 +11105,6 @@
               </a:rPr>
               <a:t>谢谢</a:t>
             </a:r>
-            <a:endParaRPr lang="zh-CN" altLang="en-US" sz="9600">
-              <a:ln/>
-              <a:solidFill>
-                <a:schemeClr val="accent1"/>
-              </a:solidFill>
-              <a:effectLst>
-                <a:outerShdw blurRad="38100" dist="25400" dir="5400000" algn="ctr" rotWithShape="0">
-                  <a:srgbClr val="6E747A">
-                    <a:alpha val="43000"/>
-                  </a:srgbClr>
-                </a:outerShdw>
-              </a:effectLst>
-            </a:endParaRPr>
           </a:p>
         </p:txBody>
       </p:sp>
@@ -10990,14 +11149,13 @@
           <a:lstStyle/>
           <a:p>
             <a:r>
-              <a:rPr lang="en-US" altLang="zh-CN" dirty="0" smtClean="0"/>
+              <a:rPr lang="en-US" altLang="zh-CN" dirty="0"/>
               <a:t>EM</a:t>
             </a:r>
             <a:r>
-              <a:rPr lang="zh-CN" altLang="en-US" dirty="0" smtClean="0"/>
+              <a:rPr lang="zh-CN" altLang="en-US" dirty="0"/>
               <a:t>算法的数学推导</a:t>
             </a:r>
-            <a:endParaRPr lang="zh-CN" altLang="en-US" dirty="0"/>
           </a:p>
         </p:txBody>
       </p:sp>
@@ -11017,127 +11175,81 @@
           <a:lstStyle/>
           <a:p>
             <a:r>
-              <a:rPr lang="en-US" altLang="zh-CN" dirty="0" smtClean="0">
+              <a:rPr lang="en-US" altLang="zh-CN" dirty="0">
                 <a:latin typeface="宋体" panose="02010600030101010101" pitchFamily="2" charset="-122"/>
                 <a:ea typeface="宋体" panose="02010600030101010101" pitchFamily="2" charset="-122"/>
               </a:rPr>
               <a:t>Jensen</a:t>
             </a:r>
             <a:r>
-              <a:rPr lang="zh-CN" altLang="zh-CN" dirty="0" smtClean="0">
+              <a:rPr lang="zh-CN" altLang="zh-CN" dirty="0">
                 <a:latin typeface="宋体" panose="02010600030101010101" pitchFamily="2" charset="-122"/>
                 <a:ea typeface="宋体" panose="02010600030101010101" pitchFamily="2" charset="-122"/>
               </a:rPr>
               <a:t>不等式</a:t>
             </a:r>
-            <a:endParaRPr lang="en-US" altLang="zh-CN" dirty="0" smtClean="0">
+            <a:endParaRPr lang="en-US" altLang="zh-CN" dirty="0">
               <a:latin typeface="宋体" panose="02010600030101010101" pitchFamily="2" charset="-122"/>
               <a:ea typeface="宋体" panose="02010600030101010101" pitchFamily="2" charset="-122"/>
             </a:endParaRPr>
           </a:p>
           <a:p>
             <a:r>
-              <a:rPr lang="zh-CN" altLang="zh-CN" dirty="0" smtClean="0">
+              <a:rPr lang="zh-CN" altLang="zh-CN" dirty="0">
                 <a:latin typeface="宋体" panose="02010600030101010101" pitchFamily="2" charset="-122"/>
                 <a:ea typeface="宋体" panose="02010600030101010101" pitchFamily="2" charset="-122"/>
               </a:rPr>
               <a:t>设</a:t>
             </a:r>
             <a:r>
-              <a:rPr lang="en-US" altLang="zh-CN" dirty="0" smtClean="0">
+              <a:rPr lang="en-US" altLang="zh-CN" dirty="0">
+                <a:latin typeface="宋体" panose="02010600030101010101" pitchFamily="2" charset="-122"/>
+                <a:ea typeface="宋体" panose="02010600030101010101" pitchFamily="2" charset="-122"/>
+              </a:rPr>
+              <a:t> x</a:t>
+            </a:r>
+            <a:r>
+              <a:rPr lang="zh-CN" altLang="zh-CN" dirty="0">
+                <a:latin typeface="宋体" panose="02010600030101010101" pitchFamily="2" charset="-122"/>
+                <a:ea typeface="宋体" panose="02010600030101010101" pitchFamily="2" charset="-122"/>
+              </a:rPr>
+              <a:t>是一个随机变量，</a:t>
+            </a:r>
+            <a:r>
+              <a:rPr lang="en-US" altLang="zh-CN" dirty="0">
+                <a:latin typeface="Blackadder ITC" panose="04020505051007020D02" pitchFamily="82" charset="0"/>
+                <a:ea typeface="宋体" panose="02010600030101010101" pitchFamily="2" charset="-122"/>
+              </a:rPr>
+              <a:t>f</a:t>
+            </a:r>
+            <a:r>
+              <a:rPr lang="en-US" altLang="zh-CN" dirty="0">
                 <a:latin typeface="宋体" panose="02010600030101010101" pitchFamily="2" charset="-122"/>
                 <a:ea typeface="宋体" panose="02010600030101010101" pitchFamily="2" charset="-122"/>
               </a:rPr>
               <a:t> </a:t>
             </a:r>
             <a:r>
-              <a:rPr lang="en-US" altLang="zh-CN" dirty="0" smtClean="0">
-                <a:latin typeface="宋体" panose="02010600030101010101" pitchFamily="2" charset="-122"/>
-                <a:ea typeface="宋体" panose="02010600030101010101" pitchFamily="2" charset="-122"/>
-              </a:rPr>
-              <a:t>x</a:t>
-            </a:r>
-            <a:r>
-              <a:rPr lang="zh-CN" altLang="zh-CN" dirty="0" smtClean="0">
-                <a:latin typeface="宋体" panose="02010600030101010101" pitchFamily="2" charset="-122"/>
-                <a:ea typeface="宋体" panose="02010600030101010101" pitchFamily="2" charset="-122"/>
-              </a:rPr>
-              <a:t>是</a:t>
-            </a:r>
-            <a:r>
-              <a:rPr lang="zh-CN" altLang="zh-CN" dirty="0" smtClean="0">
-                <a:latin typeface="宋体" panose="02010600030101010101" pitchFamily="2" charset="-122"/>
-                <a:ea typeface="宋体" panose="02010600030101010101" pitchFamily="2" charset="-122"/>
-              </a:rPr>
-              <a:t>一个随机变量</a:t>
-            </a:r>
-            <a:r>
-              <a:rPr lang="zh-CN" altLang="zh-CN" dirty="0" smtClean="0">
-                <a:latin typeface="宋体" panose="02010600030101010101" pitchFamily="2" charset="-122"/>
-                <a:ea typeface="宋体" panose="02010600030101010101" pitchFamily="2" charset="-122"/>
-              </a:rPr>
-              <a:t>，</a:t>
-            </a:r>
-            <a:r>
-              <a:rPr lang="en-US" altLang="zh-CN" dirty="0" smtClean="0">
-                <a:latin typeface="Blackadder ITC" panose="04020505051007020D02" pitchFamily="82" charset="0"/>
-                <a:ea typeface="宋体" panose="02010600030101010101" pitchFamily="2" charset="-122"/>
-              </a:rPr>
-              <a:t>f</a:t>
-            </a:r>
-            <a:r>
-              <a:rPr lang="en-US" altLang="zh-CN" dirty="0" smtClean="0">
-                <a:latin typeface="宋体" panose="02010600030101010101" pitchFamily="2" charset="-122"/>
-                <a:ea typeface="宋体" panose="02010600030101010101" pitchFamily="2" charset="-122"/>
-              </a:rPr>
-              <a:t> </a:t>
-            </a:r>
-            <a:r>
-              <a:rPr lang="zh-CN" altLang="zh-CN" dirty="0" smtClean="0">
+              <a:rPr lang="zh-CN" altLang="zh-CN" dirty="0">
                 <a:latin typeface="宋体" panose="02010600030101010101" pitchFamily="2" charset="-122"/>
                 <a:ea typeface="宋体" panose="02010600030101010101" pitchFamily="2" charset="-122"/>
               </a:rPr>
               <a:t>是作用于随机变量</a:t>
             </a:r>
             <a:r>
-              <a:rPr lang="en-US" altLang="zh-CN" dirty="0" smtClean="0">
+              <a:rPr lang="en-US" altLang="zh-CN" dirty="0">
                 <a:latin typeface="宋体" panose="02010600030101010101" pitchFamily="2" charset="-122"/>
                 <a:ea typeface="宋体" panose="02010600030101010101" pitchFamily="2" charset="-122"/>
               </a:rPr>
-              <a:t> </a:t>
-            </a:r>
-            <a:r>
-              <a:rPr lang="en-US" altLang="zh-CN" dirty="0" smtClean="0">
+              <a:t> x</a:t>
+            </a:r>
+            <a:r>
+              <a:rPr lang="zh-CN" altLang="zh-CN" dirty="0">
                 <a:latin typeface="宋体" panose="02010600030101010101" pitchFamily="2" charset="-122"/>
                 <a:ea typeface="宋体" panose="02010600030101010101" pitchFamily="2" charset="-122"/>
               </a:rPr>
-              <a:t>x</a:t>
-            </a:r>
-            <a:r>
-              <a:rPr lang="zh-CN" altLang="zh-CN" dirty="0" smtClean="0">
-                <a:latin typeface="宋体" panose="02010600030101010101" pitchFamily="2" charset="-122"/>
-                <a:ea typeface="宋体" panose="02010600030101010101" pitchFamily="2" charset="-122"/>
-              </a:rPr>
-              <a:t>上</a:t>
-            </a:r>
-            <a:r>
-              <a:rPr lang="zh-CN" altLang="zh-CN" dirty="0" smtClean="0">
-                <a:latin typeface="宋体" panose="02010600030101010101" pitchFamily="2" charset="-122"/>
-                <a:ea typeface="宋体" panose="02010600030101010101" pitchFamily="2" charset="-122"/>
-              </a:rPr>
-              <a:t>的下凸函数，则</a:t>
-            </a:r>
-            <a:r>
-              <a:rPr lang="zh-CN" altLang="zh-CN" dirty="0" smtClean="0">
-                <a:latin typeface="宋体" panose="02010600030101010101" pitchFamily="2" charset="-122"/>
-                <a:ea typeface="宋体" panose="02010600030101010101" pitchFamily="2" charset="-122"/>
-              </a:rPr>
-              <a:t>有</a:t>
-            </a:r>
-            <a:endParaRPr lang="zh-CN" altLang="zh-CN" dirty="0" smtClean="0">
-              <a:latin typeface="宋体" panose="02010600030101010101" pitchFamily="2" charset="-122"/>
-              <a:ea typeface="宋体" panose="02010600030101010101" pitchFamily="2" charset="-122"/>
-            </a:endParaRPr>
+              <a:t>上的下凸函数，则有</a:t>
+            </a:r>
           </a:p>
           <a:p>
             <a:endParaRPr lang="zh-CN" altLang="en-US" dirty="0">
@@ -11162,10 +11274,6 @@
               </a:rPr>
               <a:t>Jensen不等式在   为常数时取等号。设   是一个二维空间中的下凸函数，   是  和  之间的任意一点，即</a:t>
             </a:r>
-            <a:endParaRPr lang="zh-CN" altLang="en-US" dirty="0">
-              <a:latin typeface="宋体" panose="02010600030101010101" pitchFamily="2" charset="-122"/>
-              <a:ea typeface="宋体" panose="02010600030101010101" pitchFamily="2" charset="-122"/>
-            </a:endParaRPr>
           </a:p>
           <a:p>
             <a:endParaRPr lang="zh-CN" altLang="en-US" dirty="0">
@@ -11181,10 +11289,6 @@
               </a:rPr>
               <a:t>直观上可以看出Jensen不等式成立。</a:t>
             </a:r>
-            <a:endParaRPr lang="zh-CN" altLang="en-US" dirty="0">
-              <a:latin typeface="宋体" panose="02010600030101010101" pitchFamily="2" charset="-122"/>
-              <a:ea typeface="宋体" panose="02010600030101010101" pitchFamily="2" charset="-122"/>
-            </a:endParaRPr>
           </a:p>
         </p:txBody>
       </p:sp>
@@ -11202,12 +11306,12 @@
           <a:graphicData uri="http://schemas.openxmlformats.org/presentationml/2006/ole">
             <mc:AlternateContent xmlns:mc="http://schemas.openxmlformats.org/markup-compatibility/2006">
               <mc:Choice xmlns:v="urn:schemas-microsoft-com:vml" Requires="v">
-                <p:oleObj spid="_x0000_s5" name="" r:id="rId1" imgW="1219200" imgH="266700" progId="Word.Document.12">
+                <p:oleObj r:id="rId2" imgW="1219200" imgH="266700" progId="Word.Document.12">
                   <p:embed/>
                 </p:oleObj>
               </mc:Choice>
               <mc:Fallback>
-                <p:oleObj name="" r:id="rId1" imgW="1219200" imgH="266700" progId="Word.Document.12">
+                <p:oleObj r:id="rId2" imgW="1219200" imgH="266700" progId="Word.Document.12">
                   <p:embed/>
                   <p:pic>
                     <p:nvPicPr>
@@ -11216,7 +11320,7 @@
                       <p:nvPr/>
                     </p:nvPicPr>
                     <p:blipFill>
-                      <a:blip r:embed="rId2"/>
+                      <a:blip r:embed="rId3"/>
                       <a:stretch>
                         <a:fillRect/>
                       </a:stretch>
@@ -11251,12 +11355,12 @@
           <a:graphicData uri="http://schemas.openxmlformats.org/presentationml/2006/ole">
             <mc:AlternateContent xmlns:mc="http://schemas.openxmlformats.org/markup-compatibility/2006">
               <mc:Choice xmlns:v="urn:schemas-microsoft-com:vml" Requires="v">
-                <p:oleObj spid="_x0000_s7" name="" r:id="rId3" imgW="323215" imgH="210185" progId="Word.Document.12">
+                <p:oleObj r:id="rId4" imgW="323215" imgH="210185" progId="Word.Document.12">
                   <p:embed/>
                 </p:oleObj>
               </mc:Choice>
               <mc:Fallback>
-                <p:oleObj name="" r:id="rId3" imgW="323215" imgH="210185" progId="Word.Document.12">
+                <p:oleObj r:id="rId4" imgW="323215" imgH="210185" progId="Word.Document.12">
                   <p:embed/>
                   <p:pic>
                     <p:nvPicPr>
@@ -11265,7 +11369,7 @@
                       <p:nvPr/>
                     </p:nvPicPr>
                     <p:blipFill>
-                      <a:blip r:embed="rId4"/>
+                      <a:blip r:embed="rId5"/>
                       <a:stretch>
                         <a:fillRect/>
                       </a:stretch>
@@ -11300,12 +11404,12 @@
           <a:graphicData uri="http://schemas.openxmlformats.org/presentationml/2006/ole">
             <mc:AlternateContent xmlns:mc="http://schemas.openxmlformats.org/markup-compatibility/2006">
               <mc:Choice xmlns:v="urn:schemas-microsoft-com:vml" Requires="v">
-                <p:oleObj spid="_x0000_s9" name="" r:id="rId5" imgW="323215" imgH="210185" progId="Word.Document.12">
+                <p:oleObj r:id="rId6" imgW="323215" imgH="210185" progId="Word.Document.12">
                   <p:embed/>
                 </p:oleObj>
               </mc:Choice>
               <mc:Fallback>
-                <p:oleObj name="" r:id="rId5" imgW="323215" imgH="210185" progId="Word.Document.12">
+                <p:oleObj r:id="rId6" imgW="323215" imgH="210185" progId="Word.Document.12">
                   <p:embed/>
                   <p:pic>
                     <p:nvPicPr>
@@ -11314,7 +11418,7 @@
                       <p:nvPr/>
                     </p:nvPicPr>
                     <p:blipFill>
-                      <a:blip r:embed="rId4"/>
+                      <a:blip r:embed="rId5"/>
                       <a:stretch>
                         <a:fillRect/>
                       </a:stretch>
@@ -11349,12 +11453,12 @@
           <a:graphicData uri="http://schemas.openxmlformats.org/presentationml/2006/ole">
             <mc:AlternateContent xmlns:mc="http://schemas.openxmlformats.org/markup-compatibility/2006">
               <mc:Choice xmlns:v="urn:schemas-microsoft-com:vml" Requires="v">
-                <p:oleObj spid="_x0000_s11" name="" r:id="rId6" imgW="323215" imgH="210185" progId="Word.Document.12">
+                <p:oleObj r:id="rId7" imgW="323215" imgH="210185" progId="Word.Document.12">
                   <p:embed/>
                 </p:oleObj>
               </mc:Choice>
               <mc:Fallback>
-                <p:oleObj name="" r:id="rId6" imgW="323215" imgH="210185" progId="Word.Document.12">
+                <p:oleObj r:id="rId7" imgW="323215" imgH="210185" progId="Word.Document.12">
                   <p:embed/>
                   <p:pic>
                     <p:nvPicPr>
@@ -11363,7 +11467,7 @@
                       <p:nvPr/>
                     </p:nvPicPr>
                     <p:blipFill>
-                      <a:blip r:embed="rId7"/>
+                      <a:blip r:embed="rId8"/>
                       <a:stretch>
                         <a:fillRect/>
                       </a:stretch>
@@ -11398,12 +11502,12 @@
           <a:graphicData uri="http://schemas.openxmlformats.org/presentationml/2006/ole">
             <mc:AlternateContent xmlns:mc="http://schemas.openxmlformats.org/markup-compatibility/2006">
               <mc:Choice xmlns:v="urn:schemas-microsoft-com:vml" Requires="v">
-                <p:oleObj spid="_x0000_s13" name="" r:id="rId8" imgW="170815" imgH="247015" progId="Word.Document.12">
+                <p:oleObj r:id="rId9" imgW="170815" imgH="247015" progId="Word.Document.12">
                   <p:embed/>
                 </p:oleObj>
               </mc:Choice>
               <mc:Fallback>
-                <p:oleObj name="" r:id="rId8" imgW="170815" imgH="247015" progId="Word.Document.12">
+                <p:oleObj r:id="rId9" imgW="170815" imgH="247015" progId="Word.Document.12">
                   <p:embed/>
                   <p:pic>
                     <p:nvPicPr>
@@ -11412,7 +11516,7 @@
                       <p:nvPr/>
                     </p:nvPicPr>
                     <p:blipFill>
-                      <a:blip r:embed="rId9"/>
+                      <a:blip r:embed="rId10"/>
                       <a:stretch>
                         <a:fillRect/>
                       </a:stretch>
@@ -11447,12 +11551,12 @@
           <a:graphicData uri="http://schemas.openxmlformats.org/presentationml/2006/ole">
             <mc:AlternateContent xmlns:mc="http://schemas.openxmlformats.org/markup-compatibility/2006">
               <mc:Choice xmlns:v="urn:schemas-microsoft-com:vml" Requires="v">
-                <p:oleObj spid="_x0000_s15" name="" r:id="rId10" imgW="170815" imgH="247015" progId="Word.Document.12">
+                <p:oleObj r:id="rId11" imgW="170815" imgH="247015" progId="Word.Document.12">
                   <p:embed/>
                 </p:oleObj>
               </mc:Choice>
               <mc:Fallback>
-                <p:oleObj name="" r:id="rId10" imgW="170815" imgH="247015" progId="Word.Document.12">
+                <p:oleObj r:id="rId11" imgW="170815" imgH="247015" progId="Word.Document.12">
                   <p:embed/>
                   <p:pic>
                     <p:nvPicPr>
@@ -11461,7 +11565,7 @@
                       <p:nvPr/>
                     </p:nvPicPr>
                     <p:blipFill>
-                      <a:blip r:embed="rId11"/>
+                      <a:blip r:embed="rId12"/>
                       <a:stretch>
                         <a:fillRect/>
                       </a:stretch>
@@ -11496,12 +11600,12 @@
           <a:graphicData uri="http://schemas.openxmlformats.org/presentationml/2006/ole">
             <mc:AlternateContent xmlns:mc="http://schemas.openxmlformats.org/markup-compatibility/2006">
               <mc:Choice xmlns:v="urn:schemas-microsoft-com:vml" Requires="v">
-                <p:oleObj spid="_x0000_s17" name="" r:id="rId12" imgW="2028825" imgH="247015" progId="Word.Document.12">
+                <p:oleObj r:id="rId13" imgW="2028825" imgH="247015" progId="Word.Document.12">
                   <p:embed/>
                 </p:oleObj>
               </mc:Choice>
               <mc:Fallback>
-                <p:oleObj name="" r:id="rId12" imgW="2028825" imgH="247015" progId="Word.Document.12">
+                <p:oleObj r:id="rId13" imgW="2028825" imgH="247015" progId="Word.Document.12">
                   <p:embed/>
                   <p:pic>
                     <p:nvPicPr>
@@ -11510,7 +11614,7 @@
                       <p:nvPr/>
                     </p:nvPicPr>
                     <p:blipFill>
-                      <a:blip r:embed="rId13"/>
+                      <a:blip r:embed="rId14"/>
                       <a:stretch>
                         <a:fillRect/>
                       </a:stretch>
@@ -11548,7 +11652,14 @@
         <p:cNvGrpSpPr/>
         <p:nvPr/>
       </p:nvGrpSpPr>
-      <p:grpSpPr/>
+      <p:grpSpPr>
+        <a:xfrm>
+          <a:off x="0" y="0"/>
+          <a:ext cx="0" cy="0"/>
+          <a:chOff x="0" y="0"/>
+          <a:chExt cx="0" cy="0"/>
+        </a:xfrm>
+      </p:grpSpPr>
       <p:sp>
         <p:nvSpPr>
           <p:cNvPr id="2" name="标题 1"/>
@@ -11562,6 +11673,7 @@
         <p:spPr/>
         <p:txBody>
           <a:bodyPr/>
+          <a:lstStyle/>
           <a:p>
             <a:r>
               <a:rPr lang="en-US" altLang="zh-CN" dirty="0">
@@ -11592,6 +11704,7 @@
         <p:spPr/>
         <p:txBody>
           <a:bodyPr/>
+          <a:lstStyle/>
           <a:p>
             <a:r>
               <a:rPr lang="en-US" altLang="zh-CN" dirty="0">
@@ -11630,7 +11743,7 @@
           </p:nvPr>
         </p:nvPicPr>
         <p:blipFill>
-          <a:blip r:embed="rId2" cstate="print">
+          <a:blip r:embed="rId3" cstate="print">
             <a:extLst>
               <a:ext uri="{28A0092B-C50C-407E-A947-70E740481C1C}">
                 <a14:useLocalDpi xmlns:a14="http://schemas.microsoft.com/office/drawing/2010/main" val="0"/>
@@ -11668,7 +11781,14 @@
         <p:cNvGrpSpPr/>
         <p:nvPr/>
       </p:nvGrpSpPr>
-      <p:grpSpPr/>
+      <p:grpSpPr>
+        <a:xfrm>
+          <a:off x="0" y="0"/>
+          <a:ext cx="0" cy="0"/>
+          <a:chOff x="0" y="0"/>
+          <a:chExt cx="0" cy="0"/>
+        </a:xfrm>
+      </p:grpSpPr>
       <p:sp>
         <p:nvSpPr>
           <p:cNvPr id="2" name="标题 1"/>
@@ -11682,6 +11802,7 @@
         <p:spPr/>
         <p:txBody>
           <a:bodyPr/>
+          <a:lstStyle/>
           <a:p>
             <a:r>
               <a:rPr lang="en-US" altLang="zh-CN" dirty="0">
@@ -11712,6 +11833,7 @@
         <p:spPr/>
         <p:txBody>
           <a:bodyPr/>
+          <a:lstStyle/>
           <a:p>
             <a:r>
               <a:rPr lang="zh-CN" altLang="en-US" dirty="0">
@@ -11761,11 +11883,6 @@
               </a:rPr>
               <a:t> ，称      为完全数据。产生观测数据的模型记为</a:t>
             </a:r>
-            <a:endParaRPr lang="zh-CN" altLang="en-US" dirty="0">
-              <a:latin typeface="+mj-ea"/>
-              <a:ea typeface="+mj-ea"/>
-              <a:sym typeface="+mn-ea"/>
-            </a:endParaRPr>
           </a:p>
           <a:p>
             <a:endParaRPr lang="zh-CN" altLang="en-US"/>
@@ -11803,19 +11920,19 @@
           <p:nvPr/>
         </p:nvGraphicFramePr>
         <p:xfrm>
-          <a:off x="2237105" y="2244725"/>
+          <a:off x="2094230" y="2637155"/>
           <a:ext cx="1087755" cy="448945"/>
         </p:xfrm>
         <a:graphic>
           <a:graphicData uri="http://schemas.openxmlformats.org/presentationml/2006/ole">
             <mc:AlternateContent xmlns:mc="http://schemas.openxmlformats.org/markup-compatibility/2006">
               <mc:Choice xmlns:v="urn:schemas-microsoft-com:vml" Requires="v">
-                <p:oleObj spid="_x0000_s5" name="" r:id="rId1" imgW="351790" imgH="219710" progId="Word.Document.12">
+                <p:oleObj r:id="rId2" imgW="351790" imgH="219710" progId="Word.Document.12">
                   <p:embed/>
                 </p:oleObj>
               </mc:Choice>
               <mc:Fallback>
-                <p:oleObj name="" r:id="rId1" imgW="351790" imgH="219710" progId="Word.Document.12">
+                <p:oleObj r:id="rId2" imgW="351790" imgH="219710" progId="Word.Document.12">
                   <p:embed/>
                   <p:pic>
                     <p:nvPicPr>
@@ -11824,14 +11941,14 @@
                       <p:nvPr/>
                     </p:nvPicPr>
                     <p:blipFill>
-                      <a:blip r:embed="rId2"/>
+                      <a:blip r:embed="rId3"/>
                       <a:stretch>
                         <a:fillRect/>
                       </a:stretch>
                     </p:blipFill>
                     <p:spPr>
                       <a:xfrm>
-                        <a:off x="2237105" y="2244725"/>
+                        <a:off x="2094230" y="2637155"/>
                         <a:ext cx="1087755" cy="448945"/>
                       </a:xfrm>
                       <a:prstGeom prst="rect">
@@ -11859,12 +11976,12 @@
           <a:graphicData uri="http://schemas.openxmlformats.org/presentationml/2006/ole">
             <mc:AlternateContent xmlns:mc="http://schemas.openxmlformats.org/markup-compatibility/2006">
               <mc:Choice xmlns:v="urn:schemas-microsoft-com:vml" Requires="v">
-                <p:oleObj spid="_x0000_s7" name="" r:id="rId3" imgW="457200" imgH="210185" progId="Word.Document.12">
+                <p:oleObj r:id="rId4" imgW="457200" imgH="210185" progId="Word.Document.12">
                   <p:embed/>
                 </p:oleObj>
               </mc:Choice>
               <mc:Fallback>
-                <p:oleObj name="" r:id="rId3" imgW="457200" imgH="210185" progId="Word.Document.12">
+                <p:oleObj r:id="rId4" imgW="457200" imgH="210185" progId="Word.Document.12">
                   <p:embed/>
                   <p:pic>
                     <p:nvPicPr>
@@ -11873,7 +11990,7 @@
                       <p:nvPr/>
                     </p:nvPicPr>
                     <p:blipFill>
-                      <a:blip r:embed="rId4"/>
+                      <a:blip r:embed="rId5"/>
                       <a:stretch>
                         <a:fillRect/>
                       </a:stretch>
@@ -11908,12 +12025,12 @@
           <a:graphicData uri="http://schemas.openxmlformats.org/presentationml/2006/ole">
             <mc:AlternateContent xmlns:mc="http://schemas.openxmlformats.org/markup-compatibility/2006">
               <mc:Choice xmlns:v="urn:schemas-microsoft-com:vml" Requires="v">
-                <p:oleObj spid="_x0000_s9" name="" r:id="rId5" imgW="1371600" imgH="323215" progId="Word.Document.12">
+                <p:oleObj r:id="rId6" imgW="1371600" imgH="323215" progId="Word.Document.12">
                   <p:embed/>
                 </p:oleObj>
               </mc:Choice>
               <mc:Fallback>
-                <p:oleObj name="" r:id="rId5" imgW="1371600" imgH="323215" progId="Word.Document.12">
+                <p:oleObj r:id="rId6" imgW="1371600" imgH="323215" progId="Word.Document.12">
                   <p:embed/>
                   <p:pic>
                     <p:nvPicPr>
@@ -11922,7 +12039,7 @@
                       <p:nvPr/>
                     </p:nvPicPr>
                     <p:blipFill>
-                      <a:blip r:embed="rId6"/>
+                      <a:blip r:embed="rId7"/>
                       <a:stretch>
                         <a:fillRect/>
                       </a:stretch>
@@ -11957,12 +12074,12 @@
           <a:graphicData uri="http://schemas.openxmlformats.org/presentationml/2006/ole">
             <mc:AlternateContent xmlns:mc="http://schemas.openxmlformats.org/markup-compatibility/2006">
               <mc:Choice xmlns:v="urn:schemas-microsoft-com:vml" Requires="v">
-                <p:oleObj spid="_x0000_s11" name="" r:id="rId7" imgW="123190" imgH="190500" progId="Word.Document.12">
+                <p:oleObj r:id="rId8" imgW="123190" imgH="190500" progId="Word.Document.12">
                   <p:embed/>
                 </p:oleObj>
               </mc:Choice>
               <mc:Fallback>
-                <p:oleObj name="" r:id="rId7" imgW="123190" imgH="190500" progId="Word.Document.12">
+                <p:oleObj r:id="rId8" imgW="123190" imgH="190500" progId="Word.Document.12">
                   <p:embed/>
                   <p:pic>
                     <p:nvPicPr>
@@ -11971,7 +12088,7 @@
                       <p:nvPr/>
                     </p:nvPicPr>
                     <p:blipFill>
-                      <a:blip r:embed="rId8"/>
+                      <a:blip r:embed="rId9"/>
                       <a:stretch>
                         <a:fillRect/>
                       </a:stretch>
@@ -11999,19 +12116,19 @@
           <p:nvPr/>
         </p:nvGraphicFramePr>
         <p:xfrm>
-          <a:off x="3443605" y="3736975"/>
+          <a:off x="3181985" y="4420235"/>
           <a:ext cx="1597025" cy="444500"/>
         </p:xfrm>
         <a:graphic>
           <a:graphicData uri="http://schemas.openxmlformats.org/presentationml/2006/ole">
             <mc:AlternateContent xmlns:mc="http://schemas.openxmlformats.org/markup-compatibility/2006">
               <mc:Choice xmlns:v="urn:schemas-microsoft-com:vml" Requires="v">
-                <p:oleObj spid="_x0000_s13" name="" r:id="rId9" imgW="619125" imgH="210185" progId="Word.Document.12">
+                <p:oleObj r:id="rId10" imgW="619125" imgH="210185" progId="Word.Document.12">
                   <p:embed/>
                 </p:oleObj>
               </mc:Choice>
               <mc:Fallback>
-                <p:oleObj name="" r:id="rId9" imgW="619125" imgH="210185" progId="Word.Document.12">
+                <p:oleObj r:id="rId10" imgW="619125" imgH="210185" progId="Word.Document.12">
                   <p:embed/>
                   <p:pic>
                     <p:nvPicPr>
@@ -12020,14 +12137,14 @@
                       <p:nvPr/>
                     </p:nvPicPr>
                     <p:blipFill>
-                      <a:blip r:embed="rId10"/>
+                      <a:blip r:embed="rId11"/>
                       <a:stretch>
                         <a:fillRect/>
                       </a:stretch>
                     </p:blipFill>
                     <p:spPr>
                       <a:xfrm>
-                        <a:off x="3443605" y="3736975"/>
+                        <a:off x="3181985" y="4420235"/>
                         <a:ext cx="1597025" cy="444500"/>
                       </a:xfrm>
                       <a:prstGeom prst="rect">
@@ -12058,7 +12175,14 @@
         <p:cNvGrpSpPr/>
         <p:nvPr/>
       </p:nvGrpSpPr>
-      <p:grpSpPr/>
+      <p:grpSpPr>
+        <a:xfrm>
+          <a:off x="0" y="0"/>
+          <a:ext cx="0" cy="0"/>
+          <a:chOff x="0" y="0"/>
+          <a:chExt cx="0" cy="0"/>
+        </a:xfrm>
+      </p:grpSpPr>
       <p:sp>
         <p:nvSpPr>
           <p:cNvPr id="2" name="标题 1"/>
@@ -12072,6 +12196,7 @@
         <p:spPr/>
         <p:txBody>
           <a:bodyPr/>
+          <a:lstStyle/>
           <a:p>
             <a:r>
               <a:rPr lang="en-US" altLang="zh-CN" dirty="0">
@@ -12107,6 +12232,7 @@
         </p:spPr>
         <p:txBody>
           <a:bodyPr/>
+          <a:lstStyle/>
           <a:p>
             <a:r>
               <a:rPr lang="zh-CN" altLang="en-US" dirty="0">
@@ -12162,12 +12288,12 @@
           <a:graphicData uri="http://schemas.openxmlformats.org/presentationml/2006/ole">
             <mc:AlternateContent xmlns:mc="http://schemas.openxmlformats.org/markup-compatibility/2006">
               <mc:Choice xmlns:v="urn:schemas-microsoft-com:vml" Requires="v">
-                <p:oleObj spid="_x0000_s5" name="" r:id="rId1" imgW="170815" imgH="247015" progId="Word.Document.12">
+                <p:oleObj r:id="rId2" imgW="170815" imgH="247015" progId="Word.Document.12">
                   <p:embed/>
                 </p:oleObj>
               </mc:Choice>
               <mc:Fallback>
-                <p:oleObj name="" r:id="rId1" imgW="170815" imgH="247015" progId="Word.Document.12">
+                <p:oleObj r:id="rId2" imgW="170815" imgH="247015" progId="Word.Document.12">
                   <p:embed/>
                   <p:pic>
                     <p:nvPicPr>
@@ -12176,7 +12302,7 @@
                       <p:nvPr/>
                     </p:nvPicPr>
                     <p:blipFill>
-                      <a:blip r:embed="rId2"/>
+                      <a:blip r:embed="rId3"/>
                       <a:stretch>
                         <a:fillRect/>
                       </a:stretch>
@@ -12211,12 +12337,12 @@
           <a:graphicData uri="http://schemas.openxmlformats.org/presentationml/2006/ole">
             <mc:AlternateContent xmlns:mc="http://schemas.openxmlformats.org/markup-compatibility/2006">
               <mc:Choice xmlns:v="urn:schemas-microsoft-com:vml" Requires="v">
-                <p:oleObj spid="_x0000_s7" name="" r:id="rId3" imgW="170815" imgH="247015" progId="Word.Document.12">
+                <p:oleObj r:id="rId4" imgW="170815" imgH="247015" progId="Word.Document.12">
                   <p:embed/>
                 </p:oleObj>
               </mc:Choice>
               <mc:Fallback>
-                <p:oleObj name="" r:id="rId3" imgW="170815" imgH="247015" progId="Word.Document.12">
+                <p:oleObj r:id="rId4" imgW="170815" imgH="247015" progId="Word.Document.12">
                   <p:embed/>
                   <p:pic>
                     <p:nvPicPr>
@@ -12225,7 +12351,7 @@
                       <p:nvPr/>
                     </p:nvPicPr>
                     <p:blipFill>
-                      <a:blip r:embed="rId2"/>
+                      <a:blip r:embed="rId3"/>
                       <a:stretch>
                         <a:fillRect/>
                       </a:stretch>
@@ -12260,12 +12386,12 @@
           <a:graphicData uri="http://schemas.openxmlformats.org/presentationml/2006/ole">
             <mc:AlternateContent xmlns:mc="http://schemas.openxmlformats.org/markup-compatibility/2006">
               <mc:Choice xmlns:v="urn:schemas-microsoft-com:vml" Requires="v">
-                <p:oleObj spid="_x0000_s9" name="" r:id="rId4" imgW="2809875" imgH="533400" progId="Word.Document.12">
+                <p:oleObj r:id="rId5" imgW="2809875" imgH="533400" progId="Word.Document.12">
                   <p:embed/>
                 </p:oleObj>
               </mc:Choice>
               <mc:Fallback>
-                <p:oleObj name="" r:id="rId4" imgW="2809875" imgH="533400" progId="Word.Document.12">
+                <p:oleObj r:id="rId5" imgW="2809875" imgH="533400" progId="Word.Document.12">
                   <p:embed/>
                   <p:pic>
                     <p:nvPicPr>
@@ -12274,7 +12400,7 @@
                       <p:nvPr/>
                     </p:nvPicPr>
                     <p:blipFill>
-                      <a:blip r:embed="rId5"/>
+                      <a:blip r:embed="rId6"/>
                       <a:stretch>
                         <a:fillRect/>
                       </a:stretch>
@@ -12312,7 +12438,14 @@
         <p:cNvGrpSpPr/>
         <p:nvPr/>
       </p:nvGrpSpPr>
-      <p:grpSpPr/>
+      <p:grpSpPr>
+        <a:xfrm>
+          <a:off x="0" y="0"/>
+          <a:ext cx="0" cy="0"/>
+          <a:chOff x="0" y="0"/>
+          <a:chExt cx="0" cy="0"/>
+        </a:xfrm>
+      </p:grpSpPr>
       <p:sp>
         <p:nvSpPr>
           <p:cNvPr id="2" name="标题 1"/>
@@ -12326,6 +12459,7 @@
         <p:spPr/>
         <p:txBody>
           <a:bodyPr/>
+          <a:lstStyle/>
           <a:p>
             <a:r>
               <a:rPr lang="en-US" altLang="zh-CN" dirty="0">
@@ -12356,6 +12490,7 @@
         <p:spPr/>
         <p:txBody>
           <a:bodyPr/>
+          <a:lstStyle/>
           <a:p>
             <a:r>
               <a:rPr lang="zh-CN" altLang="en-US" dirty="0">
@@ -12379,22 +12514,28 @@
         <p:nvGraphicFramePr>
           <p:cNvPr id="4" name="对象 3"/>
           <p:cNvGraphicFramePr/>
-          <p:nvPr/>
+          <p:nvPr>
+            <p:extLst>
+              <p:ext uri="{D42A27DB-BD31-4B8C-83A1-F6EECF244321}">
+                <p14:modId xmlns:p14="http://schemas.microsoft.com/office/powerpoint/2010/main" val="837077407"/>
+              </p:ext>
+            </p:extLst>
+          </p:nvPr>
         </p:nvGraphicFramePr>
         <p:xfrm>
-          <a:off x="5855335" y="1825625"/>
+          <a:off x="5732733" y="1534192"/>
           <a:ext cx="963295" cy="476250"/>
         </p:xfrm>
         <a:graphic>
           <a:graphicData uri="http://schemas.openxmlformats.org/presentationml/2006/ole">
             <mc:AlternateContent xmlns:mc="http://schemas.openxmlformats.org/markup-compatibility/2006">
               <mc:Choice xmlns:v="urn:schemas-microsoft-com:vml" Requires="v">
-                <p:oleObj spid="_x0000_s5" name="" r:id="rId1" imgW="457200" imgH="210185" progId="Word.Document.12">
+                <p:oleObj r:id="rId2" imgW="457200" imgH="210185" progId="Word.Document.12">
                   <p:embed/>
                 </p:oleObj>
               </mc:Choice>
               <mc:Fallback>
-                <p:oleObj name="" r:id="rId1" imgW="457200" imgH="210185" progId="Word.Document.12">
+                <p:oleObj r:id="rId2" imgW="457200" imgH="210185" progId="Word.Document.12">
                   <p:embed/>
                   <p:pic>
                     <p:nvPicPr>
@@ -12403,14 +12544,14 @@
                       <p:nvPr/>
                     </p:nvPicPr>
                     <p:blipFill>
-                      <a:blip r:embed="rId2"/>
+                      <a:blip r:embed="rId3"/>
                       <a:stretch>
                         <a:fillRect/>
                       </a:stretch>
                     </p:blipFill>
                     <p:spPr>
                       <a:xfrm>
-                        <a:off x="5855335" y="1825625"/>
+                        <a:off x="5732733" y="1534192"/>
                         <a:ext cx="963295" cy="476250"/>
                       </a:xfrm>
                       <a:prstGeom prst="rect">
@@ -12438,12 +12579,12 @@
           <a:graphicData uri="http://schemas.openxmlformats.org/presentationml/2006/ole">
             <mc:AlternateContent xmlns:mc="http://schemas.openxmlformats.org/markup-compatibility/2006">
               <mc:Choice xmlns:v="urn:schemas-microsoft-com:vml" Requires="v">
-                <p:oleObj spid="_x0000_s7" name="" r:id="rId3" imgW="1714500" imgH="1009015" progId="Word.Document.12">
+                <p:oleObj r:id="rId4" imgW="1714500" imgH="1009015" progId="Word.Document.12">
                   <p:embed/>
                 </p:oleObj>
               </mc:Choice>
               <mc:Fallback>
-                <p:oleObj name="" r:id="rId3" imgW="1714500" imgH="1009015" progId="Word.Document.12">
+                <p:oleObj r:id="rId4" imgW="1714500" imgH="1009015" progId="Word.Document.12">
                   <p:embed/>
                   <p:pic>
                     <p:nvPicPr>
@@ -12452,7 +12593,7 @@
                       <p:nvPr/>
                     </p:nvPicPr>
                     <p:blipFill>
-                      <a:blip r:embed="rId4"/>
+                      <a:blip r:embed="rId5"/>
                       <a:stretch>
                         <a:fillRect/>
                       </a:stretch>
@@ -12490,7 +12631,14 @@
         <p:cNvGrpSpPr/>
         <p:nvPr/>
       </p:nvGrpSpPr>
-      <p:grpSpPr/>
+      <p:grpSpPr>
+        <a:xfrm>
+          <a:off x="0" y="0"/>
+          <a:ext cx="0" cy="0"/>
+          <a:chOff x="0" y="0"/>
+          <a:chExt cx="0" cy="0"/>
+        </a:xfrm>
+      </p:grpSpPr>
       <p:sp>
         <p:nvSpPr>
           <p:cNvPr id="2" name="标题 1"/>
@@ -12504,6 +12652,7 @@
         <p:spPr/>
         <p:txBody>
           <a:bodyPr/>
+          <a:lstStyle/>
           <a:p>
             <a:r>
               <a:rPr lang="en-US" altLang="zh-CN" dirty="0">
@@ -12533,40 +12682,39 @@
         </p:nvSpPr>
         <p:spPr>
           <a:xfrm>
-            <a:off x="838200" y="1825625"/>
+            <a:off x="994212" y="1634945"/>
             <a:ext cx="10515600" cy="4351338"/>
           </a:xfrm>
         </p:spPr>
         <p:txBody>
           <a:bodyPr/>
-          <a:p>
-            <a:r>
-              <a:rPr lang="zh-CN" altLang="en-US"/>
+          <a:lstStyle/>
+          <a:p>
+            <a:r>
+              <a:rPr lang="zh-CN" altLang="en-US" dirty="0"/>
               <a:t>将          看作随机变量  的函数，则有</a:t>
             </a:r>
-            <a:endParaRPr lang="zh-CN" altLang="en-US"/>
-          </a:p>
-          <a:p>
-            <a:endParaRPr lang="zh-CN" altLang="en-US"/>
-          </a:p>
-          <a:p>
-            <a:r>
-              <a:rPr lang="zh-CN" altLang="en-US"/>
+          </a:p>
+          <a:p>
+            <a:endParaRPr lang="zh-CN" altLang="en-US" dirty="0"/>
+          </a:p>
+          <a:p>
+            <a:r>
+              <a:rPr lang="zh-CN" altLang="en-US" dirty="0"/>
               <a:t>由Jensen不等式有</a:t>
             </a:r>
-            <a:endParaRPr lang="zh-CN" altLang="en-US"/>
-          </a:p>
-          <a:p>
-            <a:endParaRPr lang="zh-CN" altLang="en-US"/>
-          </a:p>
-          <a:p>
-            <a:endParaRPr lang="zh-CN" altLang="en-US"/>
-          </a:p>
-          <a:p>
-            <a:endParaRPr lang="zh-CN" altLang="en-US"/>
-          </a:p>
-          <a:p>
-            <a:endParaRPr lang="zh-CN" altLang="en-US"/>
+          </a:p>
+          <a:p>
+            <a:endParaRPr lang="zh-CN" altLang="en-US" dirty="0"/>
+          </a:p>
+          <a:p>
+            <a:endParaRPr lang="zh-CN" altLang="en-US" dirty="0"/>
+          </a:p>
+          <a:p>
+            <a:endParaRPr lang="zh-CN" altLang="en-US" dirty="0"/>
+          </a:p>
+          <a:p>
+            <a:endParaRPr lang="zh-CN" altLang="en-US" dirty="0"/>
           </a:p>
         </p:txBody>
       </p:sp>
@@ -12574,22 +12722,28 @@
         <p:nvGraphicFramePr>
           <p:cNvPr id="4" name="对象 3"/>
           <p:cNvGraphicFramePr/>
-          <p:nvPr/>
+          <p:nvPr>
+            <p:extLst>
+              <p:ext uri="{D42A27DB-BD31-4B8C-83A1-F6EECF244321}">
+                <p14:modId xmlns:p14="http://schemas.microsoft.com/office/powerpoint/2010/main" val="411259624"/>
+              </p:ext>
+            </p:extLst>
+          </p:nvPr>
         </p:nvGraphicFramePr>
         <p:xfrm>
-          <a:off x="1520190" y="1825625"/>
+          <a:off x="1477864" y="2001361"/>
           <a:ext cx="1630045" cy="424815"/>
         </p:xfrm>
         <a:graphic>
           <a:graphicData uri="http://schemas.openxmlformats.org/presentationml/2006/ole">
             <mc:AlternateContent xmlns:mc="http://schemas.openxmlformats.org/markup-compatibility/2006">
               <mc:Choice xmlns:v="urn:schemas-microsoft-com:vml" Requires="v">
-                <p:oleObj spid="_x0000_s5" name="" r:id="rId1" imgW="990600" imgH="200025" progId="Word.Document.12">
+                <p:oleObj r:id="rId2" imgW="990600" imgH="200025" progId="Word.Document.12">
                   <p:embed/>
                 </p:oleObj>
               </mc:Choice>
               <mc:Fallback>
-                <p:oleObj name="" r:id="rId1" imgW="990600" imgH="200025" progId="Word.Document.12">
+                <p:oleObj r:id="rId2" imgW="990600" imgH="200025" progId="Word.Document.12">
                   <p:embed/>
                   <p:pic>
                     <p:nvPicPr>
@@ -12598,14 +12752,14 @@
                       <p:nvPr/>
                     </p:nvPicPr>
                     <p:blipFill>
-                      <a:blip r:embed="rId2"/>
+                      <a:blip r:embed="rId3"/>
                       <a:stretch>
                         <a:fillRect/>
                       </a:stretch>
                     </p:blipFill>
                     <p:spPr>
                       <a:xfrm>
-                        <a:off x="1520190" y="1825625"/>
+                        <a:off x="1477864" y="2001361"/>
                         <a:ext cx="1630045" cy="424815"/>
                       </a:xfrm>
                       <a:prstGeom prst="rect">
@@ -12623,22 +12777,28 @@
         <p:nvGraphicFramePr>
           <p:cNvPr id="6" name="对象 5"/>
           <p:cNvGraphicFramePr/>
-          <p:nvPr/>
+          <p:nvPr>
+            <p:extLst>
+              <p:ext uri="{D42A27DB-BD31-4B8C-83A1-F6EECF244321}">
+                <p14:modId xmlns:p14="http://schemas.microsoft.com/office/powerpoint/2010/main" val="374273399"/>
+              </p:ext>
+            </p:extLst>
+          </p:nvPr>
         </p:nvGraphicFramePr>
         <p:xfrm>
-          <a:off x="5454650" y="1934845"/>
+          <a:off x="4752599" y="1707500"/>
           <a:ext cx="219710" cy="315595"/>
         </p:xfrm>
         <a:graphic>
           <a:graphicData uri="http://schemas.openxmlformats.org/presentationml/2006/ole">
             <mc:AlternateContent xmlns:mc="http://schemas.openxmlformats.org/markup-compatibility/2006">
               <mc:Choice xmlns:v="urn:schemas-microsoft-com:vml" Requires="v">
-                <p:oleObj spid="_x0000_s7" name="" r:id="rId3" imgW="123190" imgH="123190" progId="Word.Document.12">
+                <p:oleObj r:id="rId4" imgW="123190" imgH="123190" progId="Word.Document.12">
                   <p:embed/>
                 </p:oleObj>
               </mc:Choice>
               <mc:Fallback>
-                <p:oleObj name="" r:id="rId3" imgW="123190" imgH="123190" progId="Word.Document.12">
+                <p:oleObj r:id="rId4" imgW="123190" imgH="123190" progId="Word.Document.12">
                   <p:embed/>
                   <p:pic>
                     <p:nvPicPr>
@@ -12647,14 +12807,14 @@
                       <p:nvPr/>
                     </p:nvPicPr>
                     <p:blipFill>
-                      <a:blip r:embed="rId4"/>
+                      <a:blip r:embed="rId5"/>
                       <a:stretch>
                         <a:fillRect/>
                       </a:stretch>
                     </p:blipFill>
                     <p:spPr>
                       <a:xfrm>
-                        <a:off x="5454650" y="1934845"/>
+                        <a:off x="4752599" y="1707500"/>
                         <a:ext cx="219710" cy="315595"/>
                       </a:xfrm>
                       <a:prstGeom prst="rect">
@@ -12672,22 +12832,28 @@
         <p:nvGraphicFramePr>
           <p:cNvPr id="8" name="对象 7"/>
           <p:cNvGraphicFramePr/>
-          <p:nvPr/>
+          <p:nvPr>
+            <p:extLst>
+              <p:ext uri="{D42A27DB-BD31-4B8C-83A1-F6EECF244321}">
+                <p14:modId xmlns:p14="http://schemas.microsoft.com/office/powerpoint/2010/main" val="803385061"/>
+              </p:ext>
+            </p:extLst>
+          </p:nvPr>
         </p:nvGraphicFramePr>
         <p:xfrm>
-          <a:off x="3591560" y="2250440"/>
+          <a:off x="4237274" y="2500207"/>
           <a:ext cx="3305810" cy="808355"/>
         </p:xfrm>
         <a:graphic>
           <a:graphicData uri="http://schemas.openxmlformats.org/presentationml/2006/ole">
             <mc:AlternateContent xmlns:mc="http://schemas.openxmlformats.org/markup-compatibility/2006">
               <mc:Choice xmlns:v="urn:schemas-microsoft-com:vml" Requires="v">
-                <p:oleObj spid="_x0000_s9" name="" r:id="rId5" imgW="1676400" imgH="457200" progId="Word.Document.12">
+                <p:oleObj r:id="rId6" imgW="1676400" imgH="457200" progId="Word.Document.12">
                   <p:embed/>
                 </p:oleObj>
               </mc:Choice>
               <mc:Fallback>
-                <p:oleObj name="" r:id="rId5" imgW="1676400" imgH="457200" progId="Word.Document.12">
+                <p:oleObj r:id="rId6" imgW="1676400" imgH="457200" progId="Word.Document.12">
                   <p:embed/>
                   <p:pic>
                     <p:nvPicPr>
@@ -12696,14 +12862,14 @@
                       <p:nvPr/>
                     </p:nvPicPr>
                     <p:blipFill>
-                      <a:blip r:embed="rId6"/>
+                      <a:blip r:embed="rId7"/>
                       <a:stretch>
                         <a:fillRect/>
                       </a:stretch>
                     </p:blipFill>
                     <p:spPr>
                       <a:xfrm>
-                        <a:off x="3591560" y="2250440"/>
+                        <a:off x="4237274" y="2500207"/>
                         <a:ext cx="3305810" cy="808355"/>
                       </a:xfrm>
                       <a:prstGeom prst="rect">
@@ -12731,12 +12897,12 @@
           <a:graphicData uri="http://schemas.openxmlformats.org/presentationml/2006/ole">
             <mc:AlternateContent xmlns:mc="http://schemas.openxmlformats.org/markup-compatibility/2006">
               <mc:Choice xmlns:v="urn:schemas-microsoft-com:vml" Requires="v">
-                <p:oleObj spid="_x0000_s11" name="" r:id="rId7" imgW="2743200" imgH="1209675" progId="Word.Document.12">
+                <p:oleObj r:id="rId8" imgW="2743200" imgH="1209675" progId="Word.Document.12">
                   <p:embed/>
                 </p:oleObj>
               </mc:Choice>
               <mc:Fallback>
-                <p:oleObj name="" r:id="rId7" imgW="2743200" imgH="1209675" progId="Word.Document.12">
+                <p:oleObj r:id="rId8" imgW="2743200" imgH="1209675" progId="Word.Document.12">
                   <p:embed/>
                   <p:pic>
                     <p:nvPicPr>
@@ -12745,7 +12911,7 @@
                       <p:nvPr/>
                     </p:nvPicPr>
                     <p:blipFill>
-                      <a:blip r:embed="rId8"/>
+                      <a:blip r:embed="rId9"/>
                       <a:stretch>
                         <a:fillRect/>
                       </a:stretch>
@@ -12775,7 +12941,7 @@
 </file>
 
 <file path=ppt/tags/tag1.xml><?xml version="1.0" encoding="utf-8"?>
-<p:tagLst xmlns:p="http://schemas.openxmlformats.org/presentationml/2006/main">
+<p:tagLst xmlns:a="http://schemas.openxmlformats.org/drawingml/2006/main" xmlns:r="http://schemas.openxmlformats.org/officeDocument/2006/relationships" xmlns:p="http://schemas.openxmlformats.org/presentationml/2006/main">
   <p:tag name="KSO_WM_UNIT_PLACING_PICTURE_USER_VIEWPORT" val="{&quot;height&quot;:4876.1322834645671,&quot;width&quot;:7257.4992125984254}"/>
 </p:tagLst>
 </file>
@@ -13031,6 +13197,8 @@
       </a:bgFillStyleLst>
     </a:fmtScheme>
   </a:themeElements>
+  <a:objectDefaults/>
+  <a:extraClrSchemeLst/>
   <a:extLst>
     <a:ext uri="{05A4C25C-085E-4340-85A3-A5531E510DB2}">
       <thm15:themeFamily xmlns:thm15="http://schemas.microsoft.com/office/thememl/2012/main" name="Office Theme" id="{62F939B6-93AF-4DB8-9C6B-D6C7DFDC589F}" vid="{4A3C46E8-61CC-4603-A589-7422A47A8E4A}"/>
